--- a/public/course-materials/pptx/Module-03-Premiers-pas-pratiques.pptx
+++ b/public/course-materials/pptx/Module-03-Premiers-pas-pratiques.pptx
@@ -24,9 +24,11 @@
     <p:sldId id="272" r:id="rId18"/>
     <p:sldId id="273" r:id="rId19"/>
     <p:sldId id="274" r:id="rId20"/>
+    <p:sldId id="275" r:id="rId21"/>
+    <p:sldId id="276" r:id="rId22"/>
   </p:sldIdLst>
   <p:notesMasterIdLst>
-    <p:notesMasterId r:id="rId21"/>
+    <p:notesMasterId r:id="rId23"/>
   </p:notesMasterIdLst>
   <p:sldSz cx="9144000" cy="5143500"/>
   <p:notesSz cx="5143500" cy="9144000"/>
@@ -1512,6 +1514,182 @@
             <a:fld id="{F7021451-1387-4CA6-816F-3879F97B5CBC}" type="slidenum">
               <a:rPr lang="en-US"/>
               <a:t>2</a:t>
+            </a:fld>
+            <a:endParaRPr lang="en-US"/>
+          </a:p>
+        </p:txBody>
+      </p:sp>
+    </p:spTree>
+    <p:extLst>
+      <p:ext uri="{BB962C8B-B14F-4D97-AF65-F5344CB8AC3E}">
+        <p14:creationId xmlns:p14="http://schemas.microsoft.com/office/powerpoint/2010/main" val="1024086991"/>
+      </p:ext>
+    </p:extLst>
+  </p:cSld>
+  <p:clrMapOvr>
+    <a:masterClrMapping/>
+  </p:clrMapOvr>
+</p:notes>
+</file>
+
+<file path=ppt/notesSlides/notesSlide20.xml><?xml version="1.0" encoding="utf-8"?>
+<p:notes xmlns:a="http://schemas.openxmlformats.org/drawingml/2006/main" xmlns:r="http://schemas.openxmlformats.org/officeDocument/2006/relationships" xmlns:p="http://schemas.openxmlformats.org/presentationml/2006/main">
+  <p:cSld>
+    <p:spTree>
+      <p:nvGrpSpPr>
+        <p:cNvPr id="1" name=""/>
+        <p:cNvGrpSpPr/>
+        <p:nvPr/>
+      </p:nvGrpSpPr>
+      <p:grpSpPr>
+        <a:xfrm>
+          <a:off x="0" y="0"/>
+          <a:ext cx="0" cy="0"/>
+          <a:chOff x="0" y="0"/>
+          <a:chExt cx="0" cy="0"/>
+        </a:xfrm>
+      </p:grpSpPr>
+      <p:sp>
+        <p:nvSpPr>
+          <p:cNvPr id="2" name="Slide Image Placeholder 1"/>
+          <p:cNvSpPr>
+            <a:spLocks noGrp="1" noRot="1" noChangeAspect="1"/>
+          </p:cNvSpPr>
+          <p:nvPr>
+            <p:ph type="sldImg"/>
+          </p:nvPr>
+        </p:nvSpPr>
+        <p:spPr/>
+      </p:sp>
+      <p:sp>
+        <p:nvSpPr>
+          <p:cNvPr id="3" name="Notes Placeholder 2"/>
+          <p:cNvSpPr>
+            <a:spLocks noGrp="1"/>
+          </p:cNvSpPr>
+          <p:nvPr>
+            <p:ph type="body" idx="1"/>
+          </p:nvPr>
+        </p:nvSpPr>
+        <p:spPr/>
+        <p:txBody>
+          <a:bodyPr/>
+          <a:lstStyle/>
+          <a:p>
+            <a:r>
+              <a:rPr lang="en-US" dirty="0"/>
+              <a:t/>
+            </a:r>
+            <a:endParaRPr lang="en-US" dirty="0"/>
+          </a:p>
+        </p:txBody>
+      </p:sp>
+      <p:sp>
+        <p:nvSpPr>
+          <p:cNvPr id="4" name="Slide Number Placeholder 3"/>
+          <p:cNvSpPr>
+            <a:spLocks noGrp="1"/>
+          </p:cNvSpPr>
+          <p:nvPr>
+            <p:ph type="sldNum" sz="quarter" idx="10"/>
+          </p:nvPr>
+        </p:nvSpPr>
+        <p:spPr/>
+        <p:txBody>
+          <a:bodyPr/>
+          <a:lstStyle/>
+          <a:p>
+            <a:fld id="{F7021451-1387-4CA6-816F-3879F97B5CBC}" type="slidenum">
+              <a:rPr lang="en-US"/>
+              <a:t>20</a:t>
+            </a:fld>
+            <a:endParaRPr lang="en-US"/>
+          </a:p>
+        </p:txBody>
+      </p:sp>
+    </p:spTree>
+    <p:extLst>
+      <p:ext uri="{BB962C8B-B14F-4D97-AF65-F5344CB8AC3E}">
+        <p14:creationId xmlns:p14="http://schemas.microsoft.com/office/powerpoint/2010/main" val="1024086991"/>
+      </p:ext>
+    </p:extLst>
+  </p:cSld>
+  <p:clrMapOvr>
+    <a:masterClrMapping/>
+  </p:clrMapOvr>
+</p:notes>
+</file>
+
+<file path=ppt/notesSlides/notesSlide21.xml><?xml version="1.0" encoding="utf-8"?>
+<p:notes xmlns:a="http://schemas.openxmlformats.org/drawingml/2006/main" xmlns:r="http://schemas.openxmlformats.org/officeDocument/2006/relationships" xmlns:p="http://schemas.openxmlformats.org/presentationml/2006/main">
+  <p:cSld>
+    <p:spTree>
+      <p:nvGrpSpPr>
+        <p:cNvPr id="1" name=""/>
+        <p:cNvGrpSpPr/>
+        <p:nvPr/>
+      </p:nvGrpSpPr>
+      <p:grpSpPr>
+        <a:xfrm>
+          <a:off x="0" y="0"/>
+          <a:ext cx="0" cy="0"/>
+          <a:chOff x="0" y="0"/>
+          <a:chExt cx="0" cy="0"/>
+        </a:xfrm>
+      </p:grpSpPr>
+      <p:sp>
+        <p:nvSpPr>
+          <p:cNvPr id="2" name="Slide Image Placeholder 1"/>
+          <p:cNvSpPr>
+            <a:spLocks noGrp="1" noRot="1" noChangeAspect="1"/>
+          </p:cNvSpPr>
+          <p:nvPr>
+            <p:ph type="sldImg"/>
+          </p:nvPr>
+        </p:nvSpPr>
+        <p:spPr/>
+      </p:sp>
+      <p:sp>
+        <p:nvSpPr>
+          <p:cNvPr id="3" name="Notes Placeholder 2"/>
+          <p:cNvSpPr>
+            <a:spLocks noGrp="1"/>
+          </p:cNvSpPr>
+          <p:nvPr>
+            <p:ph type="body" idx="1"/>
+          </p:nvPr>
+        </p:nvSpPr>
+        <p:spPr/>
+        <p:txBody>
+          <a:bodyPr/>
+          <a:lstStyle/>
+          <a:p>
+            <a:r>
+              <a:rPr lang="en-US" dirty="0"/>
+              <a:t/>
+            </a:r>
+            <a:endParaRPr lang="en-US" dirty="0"/>
+          </a:p>
+        </p:txBody>
+      </p:sp>
+      <p:sp>
+        <p:nvSpPr>
+          <p:cNvPr id="4" name="Slide Number Placeholder 3"/>
+          <p:cNvSpPr>
+            <a:spLocks noGrp="1"/>
+          </p:cNvSpPr>
+          <p:nvPr>
+            <p:ph type="sldNum" sz="quarter" idx="10"/>
+          </p:nvPr>
+        </p:nvSpPr>
+        <p:spPr/>
+        <p:txBody>
+          <a:bodyPr/>
+          <a:lstStyle/>
+          <a:p>
+            <a:fld id="{F7021451-1387-4CA6-816F-3879F97B5CBC}" type="slidenum">
+              <a:rPr lang="en-US"/>
+              <a:t>21</a:t>
             </a:fld>
             <a:endParaRPr lang="en-US"/>
           </a:p>
@@ -2485,28 +2663,96 @@
         </p:nvSpPr>
         <p:spPr>
           <a:xfrm>
+            <a:off x="6400800" y="-457200"/>
+            <a:ext cx="3657600" cy="3657600"/>
+          </a:xfrm>
+          <a:prstGeom prst="ellipse">
+            <a:avLst/>
+          </a:prstGeom>
+          <a:solidFill>
+            <a:srgbClr val="EC4899">
+              <a:alpha val="8000"/>
+            </a:srgbClr>
+          </a:solidFill>
+          <a:ln/>
+        </p:spPr>
+      </p:sp>
+      <p:sp>
+        <p:nvSpPr>
+          <p:cNvPr id="3" name="Shape 1"/>
+          <p:cNvSpPr/>
+          <p:nvPr/>
+        </p:nvSpPr>
+        <p:spPr>
+          <a:xfrm>
+            <a:off x="7315200" y="2286000"/>
+            <a:ext cx="2743200" cy="2743200"/>
+          </a:xfrm>
+          <a:prstGeom prst="ellipse">
+            <a:avLst/>
+          </a:prstGeom>
+          <a:solidFill>
+            <a:srgbClr val="EC4899">
+              <a:alpha val="5000"/>
+            </a:srgbClr>
+          </a:solidFill>
+          <a:ln/>
+        </p:spPr>
+      </p:sp>
+      <p:sp>
+        <p:nvSpPr>
+          <p:cNvPr id="4" name="Shape 2"/>
+          <p:cNvSpPr/>
+          <p:nvPr/>
+        </p:nvSpPr>
+        <p:spPr>
+          <a:xfrm>
             <a:off x="0" y="0"/>
-            <a:ext cx="9144000" cy="54864"/>
+            <a:ext cx="9144000" cy="45720"/>
           </a:xfrm>
           <a:prstGeom prst="rect">
             <a:avLst/>
           </a:prstGeom>
           <a:solidFill>
-            <a:srgbClr val="00BFA6"/>
+            <a:srgbClr val="EC4899"/>
           </a:solidFill>
           <a:ln/>
         </p:spPr>
       </p:sp>
-      <p:sp>
-        <p:nvSpPr>
-          <p:cNvPr id="3" name="Text 1"/>
+      <p:pic>
+        <p:nvPicPr>
+          <p:cNvPr id="5" name="Image 0" descr="preencoded.png">    </p:cNvPr>
+          <p:cNvPicPr>
+            <a:picLocks noChangeAspect="1"/>
+          </p:cNvPicPr>
+          <p:nvPr/>
+        </p:nvPicPr>
+        <p:blipFill>
+          <a:blip r:embed="rId1"/>
+          <a:stretch>
+            <a:fillRect/>
+          </a:stretch>
+        </p:blipFill>
+        <p:spPr>
+          <a:xfrm>
+            <a:off x="7132320" y="1097280"/>
+            <a:ext cx="1463040" cy="1463040"/>
+          </a:xfrm>
+          <a:prstGeom prst="rect">
+            <a:avLst/>
+          </a:prstGeom>
+        </p:spPr>
+      </p:pic>
+      <p:sp>
+        <p:nvSpPr>
+          <p:cNvPr id="6" name="Text 3"/>
           <p:cNvSpPr txBox="1"/>
           <p:nvPr/>
         </p:nvSpPr>
         <p:spPr>
           <a:xfrm>
-            <a:off x="731520" y="1097280"/>
-            <a:ext cx="2286000" cy="457200"/>
+            <a:off x="731520" y="914400"/>
+            <a:ext cx="2286000" cy="365760"/>
           </a:xfrm>
           <a:prstGeom prst="rect">
             <a:avLst/>
@@ -2522,9 +2768,9 @@
               <a:buNone/>
             </a:pPr>
             <a:r>
-              <a:rPr lang="en-US" sz="1400" b="1" spc="400" kern="0" dirty="0">
-                <a:solidFill>
-                  <a:srgbClr val="00BFA6"/>
+              <a:rPr lang="en-US" sz="1300" b="1" spc="400" kern="0" dirty="0">
+                <a:solidFill>
+                  <a:srgbClr val="EC4899"/>
                 </a:solidFill>
                 <a:latin typeface="Calibri" pitchFamily="34" charset="0"/>
                 <a:ea typeface="Calibri" pitchFamily="34" charset="-122"/>
@@ -2532,20 +2778,20 @@
               </a:rPr>
               <a:t>MODULE 3</a:t>
             </a:r>
-            <a:endParaRPr lang="en-US" sz="1400" dirty="0"/>
-          </a:p>
-        </p:txBody>
-      </p:sp>
-      <p:sp>
-        <p:nvSpPr>
-          <p:cNvPr id="4" name="Text 2"/>
+            <a:endParaRPr lang="en-US" sz="1300" dirty="0"/>
+          </a:p>
+        </p:txBody>
+      </p:sp>
+      <p:sp>
+        <p:nvSpPr>
+          <p:cNvPr id="7" name="Text 4"/>
           <p:cNvSpPr txBox="1"/>
           <p:nvPr/>
         </p:nvSpPr>
         <p:spPr>
           <a:xfrm>
-            <a:off x="731520" y="1645920"/>
-            <a:ext cx="7680960" cy="1463040"/>
+            <a:off x="731520" y="1371600"/>
+            <a:ext cx="5943600" cy="1645920"/>
           </a:xfrm>
           <a:prstGeom prst="rect">
             <a:avLst/>
@@ -2577,14 +2823,34 @@
       </p:sp>
       <p:sp>
         <p:nvSpPr>
-          <p:cNvPr id="5" name="Text 3"/>
+          <p:cNvPr id="8" name="Shape 5"/>
+          <p:cNvSpPr/>
+          <p:nvPr/>
+        </p:nvSpPr>
+        <p:spPr>
+          <a:xfrm>
+            <a:off x="731520" y="3291840"/>
+            <a:ext cx="1828800" cy="36576"/>
+          </a:xfrm>
+          <a:prstGeom prst="rect">
+            <a:avLst/>
+          </a:prstGeom>
+          <a:solidFill>
+            <a:srgbClr val="EC4899"/>
+          </a:solidFill>
+          <a:ln/>
+        </p:spPr>
+      </p:sp>
+      <p:sp>
+        <p:nvSpPr>
+          <p:cNvPr id="9" name="Text 6"/>
           <p:cNvSpPr txBox="1"/>
           <p:nvPr/>
         </p:nvSpPr>
         <p:spPr>
           <a:xfrm>
-            <a:off x="731520" y="4023360"/>
-            <a:ext cx="2743200" cy="365760"/>
+            <a:off x="731520" y="3566160"/>
+            <a:ext cx="2743200" cy="320040"/>
           </a:xfrm>
           <a:prstGeom prst="rect">
             <a:avLst/>
@@ -2600,7 +2866,7 @@
               <a:buNone/>
             </a:pPr>
             <a:r>
-              <a:rPr lang="en-US" sz="1200" spc="300" kern="0" dirty="0">
+              <a:rPr lang="en-US" sz="1100" spc="300" kern="0" dirty="0">
                 <a:solidFill>
                   <a:srgbClr val="64748B"/>
                 </a:solidFill>
@@ -2610,20 +2876,20 @@
               </a:rPr>
               <a:t>TEREX ACADEMY</a:t>
             </a:r>
-            <a:endParaRPr lang="en-US" sz="1200" dirty="0"/>
-          </a:p>
-        </p:txBody>
-      </p:sp>
-      <p:sp>
-        <p:nvSpPr>
-          <p:cNvPr id="6" name="Text 4"/>
+            <a:endParaRPr lang="en-US" sz="1100" dirty="0"/>
+          </a:p>
+        </p:txBody>
+      </p:sp>
+      <p:sp>
+        <p:nvSpPr>
+          <p:cNvPr id="10" name="Text 7"/>
           <p:cNvSpPr txBox="1"/>
           <p:nvPr/>
         </p:nvSpPr>
         <p:spPr>
           <a:xfrm>
-            <a:off x="731520" y="4389120"/>
-            <a:ext cx="3657600" cy="320040"/>
+            <a:off x="731520" y="3931920"/>
+            <a:ext cx="3657600" cy="274320"/>
           </a:xfrm>
           <a:prstGeom prst="rect">
             <a:avLst/>
@@ -2687,7 +2953,53 @@
       </p:grpSpPr>
       <p:sp>
         <p:nvSpPr>
-          <p:cNvPr id="2" name="Text 0"/>
+          <p:cNvPr id="2" name="Shape 0"/>
+          <p:cNvSpPr/>
+          <p:nvPr/>
+        </p:nvSpPr>
+        <p:spPr>
+          <a:xfrm>
+            <a:off x="7955280" y="182880"/>
+            <a:ext cx="640080" cy="640080"/>
+          </a:xfrm>
+          <a:prstGeom prst="ellipse">
+            <a:avLst/>
+          </a:prstGeom>
+          <a:solidFill>
+            <a:srgbClr val="EC4899">
+              <a:alpha val="12000"/>
+            </a:srgbClr>
+          </a:solidFill>
+          <a:ln/>
+        </p:spPr>
+      </p:sp>
+      <p:pic>
+        <p:nvPicPr>
+          <p:cNvPr id="3" name="Image 0" descr="preencoded.png">    </p:cNvPr>
+          <p:cNvPicPr>
+            <a:picLocks noChangeAspect="1"/>
+          </p:cNvPicPr>
+          <p:nvPr/>
+        </p:nvPicPr>
+        <p:blipFill>
+          <a:blip r:embed="rId1"/>
+          <a:stretch>
+            <a:fillRect/>
+          </a:stretch>
+        </p:blipFill>
+        <p:spPr>
+          <a:xfrm>
+            <a:off x="8028432" y="256032"/>
+            <a:ext cx="493776" cy="493776"/>
+          </a:xfrm>
+          <a:prstGeom prst="rect">
+            <a:avLst/>
+          </a:prstGeom>
+        </p:spPr>
+      </p:pic>
+      <p:sp>
+        <p:nvSpPr>
+          <p:cNvPr id="4" name="Text 1"/>
           <p:cNvSpPr txBox="1"/>
           <p:nvPr/>
         </p:nvSpPr>
@@ -2743,7 +3055,7 @@
                 <a:ea typeface="Calibri" pitchFamily="34" charset="-122"/>
                 <a:cs typeface="Calibri" pitchFamily="34" charset="-120"/>
               </a:rPr>
-              <a:t>Le troc (—3000 avant J.-C.) : on échangeait un mouton contre du blé. Problème : il fallait que les deux personnes veuillent exactement ce que l'autre proposait.</a:t>
+              <a:t>Le troc (—3000 avant J.-C.) : on échangeait un mouton contre du blé.</a:t>
             </a:r>
             <a:endParaRPr lang="en-US" sz="1400" dirty="0"/>
           </a:p>
@@ -2764,7 +3076,7 @@
                 <a:ea typeface="Calibri" pitchFamily="34" charset="-122"/>
                 <a:cs typeface="Calibri" pitchFamily="34" charset="-120"/>
               </a:rPr>
-              <a:t>Les monnaies-marchandises : coquillages, sel, plumes rares, cauris (utilisés en Afrique de l'Ouest jusqu'au 19e siècle). Un accord collectif sur « ce qui a de la valeur ».</a:t>
+              <a:t>Problème : il fallait que les deux personnes veuillent exactement ce que l'autre proposait.</a:t>
             </a:r>
             <a:endParaRPr lang="en-US" sz="1400" dirty="0"/>
           </a:p>
@@ -2785,7 +3097,7 @@
                 <a:ea typeface="Calibri" pitchFamily="34" charset="-122"/>
                 <a:cs typeface="Calibri" pitchFamily="34" charset="-120"/>
               </a:rPr>
-              <a:t>Les métaux précieux (—600 avant J.-C.) : l'or et l'argent deviennent la référence. Rares, durables, divisibles. Les premières pièces frappées apparaissent en Lydie (actuelle Tur...</a:t>
+              <a:t>Les monnaies-marchandises : coquillages, sel, plumes rares, cauris (utilisés en Afrique de l'Ouest jusqu'au 19e siècle).</a:t>
             </a:r>
             <a:endParaRPr lang="en-US" sz="1400" dirty="0"/>
           </a:p>
@@ -2806,7 +3118,7 @@
                 <a:ea typeface="Calibri" pitchFamily="34" charset="-122"/>
                 <a:cs typeface="Calibri" pitchFamily="34" charset="-120"/>
               </a:rPr>
-              <a:t>Le papier-monnaie (Chine, 7e siècle) : plus léger, plus pratique. Mais son acceptation dépend de la confiance dans l'émetteur (l'État).</a:t>
+              <a:t>Un accord collectif sur « ce qui a de la valeur ».</a:t>
             </a:r>
             <a:endParaRPr lang="en-US" sz="1400" dirty="0"/>
           </a:p>
@@ -2827,7 +3139,7 @@
                 <a:ea typeface="Calibri" pitchFamily="34" charset="-122"/>
                 <a:cs typeface="Calibri" pitchFamily="34" charset="-120"/>
               </a:rPr>
-              <a:t>L'étalon-or (19e siècle — 1971) : chaque billet était théoriquement échangeable contre une quantité d'or.</a:t>
+              <a:t>Les métaux précieux (—600 avant J.-C.) : l'or et l'argent deviennent la référence.</a:t>
             </a:r>
             <a:endParaRPr lang="en-US" sz="1400" dirty="0"/>
           </a:p>
@@ -2848,7 +3160,7 @@
                 <a:ea typeface="Calibri" pitchFamily="34" charset="-122"/>
                 <a:cs typeface="Calibri" pitchFamily="34" charset="-120"/>
               </a:rPr>
-              <a:t>La monnaie fiduciaire (depuis 1971) : Nixon détache le dollar de l'or. Aujourd'hui, la valeur d'un billet ne repose plus que sur la confiance dans le gouvernement qui l'émet — e...</a:t>
+              <a:t>Rares, durables, divisibles.</a:t>
             </a:r>
             <a:endParaRPr lang="en-US" sz="1400" dirty="0"/>
           </a:p>
@@ -2856,7 +3168,7 @@
       </p:sp>
       <p:sp>
         <p:nvSpPr>
-          <p:cNvPr id="3" name="Text 1"/>
+          <p:cNvPr id="5" name="Text 2"/>
           <p:cNvSpPr txBox="1"/>
           <p:nvPr/>
         </p:nvSpPr>
@@ -2887,7 +3199,7 @@
                 <a:ea typeface="Calibri" pitchFamily="34" charset="-122"/>
                 <a:cs typeface="Calibri" pitchFamily="34" charset="-120"/>
               </a:rPr>
-              <a:t>Module 3 — Lecon 2</a:t>
+              <a:t>Module 3 — Leçon 2</a:t>
             </a:r>
             <a:endParaRPr lang="en-US" sz="900" dirty="0"/>
           </a:p>
@@ -2934,7 +3246,7 @@
         <p:spPr>
           <a:xfrm>
             <a:off x="731520" y="457200"/>
-            <a:ext cx="7680960" cy="3657600"/>
+            <a:ext cx="4206240" cy="3474720"/>
           </a:xfrm>
           <a:prstGeom prst="rect">
             <a:avLst/>
@@ -2948,13 +3260,13 @@
           <a:p>
             <a:pPr marL="342900" indent="-342900">
               <a:spcAft>
-                <a:spcPts val="800"/>
+                <a:spcPts val="600"/>
               </a:spcAft>
               <a:buSzPct val="100000"/>
               <a:buChar char="•"/>
             </a:pPr>
             <a:r>
-              <a:rPr lang="en-US" sz="1400" dirty="0">
+              <a:rPr lang="en-US" sz="1300" dirty="0">
                 <a:solidFill>
                   <a:srgbClr val="FFFFFF"/>
                 </a:solidFill>
@@ -2962,20 +3274,20 @@
                 <a:ea typeface="Calibri" pitchFamily="34" charset="-122"/>
                 <a:cs typeface="Calibri" pitchFamily="34" charset="-120"/>
               </a:rPr>
-              <a:t>Le problème : les États peuvent imprimer autant de monnaie qu'ils veulent. Résultat : l'inflation grignote le pouvoir d'achat. Un franc CFA de 1990 valait beaucoup plus qu'un fr...</a:t>
-            </a:r>
-            <a:endParaRPr lang="en-US" sz="1400" dirty="0"/>
+              <a:t>Les premières pièces frappées apparaissent en Lydie (actuelle Turquie).</a:t>
+            </a:r>
+            <a:endParaRPr lang="en-US" sz="1300" dirty="0"/>
           </a:p>
           <a:p>
             <a:pPr marL="342900" indent="-342900">
               <a:spcAft>
-                <a:spcPts val="800"/>
+                <a:spcPts val="600"/>
               </a:spcAft>
               <a:buSzPct val="100000"/>
               <a:buChar char="•"/>
             </a:pPr>
             <a:r>
-              <a:rPr lang="en-US" sz="1400" dirty="0">
+              <a:rPr lang="en-US" sz="1300" dirty="0">
                 <a:solidFill>
                   <a:srgbClr val="FFFFFF"/>
                 </a:solidFill>
@@ -2983,22 +3295,110 @@
                 <a:ea typeface="Calibri" pitchFamily="34" charset="-122"/>
                 <a:cs typeface="Calibri" pitchFamily="34" charset="-120"/>
               </a:rPr>
-              <a:t>C'est de ce constat qu'est née une idée : et si on créait une monnaie que personne ne peut imprimer à volonté ?</a:t>
-            </a:r>
-            <a:endParaRPr lang="en-US" sz="1400" dirty="0"/>
-          </a:p>
-        </p:txBody>
-      </p:sp>
-      <p:sp>
-        <p:nvSpPr>
-          <p:cNvPr id="3" name="Text 1"/>
+              <a:t>Le papier-monnaie (Chine, 7e siècle) : plus léger, plus pratique.</a:t>
+            </a:r>
+            <a:endParaRPr lang="en-US" sz="1300" dirty="0"/>
+          </a:p>
+          <a:p>
+            <a:pPr marL="342900" indent="-342900">
+              <a:spcAft>
+                <a:spcPts val="600"/>
+              </a:spcAft>
+              <a:buSzPct val="100000"/>
+              <a:buChar char="•"/>
+            </a:pPr>
+            <a:r>
+              <a:rPr lang="en-US" sz="1300" dirty="0">
+                <a:solidFill>
+                  <a:srgbClr val="FFFFFF"/>
+                </a:solidFill>
+                <a:latin typeface="Calibri" pitchFamily="34" charset="0"/>
+                <a:ea typeface="Calibri" pitchFamily="34" charset="-122"/>
+                <a:cs typeface="Calibri" pitchFamily="34" charset="-120"/>
+              </a:rPr>
+              <a:t>Mais son acceptation dépend de la confiance dans l'émetteur (l'État).</a:t>
+            </a:r>
+            <a:endParaRPr lang="en-US" sz="1300" dirty="0"/>
+          </a:p>
+          <a:p>
+            <a:pPr marL="342900" indent="-342900">
+              <a:spcAft>
+                <a:spcPts val="600"/>
+              </a:spcAft>
+              <a:buSzPct val="100000"/>
+              <a:buChar char="•"/>
+            </a:pPr>
+            <a:r>
+              <a:rPr lang="en-US" sz="1300" dirty="0">
+                <a:solidFill>
+                  <a:srgbClr val="FFFFFF"/>
+                </a:solidFill>
+                <a:latin typeface="Calibri" pitchFamily="34" charset="0"/>
+                <a:ea typeface="Calibri" pitchFamily="34" charset="-122"/>
+                <a:cs typeface="Calibri" pitchFamily="34" charset="-120"/>
+              </a:rPr>
+              <a:t>L'étalon-or (19e siècle — 1971) : chaque billet était théoriquement échangeable contre une quantité d'or.</a:t>
+            </a:r>
+            <a:endParaRPr lang="en-US" sz="1300" dirty="0"/>
+          </a:p>
+        </p:txBody>
+      </p:sp>
+      <p:sp>
+        <p:nvSpPr>
+          <p:cNvPr id="3" name="Shape 1"/>
+          <p:cNvSpPr/>
+          <p:nvPr/>
+        </p:nvSpPr>
+        <p:spPr>
+          <a:xfrm>
+            <a:off x="5120640" y="457200"/>
+            <a:ext cx="3474720" cy="640080"/>
+          </a:xfrm>
+          <a:prstGeom prst="roundRect">
+            <a:avLst>
+              <a:gd name="adj" fmla="val 14286"/>
+            </a:avLst>
+          </a:prstGeom>
+          <a:solidFill>
+            <a:srgbClr val="1A2332"/>
+          </a:solidFill>
+          <a:ln/>
+        </p:spPr>
+      </p:sp>
+      <p:pic>
+        <p:nvPicPr>
+          <p:cNvPr id="4" name="Image 0" descr="preencoded.png">    </p:cNvPr>
+          <p:cNvPicPr>
+            <a:picLocks noChangeAspect="1"/>
+          </p:cNvPicPr>
+          <p:nvPr/>
+        </p:nvPicPr>
+        <p:blipFill>
+          <a:blip r:embed="rId1"/>
+          <a:stretch>
+            <a:fillRect/>
+          </a:stretch>
+        </p:blipFill>
+        <p:spPr>
+          <a:xfrm>
+            <a:off x="5257800" y="557784"/>
+            <a:ext cx="438912" cy="438912"/>
+          </a:xfrm>
+          <a:prstGeom prst="rect">
+            <a:avLst/>
+          </a:prstGeom>
+        </p:spPr>
+      </p:pic>
+      <p:sp>
+        <p:nvSpPr>
+          <p:cNvPr id="5" name="Text 2"/>
           <p:cNvSpPr txBox="1"/>
           <p:nvPr/>
         </p:nvSpPr>
         <p:spPr>
           <a:xfrm>
-            <a:off x="731520" y="4709160"/>
-            <a:ext cx="7680960" cy="274320"/>
+            <a:off x="5806440" y="457200"/>
+            <a:ext cx="2651760" cy="640080"/>
           </a:xfrm>
           <a:prstGeom prst="rect">
             <a:avLst/>
@@ -3010,21 +3410,191 @@
           <a:bodyPr wrap="square" lIns="0" tIns="0" rIns="0" bIns="0" rtlCol="0" anchor="ctr"/>
           <a:lstStyle/>
           <a:p>
-            <a:pPr algn="r" indent="0" marL="0">
+            <a:pPr indent="0" marL="0">
               <a:buNone/>
             </a:pPr>
             <a:r>
-              <a:rPr lang="en-US" sz="900" dirty="0">
-                <a:solidFill>
-                  <a:srgbClr val="64748B"/>
-                </a:solidFill>
-                <a:latin typeface="Calibri" pitchFamily="34" charset="0"/>
-                <a:ea typeface="Calibri" pitchFamily="34" charset="-122"/>
-                <a:cs typeface="Calibri" pitchFamily="34" charset="-120"/>
-              </a:rPr>
-              <a:t>Module 3 — Lecon 2</a:t>
-            </a:r>
-            <a:endParaRPr lang="en-US" sz="900" dirty="0"/>
+              <a:rPr lang="en-US" sz="1200" dirty="0">
+                <a:solidFill>
+                  <a:srgbClr val="FFFFFF"/>
+                </a:solidFill>
+                <a:latin typeface="Calibri" pitchFamily="34" charset="0"/>
+                <a:ea typeface="Calibri" pitchFamily="34" charset="-122"/>
+                <a:cs typeface="Calibri" pitchFamily="34" charset="-120"/>
+              </a:rPr>
+              <a:t>La monnaie fiduciaire (depuis 1971) : Nixon détache le dollar de l'or.</a:t>
+            </a:r>
+            <a:endParaRPr lang="en-US" sz="1200" dirty="0"/>
+          </a:p>
+        </p:txBody>
+      </p:sp>
+      <p:sp>
+        <p:nvSpPr>
+          <p:cNvPr id="6" name="Shape 3"/>
+          <p:cNvSpPr/>
+          <p:nvPr/>
+        </p:nvSpPr>
+        <p:spPr>
+          <a:xfrm>
+            <a:off x="5120640" y="1188720"/>
+            <a:ext cx="3474720" cy="640080"/>
+          </a:xfrm>
+          <a:prstGeom prst="roundRect">
+            <a:avLst>
+              <a:gd name="adj" fmla="val 14286"/>
+            </a:avLst>
+          </a:prstGeom>
+          <a:solidFill>
+            <a:srgbClr val="1A2332"/>
+          </a:solidFill>
+          <a:ln/>
+        </p:spPr>
+      </p:sp>
+      <p:pic>
+        <p:nvPicPr>
+          <p:cNvPr id="7" name="Image 1" descr="preencoded.png">    </p:cNvPr>
+          <p:cNvPicPr>
+            <a:picLocks noChangeAspect="1"/>
+          </p:cNvPicPr>
+          <p:nvPr/>
+        </p:nvPicPr>
+        <p:blipFill>
+          <a:blip r:embed="rId2"/>
+          <a:stretch>
+            <a:fillRect/>
+          </a:stretch>
+        </p:blipFill>
+        <p:spPr>
+          <a:xfrm>
+            <a:off x="5257800" y="1289304"/>
+            <a:ext cx="438912" cy="438912"/>
+          </a:xfrm>
+          <a:prstGeom prst="rect">
+            <a:avLst/>
+          </a:prstGeom>
+        </p:spPr>
+      </p:pic>
+      <p:sp>
+        <p:nvSpPr>
+          <p:cNvPr id="8" name="Text 4"/>
+          <p:cNvSpPr txBox="1"/>
+          <p:nvPr/>
+        </p:nvSpPr>
+        <p:spPr>
+          <a:xfrm>
+            <a:off x="5806440" y="1188720"/>
+            <a:ext cx="2651760" cy="640080"/>
+          </a:xfrm>
+          <a:prstGeom prst="rect">
+            <a:avLst/>
+          </a:prstGeom>
+          <a:noFill/>
+          <a:ln/>
+        </p:spPr>
+        <p:txBody>
+          <a:bodyPr wrap="square" lIns="0" tIns="0" rIns="0" bIns="0" rtlCol="0" anchor="ctr"/>
+          <a:lstStyle/>
+          <a:p>
+            <a:pPr indent="0" marL="0">
+              <a:buNone/>
+            </a:pPr>
+            <a:r>
+              <a:rPr lang="en-US" sz="1200" dirty="0">
+                <a:solidFill>
+                  <a:srgbClr val="FFFFFF"/>
+                </a:solidFill>
+                <a:latin typeface="Calibri" pitchFamily="34" charset="0"/>
+                <a:ea typeface="Calibri" pitchFamily="34" charset="-122"/>
+                <a:cs typeface="Calibri" pitchFamily="34" charset="-120"/>
+              </a:rPr>
+              <a:t>Aujourd'hui, la valeur d'un billet ne repose plus que sur la confiance dans l...</a:t>
+            </a:r>
+            <a:endParaRPr lang="en-US" sz="1200" dirty="0"/>
+          </a:p>
+        </p:txBody>
+      </p:sp>
+      <p:sp>
+        <p:nvSpPr>
+          <p:cNvPr id="9" name="Shape 5"/>
+          <p:cNvSpPr/>
+          <p:nvPr/>
+        </p:nvSpPr>
+        <p:spPr>
+          <a:xfrm>
+            <a:off x="5120640" y="1920240"/>
+            <a:ext cx="3474720" cy="640080"/>
+          </a:xfrm>
+          <a:prstGeom prst="roundRect">
+            <a:avLst>
+              <a:gd name="adj" fmla="val 14286"/>
+            </a:avLst>
+          </a:prstGeom>
+          <a:solidFill>
+            <a:srgbClr val="1A2332"/>
+          </a:solidFill>
+          <a:ln/>
+        </p:spPr>
+      </p:sp>
+      <p:pic>
+        <p:nvPicPr>
+          <p:cNvPr id="10" name="Image 2" descr="preencoded.png">    </p:cNvPr>
+          <p:cNvPicPr>
+            <a:picLocks noChangeAspect="1"/>
+          </p:cNvPicPr>
+          <p:nvPr/>
+        </p:nvPicPr>
+        <p:blipFill>
+          <a:blip r:embed="rId3"/>
+          <a:stretch>
+            <a:fillRect/>
+          </a:stretch>
+        </p:blipFill>
+        <p:spPr>
+          <a:xfrm>
+            <a:off x="5257800" y="2020824"/>
+            <a:ext cx="438912" cy="438912"/>
+          </a:xfrm>
+          <a:prstGeom prst="rect">
+            <a:avLst/>
+          </a:prstGeom>
+        </p:spPr>
+      </p:pic>
+      <p:sp>
+        <p:nvSpPr>
+          <p:cNvPr id="11" name="Text 6"/>
+          <p:cNvSpPr txBox="1"/>
+          <p:nvPr/>
+        </p:nvSpPr>
+        <p:spPr>
+          <a:xfrm>
+            <a:off x="5806440" y="1920240"/>
+            <a:ext cx="2651760" cy="640080"/>
+          </a:xfrm>
+          <a:prstGeom prst="rect">
+            <a:avLst/>
+          </a:prstGeom>
+          <a:noFill/>
+          <a:ln/>
+        </p:spPr>
+        <p:txBody>
+          <a:bodyPr wrap="square" lIns="0" tIns="0" rIns="0" bIns="0" rtlCol="0" anchor="ctr"/>
+          <a:lstStyle/>
+          <a:p>
+            <a:pPr indent="0" marL="0">
+              <a:buNone/>
+            </a:pPr>
+            <a:r>
+              <a:rPr lang="en-US" sz="1200" dirty="0">
+                <a:solidFill>
+                  <a:srgbClr val="FFFFFF"/>
+                </a:solidFill>
+                <a:latin typeface="Calibri" pitchFamily="34" charset="0"/>
+                <a:ea typeface="Calibri" pitchFamily="34" charset="-122"/>
+                <a:cs typeface="Calibri" pitchFamily="34" charset="-120"/>
+              </a:rPr>
+              <a:t>Le problème : les États peuvent imprimer autant de monnaie qu'ils veulent.</a:t>
+            </a:r>
+            <a:endParaRPr lang="en-US" sz="1200" dirty="0"/>
           </a:p>
         </p:txBody>
       </p:sp>
@@ -3039,6 +3609,332 @@
 <file path=ppt/slides/slide12.xml><?xml version="1.0" encoding="utf-8"?>
 <p:sld xmlns:a="http://schemas.openxmlformats.org/drawingml/2006/main" xmlns:r="http://schemas.openxmlformats.org/officeDocument/2006/relationships" xmlns:p="http://schemas.openxmlformats.org/presentationml/2006/main">
   <p:cSld name="Slide 12">
+    <p:bg>
+      <p:bgPr>
+        <a:solidFill>
+          <a:srgbClr val="0F1419"/>
+        </a:solidFill>
+      </p:bgPr>
+    </p:bg>
+    <p:spTree>
+      <p:nvGrpSpPr>
+        <p:cNvPr id="1" name=""/>
+        <p:cNvGrpSpPr/>
+        <p:nvPr/>
+      </p:nvGrpSpPr>
+      <p:grpSpPr>
+        <a:xfrm>
+          <a:off x="0" y="0"/>
+          <a:ext cx="0" cy="0"/>
+          <a:chOff x="0" y="0"/>
+          <a:chExt cx="0" cy="0"/>
+        </a:xfrm>
+      </p:grpSpPr>
+      <p:sp>
+        <p:nvSpPr>
+          <p:cNvPr id="2" name="Shape 0"/>
+          <p:cNvSpPr/>
+          <p:nvPr/>
+        </p:nvSpPr>
+        <p:spPr>
+          <a:xfrm>
+            <a:off x="731520" y="1005840"/>
+            <a:ext cx="3657600" cy="1371600"/>
+          </a:xfrm>
+          <a:prstGeom prst="roundRect">
+            <a:avLst>
+              <a:gd name="adj" fmla="val 6667"/>
+            </a:avLst>
+          </a:prstGeom>
+          <a:solidFill>
+            <a:srgbClr val="1A2332"/>
+          </a:solidFill>
+          <a:ln/>
+        </p:spPr>
+      </p:sp>
+      <p:pic>
+        <p:nvPicPr>
+          <p:cNvPr id="3" name="Image 0" descr="preencoded.png">    </p:cNvPr>
+          <p:cNvPicPr>
+            <a:picLocks noChangeAspect="1"/>
+          </p:cNvPicPr>
+          <p:nvPr/>
+        </p:nvPicPr>
+        <p:blipFill>
+          <a:blip r:embed="rId1"/>
+          <a:stretch>
+            <a:fillRect/>
+          </a:stretch>
+        </p:blipFill>
+        <p:spPr>
+          <a:xfrm>
+            <a:off x="868680" y="1143000"/>
+            <a:ext cx="502920" cy="502920"/>
+          </a:xfrm>
+          <a:prstGeom prst="rect">
+            <a:avLst/>
+          </a:prstGeom>
+        </p:spPr>
+      </p:pic>
+      <p:sp>
+        <p:nvSpPr>
+          <p:cNvPr id="4" name="Text 1"/>
+          <p:cNvSpPr txBox="1"/>
+          <p:nvPr/>
+        </p:nvSpPr>
+        <p:spPr>
+          <a:xfrm>
+            <a:off x="868680" y="1719072"/>
+            <a:ext cx="3383280" cy="320040"/>
+          </a:xfrm>
+          <a:prstGeom prst="rect">
+            <a:avLst/>
+          </a:prstGeom>
+          <a:noFill/>
+          <a:ln/>
+        </p:spPr>
+        <p:txBody>
+          <a:bodyPr wrap="square" lIns="0" tIns="0" rIns="0" bIns="0" rtlCol="0" anchor="t"/>
+          <a:lstStyle/>
+          <a:p>
+            <a:pPr indent="0" marL="0">
+              <a:buNone/>
+            </a:pPr>
+            <a:r>
+              <a:rPr lang="en-US" sz="1100" b="1" dirty="0">
+                <a:solidFill>
+                  <a:srgbClr val="FFFFFF"/>
+                </a:solidFill>
+                <a:latin typeface="Calibri" pitchFamily="34" charset="0"/>
+                <a:ea typeface="Calibri" pitchFamily="34" charset="-122"/>
+                <a:cs typeface="Calibri" pitchFamily="34" charset="-120"/>
+              </a:rPr>
+              <a:t>Résultat : l'inflation grignote le pouvoir d'achat.</a:t>
+            </a:r>
+            <a:endParaRPr lang="en-US" sz="1100" dirty="0"/>
+          </a:p>
+        </p:txBody>
+      </p:sp>
+      <p:sp>
+        <p:nvSpPr>
+          <p:cNvPr id="5" name="Shape 2"/>
+          <p:cNvSpPr/>
+          <p:nvPr/>
+        </p:nvSpPr>
+        <p:spPr>
+          <a:xfrm>
+            <a:off x="4754880" y="1005840"/>
+            <a:ext cx="3657600" cy="1371600"/>
+          </a:xfrm>
+          <a:prstGeom prst="roundRect">
+            <a:avLst>
+              <a:gd name="adj" fmla="val 6667"/>
+            </a:avLst>
+          </a:prstGeom>
+          <a:solidFill>
+            <a:srgbClr val="1A2332"/>
+          </a:solidFill>
+          <a:ln/>
+        </p:spPr>
+      </p:sp>
+      <p:pic>
+        <p:nvPicPr>
+          <p:cNvPr id="6" name="Image 1" descr="preencoded.png">    </p:cNvPr>
+          <p:cNvPicPr>
+            <a:picLocks noChangeAspect="1"/>
+          </p:cNvPicPr>
+          <p:nvPr/>
+        </p:nvPicPr>
+        <p:blipFill>
+          <a:blip r:embed="rId2"/>
+          <a:stretch>
+            <a:fillRect/>
+          </a:stretch>
+        </p:blipFill>
+        <p:spPr>
+          <a:xfrm>
+            <a:off x="4892040" y="1143000"/>
+            <a:ext cx="502920" cy="502920"/>
+          </a:xfrm>
+          <a:prstGeom prst="rect">
+            <a:avLst/>
+          </a:prstGeom>
+        </p:spPr>
+      </p:pic>
+      <p:sp>
+        <p:nvSpPr>
+          <p:cNvPr id="7" name="Text 3"/>
+          <p:cNvSpPr txBox="1"/>
+          <p:nvPr/>
+        </p:nvSpPr>
+        <p:spPr>
+          <a:xfrm>
+            <a:off x="4892040" y="1719072"/>
+            <a:ext cx="3383280" cy="320040"/>
+          </a:xfrm>
+          <a:prstGeom prst="rect">
+            <a:avLst/>
+          </a:prstGeom>
+          <a:noFill/>
+          <a:ln/>
+        </p:spPr>
+        <p:txBody>
+          <a:bodyPr wrap="square" lIns="0" tIns="0" rIns="0" bIns="0" rtlCol="0" anchor="t"/>
+          <a:lstStyle/>
+          <a:p>
+            <a:pPr indent="0" marL="0">
+              <a:buNone/>
+            </a:pPr>
+            <a:r>
+              <a:rPr lang="en-US" sz="1100" b="1" dirty="0">
+                <a:solidFill>
+                  <a:srgbClr val="FFFFFF"/>
+                </a:solidFill>
+                <a:latin typeface="Calibri" pitchFamily="34" charset="0"/>
+                <a:ea typeface="Calibri" pitchFamily="34" charset="-122"/>
+                <a:cs typeface="Calibri" pitchFamily="34" charset="-120"/>
+              </a:rPr>
+              <a:t>Un franc CFA de 1990 valait beaucoup plus qu'un franc CFA...</a:t>
+            </a:r>
+            <a:endParaRPr lang="en-US" sz="1100" dirty="0"/>
+          </a:p>
+        </p:txBody>
+      </p:sp>
+      <p:sp>
+        <p:nvSpPr>
+          <p:cNvPr id="8" name="Shape 4"/>
+          <p:cNvSpPr/>
+          <p:nvPr/>
+        </p:nvSpPr>
+        <p:spPr>
+          <a:xfrm>
+            <a:off x="731520" y="2514600"/>
+            <a:ext cx="3657600" cy="1371600"/>
+          </a:xfrm>
+          <a:prstGeom prst="roundRect">
+            <a:avLst>
+              <a:gd name="adj" fmla="val 6667"/>
+            </a:avLst>
+          </a:prstGeom>
+          <a:solidFill>
+            <a:srgbClr val="1A2332"/>
+          </a:solidFill>
+          <a:ln/>
+        </p:spPr>
+      </p:sp>
+      <p:pic>
+        <p:nvPicPr>
+          <p:cNvPr id="9" name="Image 2" descr="preencoded.png">    </p:cNvPr>
+          <p:cNvPicPr>
+            <a:picLocks noChangeAspect="1"/>
+          </p:cNvPicPr>
+          <p:nvPr/>
+        </p:nvPicPr>
+        <p:blipFill>
+          <a:blip r:embed="rId3"/>
+          <a:stretch>
+            <a:fillRect/>
+          </a:stretch>
+        </p:blipFill>
+        <p:spPr>
+          <a:xfrm>
+            <a:off x="868680" y="2651760"/>
+            <a:ext cx="502920" cy="502920"/>
+          </a:xfrm>
+          <a:prstGeom prst="rect">
+            <a:avLst/>
+          </a:prstGeom>
+        </p:spPr>
+      </p:pic>
+      <p:sp>
+        <p:nvSpPr>
+          <p:cNvPr id="10" name="Text 5"/>
+          <p:cNvSpPr txBox="1"/>
+          <p:nvPr/>
+        </p:nvSpPr>
+        <p:spPr>
+          <a:xfrm>
+            <a:off x="868680" y="3227832"/>
+            <a:ext cx="3383280" cy="320040"/>
+          </a:xfrm>
+          <a:prstGeom prst="rect">
+            <a:avLst/>
+          </a:prstGeom>
+          <a:noFill/>
+          <a:ln/>
+        </p:spPr>
+        <p:txBody>
+          <a:bodyPr wrap="square" lIns="0" tIns="0" rIns="0" bIns="0" rtlCol="0" anchor="t"/>
+          <a:lstStyle/>
+          <a:p>
+            <a:pPr indent="0" marL="0">
+              <a:buNone/>
+            </a:pPr>
+            <a:r>
+              <a:rPr lang="en-US" sz="1100" b="1" dirty="0">
+                <a:solidFill>
+                  <a:srgbClr val="FFFFFF"/>
+                </a:solidFill>
+                <a:latin typeface="Calibri" pitchFamily="34" charset="0"/>
+                <a:ea typeface="Calibri" pitchFamily="34" charset="-122"/>
+                <a:cs typeface="Calibri" pitchFamily="34" charset="-120"/>
+              </a:rPr>
+              <a:t>C'est de ce constat qu'est née une idée : et si on créait...</a:t>
+            </a:r>
+            <a:endParaRPr lang="en-US" sz="1100" dirty="0"/>
+          </a:p>
+        </p:txBody>
+      </p:sp>
+      <p:sp>
+        <p:nvSpPr>
+          <p:cNvPr id="11" name="Text 6"/>
+          <p:cNvSpPr txBox="1"/>
+          <p:nvPr/>
+        </p:nvSpPr>
+        <p:spPr>
+          <a:xfrm>
+            <a:off x="868680" y="3520440"/>
+            <a:ext cx="3383280" cy="274320"/>
+          </a:xfrm>
+          <a:prstGeom prst="rect">
+            <a:avLst/>
+          </a:prstGeom>
+          <a:noFill/>
+          <a:ln/>
+        </p:spPr>
+        <p:txBody>
+          <a:bodyPr wrap="square" lIns="0" tIns="0" rIns="0" bIns="0" rtlCol="0" anchor="t"/>
+          <a:lstStyle/>
+          <a:p>
+            <a:pPr indent="0" marL="0">
+              <a:buNone/>
+            </a:pPr>
+            <a:r>
+              <a:rPr lang="en-US" sz="900" dirty="0">
+                <a:solidFill>
+                  <a:srgbClr val="94A3B8"/>
+                </a:solidFill>
+                <a:latin typeface="Calibri" pitchFamily="34" charset="0"/>
+                <a:ea typeface="Calibri" pitchFamily="34" charset="-122"/>
+                <a:cs typeface="Calibri" pitchFamily="34" charset="-120"/>
+              </a:rPr>
+              <a:t>que personne ne peut imprimer à volonté ?</a:t>
+            </a:r>
+            <a:endParaRPr lang="en-US" sz="900" dirty="0"/>
+          </a:p>
+        </p:txBody>
+      </p:sp>
+    </p:spTree>
+  </p:cSld>
+  <p:clrMapOvr>
+    <a:masterClrMapping/>
+  </p:clrMapOvr>
+</p:sld>
+</file>
+
+<file path=ppt/slides/slide13.xml><?xml version="1.0" encoding="utf-8"?>
+<p:sld xmlns:a="http://schemas.openxmlformats.org/drawingml/2006/main" xmlns:r="http://schemas.openxmlformats.org/officeDocument/2006/relationships" xmlns:p="http://schemas.openxmlformats.org/presentationml/2006/main">
+  <p:cSld name="Slide 13">
     <p:bg>
       <p:bgPr>
         <a:solidFill>
@@ -3060,35 +3956,105 @@
           <a:chExt cx="0" cy="0"/>
         </a:xfrm>
       </p:grpSpPr>
-      <p:sp>
-        <p:nvSpPr>
-          <p:cNvPr id="2" name="Shape 0"/>
+      <p:pic>
+        <p:nvPicPr>
+          <p:cNvPr id="2" name="Image 0" descr="preencoded.png">    </p:cNvPr>
+          <p:cNvPicPr>
+            <a:picLocks noChangeAspect="1"/>
+          </p:cNvPicPr>
+          <p:nvPr/>
+        </p:nvPicPr>
+        <p:blipFill>
+          <a:blip r:embed="rId1"/>
+          <a:stretch>
+            <a:fillRect/>
+          </a:stretch>
+        </p:blipFill>
+        <p:spPr>
+          <a:xfrm>
+            <a:off x="7315200" y="548640"/>
+            <a:ext cx="1280160" cy="1280160"/>
+          </a:xfrm>
+          <a:prstGeom prst="rect">
+            <a:avLst/>
+          </a:prstGeom>
+        </p:spPr>
+      </p:pic>
+      <p:pic>
+        <p:nvPicPr>
+          <p:cNvPr id="3" name="Image 1" descr="preencoded.png">    </p:cNvPr>
+          <p:cNvPicPr>
+            <a:picLocks noChangeAspect="1"/>
+          </p:cNvPicPr>
+          <p:nvPr/>
+        </p:nvPicPr>
+        <p:blipFill>
+          <a:blip r:embed="rId2"/>
+          <a:stretch>
+            <a:fillRect/>
+          </a:stretch>
+        </p:blipFill>
+        <p:spPr>
+          <a:xfrm>
+            <a:off x="7772400" y="2011680"/>
+            <a:ext cx="822960" cy="822960"/>
+          </a:xfrm>
+          <a:prstGeom prst="rect">
+            <a:avLst/>
+          </a:prstGeom>
+        </p:spPr>
+      </p:pic>
+      <p:sp>
+        <p:nvSpPr>
+          <p:cNvPr id="4" name="Shape 0"/>
           <p:cNvSpPr/>
           <p:nvPr/>
         </p:nvSpPr>
         <p:spPr>
           <a:xfrm>
-            <a:off x="548640" y="914400"/>
-            <a:ext cx="45720" cy="2560320"/>
-          </a:xfrm>
-          <a:prstGeom prst="rect">
+            <a:off x="6583680" y="-274320"/>
+            <a:ext cx="3200400" cy="3200400"/>
+          </a:xfrm>
+          <a:prstGeom prst="ellipse">
             <a:avLst/>
           </a:prstGeom>
           <a:solidFill>
-            <a:srgbClr val="00BFA6"/>
+            <a:srgbClr val="EC4899">
+              <a:alpha val="6000"/>
+            </a:srgbClr>
           </a:solidFill>
           <a:ln/>
         </p:spPr>
       </p:sp>
       <p:sp>
         <p:nvSpPr>
-          <p:cNvPr id="3" name="Text 1"/>
+          <p:cNvPr id="5" name="Shape 1"/>
+          <p:cNvSpPr/>
+          <p:nvPr/>
+        </p:nvSpPr>
+        <p:spPr>
+          <a:xfrm>
+            <a:off x="731520" y="914400"/>
+            <a:ext cx="45720" cy="2194560"/>
+          </a:xfrm>
+          <a:prstGeom prst="rect">
+            <a:avLst/>
+          </a:prstGeom>
+          <a:solidFill>
+            <a:srgbClr val="EC4899"/>
+          </a:solidFill>
+          <a:ln/>
+        </p:spPr>
+      </p:sp>
+      <p:sp>
+        <p:nvSpPr>
+          <p:cNvPr id="6" name="Text 2"/>
           <p:cNvSpPr txBox="1"/>
           <p:nvPr/>
         </p:nvSpPr>
         <p:spPr>
           <a:xfrm>
-            <a:off x="822960" y="1097280"/>
+            <a:off x="960120" y="914400"/>
             <a:ext cx="2743200" cy="365760"/>
           </a:xfrm>
           <a:prstGeom prst="rect">
@@ -3107,13 +4073,13 @@
             <a:r>
               <a:rPr lang="en-US" sz="1200" b="1" spc="200" kern="0" dirty="0">
                 <a:solidFill>
-                  <a:srgbClr val="00BFA6"/>
-                </a:solidFill>
-                <a:latin typeface="Calibri" pitchFamily="34" charset="0"/>
-                <a:ea typeface="Calibri" pitchFamily="34" charset="-122"/>
-                <a:cs typeface="Calibri" pitchFamily="34" charset="-120"/>
-              </a:rPr>
-              <a:t>Lecon 3 / 4</a:t>
+                  <a:srgbClr val="EC4899"/>
+                </a:solidFill>
+                <a:latin typeface="Calibri" pitchFamily="34" charset="0"/>
+                <a:ea typeface="Calibri" pitchFamily="34" charset="-122"/>
+                <a:cs typeface="Calibri" pitchFamily="34" charset="-120"/>
+              </a:rPr>
+              <a:t>Leçon 3 / 4</a:t>
             </a:r>
             <a:endParaRPr lang="en-US" sz="1200" dirty="0"/>
           </a:p>
@@ -3121,14 +4087,14 @@
       </p:sp>
       <p:sp>
         <p:nvSpPr>
-          <p:cNvPr id="4" name="Text 2"/>
+          <p:cNvPr id="7" name="Text 3"/>
           <p:cNvSpPr txBox="1"/>
           <p:nvPr/>
         </p:nvSpPr>
         <p:spPr>
           <a:xfrm>
-            <a:off x="822960" y="1645920"/>
-            <a:ext cx="7498080" cy="1280160"/>
+            <a:off x="960120" y="1371600"/>
+            <a:ext cx="6217920" cy="1463040"/>
           </a:xfrm>
           <a:prstGeom prst="rect">
             <a:avLst/>
@@ -3144,7 +4110,7 @@
               <a:buNone/>
             </a:pPr>
             <a:r>
-              <a:rPr lang="en-US" sz="3000" b="1" dirty="0">
+              <a:rPr lang="en-US" sz="2800" b="1" dirty="0">
                 <a:solidFill>
                   <a:srgbClr val="FFFFFF"/>
                 </a:solidFill>
@@ -3154,19 +4120,19 @@
               </a:rPr>
               <a:t>2008, la naissance de Bitcoin</a:t>
             </a:r>
-            <a:endParaRPr lang="en-US" sz="3000" dirty="0"/>
-          </a:p>
-        </p:txBody>
-      </p:sp>
-      <p:sp>
-        <p:nvSpPr>
-          <p:cNvPr id="5" name="Text 3"/>
+            <a:endParaRPr lang="en-US" sz="2800" dirty="0"/>
+          </a:p>
+        </p:txBody>
+      </p:sp>
+      <p:sp>
+        <p:nvSpPr>
+          <p:cNvPr id="8" name="Text 4"/>
           <p:cNvSpPr txBox="1"/>
           <p:nvPr/>
         </p:nvSpPr>
         <p:spPr>
           <a:xfrm>
-            <a:off x="822960" y="4206240"/>
+            <a:off x="960120" y="4114800"/>
             <a:ext cx="5486400" cy="320040"/>
           </a:xfrm>
           <a:prstGeom prst="rect">
@@ -3194,246 +4160,6 @@
               <a:t>Premiers pas pratiques</a:t>
             </a:r>
             <a:endParaRPr lang="en-US" sz="1100" dirty="0"/>
-          </a:p>
-        </p:txBody>
-      </p:sp>
-    </p:spTree>
-  </p:cSld>
-  <p:clrMapOvr>
-    <a:masterClrMapping/>
-  </p:clrMapOvr>
-</p:sld>
-</file>
-
-<file path=ppt/slides/slide13.xml><?xml version="1.0" encoding="utf-8"?>
-<p:sld xmlns:a="http://schemas.openxmlformats.org/drawingml/2006/main" xmlns:r="http://schemas.openxmlformats.org/officeDocument/2006/relationships" xmlns:p="http://schemas.openxmlformats.org/presentationml/2006/main">
-  <p:cSld name="Slide 13">
-    <p:bg>
-      <p:bgPr>
-        <a:solidFill>
-          <a:srgbClr val="0F1419"/>
-        </a:solidFill>
-      </p:bgPr>
-    </p:bg>
-    <p:spTree>
-      <p:nvGrpSpPr>
-        <p:cNvPr id="1" name=""/>
-        <p:cNvGrpSpPr/>
-        <p:nvPr/>
-      </p:nvGrpSpPr>
-      <p:grpSpPr>
-        <a:xfrm>
-          <a:off x="0" y="0"/>
-          <a:ext cx="0" cy="0"/>
-          <a:chOff x="0" y="0"/>
-          <a:chExt cx="0" cy="0"/>
-        </a:xfrm>
-      </p:grpSpPr>
-      <p:sp>
-        <p:nvSpPr>
-          <p:cNvPr id="2" name="Text 0"/>
-          <p:cNvSpPr txBox="1"/>
-          <p:nvPr/>
-        </p:nvSpPr>
-        <p:spPr>
-          <a:xfrm>
-            <a:off x="731520" y="457200"/>
-            <a:ext cx="7680960" cy="3657600"/>
-          </a:xfrm>
-          <a:prstGeom prst="rect">
-            <a:avLst/>
-          </a:prstGeom>
-          <a:noFill/>
-          <a:ln/>
-        </p:spPr>
-        <p:txBody>
-          <a:bodyPr wrap="square" lIns="0" tIns="0" rIns="0" bIns="0" rtlCol="0" anchor="t"/>
-          <a:lstStyle/>
-          <a:p>
-            <a:pPr marL="342900" indent="-342900">
-              <a:spcAft>
-                <a:spcPts val="800"/>
-              </a:spcAft>
-              <a:buSzPct val="100000"/>
-              <a:buChar char="•"/>
-            </a:pPr>
-            <a:r>
-              <a:rPr lang="en-US" sz="1400" dirty="0">
-                <a:solidFill>
-                  <a:srgbClr val="FFFFFF"/>
-                </a:solidFill>
-                <a:latin typeface="Calibri" pitchFamily="34" charset="0"/>
-                <a:ea typeface="Calibri" pitchFamily="34" charset="-122"/>
-                <a:cs typeface="Calibri" pitchFamily="34" charset="-120"/>
-              </a:rPr>
-              <a:t>Octobre 2008. Le monde traverse la pire crise financière depuis 1929. La banque Lehman Brothers vient de faire faillite. Des millions de gens perdent leurs économies. Les États ...</a:t>
-            </a:r>
-            <a:endParaRPr lang="en-US" sz="1400" dirty="0"/>
-          </a:p>
-          <a:p>
-            <a:pPr marL="342900" indent="-342900">
-              <a:spcAft>
-                <a:spcPts val="800"/>
-              </a:spcAft>
-              <a:buSzPct val="100000"/>
-              <a:buChar char="•"/>
-            </a:pPr>
-            <a:r>
-              <a:rPr lang="en-US" sz="1400" dirty="0">
-                <a:solidFill>
-                  <a:srgbClr val="FFFFFF"/>
-                </a:solidFill>
-                <a:latin typeface="Calibri" pitchFamily="34" charset="0"/>
-                <a:ea typeface="Calibri" pitchFamily="34" charset="-122"/>
-                <a:cs typeface="Calibri" pitchFamily="34" charset="-120"/>
-              </a:rPr>
-              <a:t>Le 31 octobre 2008, une personne (ou un groupe) sous le pseudonyme Satoshi Nakamoto publie un document de 9 pages : « Bitcoin: A Peer-to-Peer Electronic Cash System ».</a:t>
-            </a:r>
-            <a:endParaRPr lang="en-US" sz="1400" dirty="0"/>
-          </a:p>
-          <a:p>
-            <a:pPr marL="342900" indent="-342900">
-              <a:spcAft>
-                <a:spcPts val="800"/>
-              </a:spcAft>
-              <a:buSzPct val="100000"/>
-              <a:buChar char="•"/>
-            </a:pPr>
-            <a:r>
-              <a:rPr lang="en-US" sz="1400" dirty="0">
-                <a:solidFill>
-                  <a:srgbClr val="FFFFFF"/>
-                </a:solidFill>
-                <a:latin typeface="Calibri" pitchFamily="34" charset="0"/>
-                <a:ea typeface="Calibri" pitchFamily="34" charset="-122"/>
-                <a:cs typeface="Calibri" pitchFamily="34" charset="-120"/>
-              </a:rPr>
-              <a:t>L'idée est révolutionnaire : créer une monnaie électronique qui fonctionne sans banque, sans État, sans intermédiaire. Une monnaie dont la quantité totale est fixée à l'avance (...</a:t>
-            </a:r>
-            <a:endParaRPr lang="en-US" sz="1400" dirty="0"/>
-          </a:p>
-          <a:p>
-            <a:pPr marL="342900" indent="-342900">
-              <a:spcAft>
-                <a:spcPts val="800"/>
-              </a:spcAft>
-              <a:buSzPct val="100000"/>
-              <a:buChar char="•"/>
-            </a:pPr>
-            <a:r>
-              <a:rPr lang="en-US" sz="1400" dirty="0">
-                <a:solidFill>
-                  <a:srgbClr val="FFFFFF"/>
-                </a:solidFill>
-                <a:latin typeface="Calibri" pitchFamily="34" charset="0"/>
-                <a:ea typeface="Calibri" pitchFamily="34" charset="-122"/>
-                <a:cs typeface="Calibri" pitchFamily="34" charset="-120"/>
-              </a:rPr>
-              <a:t>Le 3 janvier 2009, le premier bloc Bitcoin est créé. Satoshi y inscrit un message :</a:t>
-            </a:r>
-            <a:endParaRPr lang="en-US" sz="1400" dirty="0"/>
-          </a:p>
-          <a:p>
-            <a:pPr marL="342900" indent="-342900">
-              <a:spcAft>
-                <a:spcPts val="800"/>
-              </a:spcAft>
-              <a:buSzPct val="100000"/>
-              <a:buChar char="•"/>
-            </a:pPr>
-            <a:r>
-              <a:rPr lang="en-US" sz="1400" dirty="0">
-                <a:solidFill>
-                  <a:srgbClr val="FFFFFF"/>
-                </a:solidFill>
-                <a:latin typeface="Calibri" pitchFamily="34" charset="0"/>
-                <a:ea typeface="Calibri" pitchFamily="34" charset="-122"/>
-                <a:cs typeface="Calibri" pitchFamily="34" charset="-120"/>
-              </a:rPr>
-              <a:t>&gt; « The Times 03/Jan/2009 Chancellor on brink of second bailout for banks »</a:t>
-            </a:r>
-            <a:endParaRPr lang="en-US" sz="1400" dirty="0"/>
-          </a:p>
-          <a:p>
-            <a:pPr marL="342900" indent="-342900">
-              <a:spcAft>
-                <a:spcPts val="800"/>
-              </a:spcAft>
-              <a:buSzPct val="100000"/>
-              <a:buChar char="•"/>
-            </a:pPr>
-            <a:r>
-              <a:rPr lang="en-US" sz="1400" dirty="0">
-                <a:solidFill>
-                  <a:srgbClr val="FFFFFF"/>
-                </a:solidFill>
-                <a:latin typeface="Calibri" pitchFamily="34" charset="0"/>
-                <a:ea typeface="Calibri" pitchFamily="34" charset="-122"/>
-                <a:cs typeface="Calibri" pitchFamily="34" charset="-120"/>
-              </a:rPr>
-              <a:t>Une référence à la une du journal britannique The Times ce jour-là — les banques sont à nouveau au bord du gouffre. Un pied-de-nez au système.</a:t>
-            </a:r>
-            <a:endParaRPr lang="en-US" sz="1400" dirty="0"/>
-          </a:p>
-          <a:p>
-            <a:pPr marL="342900" indent="-342900">
-              <a:spcAft>
-                <a:spcPts val="800"/>
-              </a:spcAft>
-              <a:buSzPct val="100000"/>
-              <a:buChar char="•"/>
-            </a:pPr>
-            <a:r>
-              <a:rPr lang="en-US" sz="1400" dirty="0">
-                <a:solidFill>
-                  <a:srgbClr val="FFFFFF"/>
-                </a:solidFill>
-                <a:latin typeface="Calibri" pitchFamily="34" charset="0"/>
-                <a:ea typeface="Calibri" pitchFamily="34" charset="-122"/>
-                <a:cs typeface="Calibri" pitchFamily="34" charset="-120"/>
-              </a:rPr>
-              <a:t>Jusqu'en 2010, Bitcoin ne valait rien. La première transaction commerciale connue : un développeur a payé 10 000 BTC pour deux pizzas. À l'époque, cela valait 40 dollars. Aujour...</a:t>
-            </a:r>
-            <a:endParaRPr lang="en-US" sz="1400" dirty="0"/>
-          </a:p>
-        </p:txBody>
-      </p:sp>
-      <p:sp>
-        <p:nvSpPr>
-          <p:cNvPr id="3" name="Text 1"/>
-          <p:cNvSpPr txBox="1"/>
-          <p:nvPr/>
-        </p:nvSpPr>
-        <p:spPr>
-          <a:xfrm>
-            <a:off x="731520" y="4709160"/>
-            <a:ext cx="7680960" cy="274320"/>
-          </a:xfrm>
-          <a:prstGeom prst="rect">
-            <a:avLst/>
-          </a:prstGeom>
-          <a:noFill/>
-          <a:ln/>
-        </p:spPr>
-        <p:txBody>
-          <a:bodyPr wrap="square" lIns="0" tIns="0" rIns="0" bIns="0" rtlCol="0" anchor="ctr"/>
-          <a:lstStyle/>
-          <a:p>
-            <a:pPr algn="r" indent="0" marL="0">
-              <a:buNone/>
-            </a:pPr>
-            <a:r>
-              <a:rPr lang="en-US" sz="900" dirty="0">
-                <a:solidFill>
-                  <a:srgbClr val="64748B"/>
-                </a:solidFill>
-                <a:latin typeface="Calibri" pitchFamily="34" charset="0"/>
-                <a:ea typeface="Calibri" pitchFamily="34" charset="-122"/>
-                <a:cs typeface="Calibri" pitchFamily="34" charset="-120"/>
-              </a:rPr>
-              <a:t>Module 3 — Lecon 3</a:t>
-            </a:r>
-            <a:endParaRPr lang="en-US" sz="900" dirty="0"/>
           </a:p>
         </p:txBody>
       </p:sp>
@@ -3471,7 +4197,53 @@
       </p:grpSpPr>
       <p:sp>
         <p:nvSpPr>
-          <p:cNvPr id="2" name="Text 0"/>
+          <p:cNvPr id="2" name="Shape 0"/>
+          <p:cNvSpPr/>
+          <p:nvPr/>
+        </p:nvSpPr>
+        <p:spPr>
+          <a:xfrm>
+            <a:off x="7955280" y="182880"/>
+            <a:ext cx="640080" cy="640080"/>
+          </a:xfrm>
+          <a:prstGeom prst="ellipse">
+            <a:avLst/>
+          </a:prstGeom>
+          <a:solidFill>
+            <a:srgbClr val="EC4899">
+              <a:alpha val="12000"/>
+            </a:srgbClr>
+          </a:solidFill>
+          <a:ln/>
+        </p:spPr>
+      </p:sp>
+      <p:pic>
+        <p:nvPicPr>
+          <p:cNvPr id="3" name="Image 0" descr="preencoded.png">    </p:cNvPr>
+          <p:cNvPicPr>
+            <a:picLocks noChangeAspect="1"/>
+          </p:cNvPicPr>
+          <p:nvPr/>
+        </p:nvPicPr>
+        <p:blipFill>
+          <a:blip r:embed="rId1"/>
+          <a:stretch>
+            <a:fillRect/>
+          </a:stretch>
+        </p:blipFill>
+        <p:spPr>
+          <a:xfrm>
+            <a:off x="8028432" y="256032"/>
+            <a:ext cx="493776" cy="493776"/>
+          </a:xfrm>
+          <a:prstGeom prst="rect">
+            <a:avLst/>
+          </a:prstGeom>
+        </p:spPr>
+      </p:pic>
+      <p:sp>
+        <p:nvSpPr>
+          <p:cNvPr id="4" name="Text 1"/>
           <p:cNvSpPr txBox="1"/>
           <p:nvPr/>
         </p:nvSpPr>
@@ -3506,7 +4278,7 @@
                 <a:ea typeface="Calibri" pitchFamily="34" charset="-122"/>
                 <a:cs typeface="Calibri" pitchFamily="34" charset="-120"/>
               </a:rPr>
-              <a:t>En 2011, Satoshi disparaît définitivement d'internet. Personne ne sait qui il est vraiment. Il aurait environ 1 million de bitcoins — mais n'en a jamais bougé un seul.</a:t>
+              <a:t>Octobre 2008.</a:t>
             </a:r>
             <a:endParaRPr lang="en-US" sz="1400" dirty="0"/>
           </a:p>
@@ -3527,15 +4299,120 @@
                 <a:ea typeface="Calibri" pitchFamily="34" charset="-122"/>
                 <a:cs typeface="Calibri" pitchFamily="34" charset="-120"/>
               </a:rPr>
-              <a:t>Bitcoin, lui, ne s'est jamais arrêté. Depuis 15 ans, le réseau fonctionne 24h/24, sans interruption, sans faille.</a:t>
+              <a:t>Le monde traverse la pire crise financière depuis 1929.</a:t>
             </a:r>
             <a:endParaRPr lang="en-US" sz="1400" dirty="0"/>
           </a:p>
-        </p:txBody>
-      </p:sp>
-      <p:sp>
-        <p:nvSpPr>
-          <p:cNvPr id="3" name="Text 1"/>
+          <a:p>
+            <a:pPr marL="342900" indent="-342900">
+              <a:spcAft>
+                <a:spcPts val="800"/>
+              </a:spcAft>
+              <a:buSzPct val="100000"/>
+              <a:buChar char="•"/>
+            </a:pPr>
+            <a:r>
+              <a:rPr lang="en-US" sz="1400" dirty="0">
+                <a:solidFill>
+                  <a:srgbClr val="FFFFFF"/>
+                </a:solidFill>
+                <a:latin typeface="Calibri" pitchFamily="34" charset="0"/>
+                <a:ea typeface="Calibri" pitchFamily="34" charset="-122"/>
+                <a:cs typeface="Calibri" pitchFamily="34" charset="-120"/>
+              </a:rPr>
+              <a:t>La banque Lehman Brothers vient de faire faillite.</a:t>
+            </a:r>
+            <a:endParaRPr lang="en-US" sz="1400" dirty="0"/>
+          </a:p>
+          <a:p>
+            <a:pPr marL="342900" indent="-342900">
+              <a:spcAft>
+                <a:spcPts val="800"/>
+              </a:spcAft>
+              <a:buSzPct val="100000"/>
+              <a:buChar char="•"/>
+            </a:pPr>
+            <a:r>
+              <a:rPr lang="en-US" sz="1400" dirty="0">
+                <a:solidFill>
+                  <a:srgbClr val="FFFFFF"/>
+                </a:solidFill>
+                <a:latin typeface="Calibri" pitchFamily="34" charset="0"/>
+                <a:ea typeface="Calibri" pitchFamily="34" charset="-122"/>
+                <a:cs typeface="Calibri" pitchFamily="34" charset="-120"/>
+              </a:rPr>
+              <a:t>Des millions de gens perdent leurs économies.</a:t>
+            </a:r>
+            <a:endParaRPr lang="en-US" sz="1400" dirty="0"/>
+          </a:p>
+          <a:p>
+            <a:pPr marL="342900" indent="-342900">
+              <a:spcAft>
+                <a:spcPts val="800"/>
+              </a:spcAft>
+              <a:buSzPct val="100000"/>
+              <a:buChar char="•"/>
+            </a:pPr>
+            <a:r>
+              <a:rPr lang="en-US" sz="1400" dirty="0">
+                <a:solidFill>
+                  <a:srgbClr val="FFFFFF"/>
+                </a:solidFill>
+                <a:latin typeface="Calibri" pitchFamily="34" charset="0"/>
+                <a:ea typeface="Calibri" pitchFamily="34" charset="-122"/>
+                <a:cs typeface="Calibri" pitchFamily="34" charset="-120"/>
+              </a:rPr>
+              <a:t>Les États impriment des milliards pour sauver les banques.</a:t>
+            </a:r>
+            <a:endParaRPr lang="en-US" sz="1400" dirty="0"/>
+          </a:p>
+          <a:p>
+            <a:pPr marL="342900" indent="-342900">
+              <a:spcAft>
+                <a:spcPts val="800"/>
+              </a:spcAft>
+              <a:buSzPct val="100000"/>
+              <a:buChar char="•"/>
+            </a:pPr>
+            <a:r>
+              <a:rPr lang="en-US" sz="1400" dirty="0">
+                <a:solidFill>
+                  <a:srgbClr val="FFFFFF"/>
+                </a:solidFill>
+                <a:latin typeface="Calibri" pitchFamily="34" charset="0"/>
+                <a:ea typeface="Calibri" pitchFamily="34" charset="-122"/>
+                <a:cs typeface="Calibri" pitchFamily="34" charset="-120"/>
+              </a:rPr>
+              <a:t>Le 31 octobre 2008, une personne (ou un groupe) sous le pseudonyme Satoshi Nakamoto publie un document de 9 pages : « Bitcoin: A Peer-to-Peer Electronic Cash System ».</a:t>
+            </a:r>
+            <a:endParaRPr lang="en-US" sz="1400" dirty="0"/>
+          </a:p>
+          <a:p>
+            <a:pPr marL="342900" indent="-342900">
+              <a:spcAft>
+                <a:spcPts val="800"/>
+              </a:spcAft>
+              <a:buSzPct val="100000"/>
+              <a:buChar char="•"/>
+            </a:pPr>
+            <a:r>
+              <a:rPr lang="en-US" sz="1400" dirty="0">
+                <a:solidFill>
+                  <a:srgbClr val="FFFFFF"/>
+                </a:solidFill>
+                <a:latin typeface="Calibri" pitchFamily="34" charset="0"/>
+                <a:ea typeface="Calibri" pitchFamily="34" charset="-122"/>
+                <a:cs typeface="Calibri" pitchFamily="34" charset="-120"/>
+              </a:rPr>
+              <a:t>L'idée est révolutionnaire : créer une monnaie électronique qui fonctionne sans banque, sans État, sans intermédiaire.</a:t>
+            </a:r>
+            <a:endParaRPr lang="en-US" sz="1400" dirty="0"/>
+          </a:p>
+        </p:txBody>
+      </p:sp>
+      <p:sp>
+        <p:nvSpPr>
+          <p:cNvPr id="5" name="Text 2"/>
           <p:cNvSpPr txBox="1"/>
           <p:nvPr/>
         </p:nvSpPr>
@@ -3566,7 +4443,7 @@
                 <a:ea typeface="Calibri" pitchFamily="34" charset="-122"/>
                 <a:cs typeface="Calibri" pitchFamily="34" charset="-120"/>
               </a:rPr>
-              <a:t>Module 3 — Lecon 3</a:t>
+              <a:t>Module 3 — Leçon 3</a:t>
             </a:r>
             <a:endParaRPr lang="en-US" sz="900" dirty="0"/>
           </a:p>
@@ -3586,7 +4463,7 @@
     <p:bg>
       <p:bgPr>
         <a:solidFill>
-          <a:srgbClr val="0D2137"/>
+          <a:srgbClr val="0F1419"/>
         </a:solidFill>
       </p:bgPr>
     </p:bg>
@@ -3606,34 +4483,166 @@
       </p:grpSpPr>
       <p:sp>
         <p:nvSpPr>
-          <p:cNvPr id="2" name="Shape 0"/>
+          <p:cNvPr id="2" name="Text 0"/>
+          <p:cNvSpPr txBox="1"/>
+          <p:nvPr/>
+        </p:nvSpPr>
+        <p:spPr>
+          <a:xfrm>
+            <a:off x="731520" y="457200"/>
+            <a:ext cx="4206240" cy="3474720"/>
+          </a:xfrm>
+          <a:prstGeom prst="rect">
+            <a:avLst/>
+          </a:prstGeom>
+          <a:noFill/>
+          <a:ln/>
+        </p:spPr>
+        <p:txBody>
+          <a:bodyPr wrap="square" lIns="0" tIns="0" rIns="0" bIns="0" rtlCol="0" anchor="t"/>
+          <a:lstStyle/>
+          <a:p>
+            <a:pPr marL="342900" indent="-342900">
+              <a:spcAft>
+                <a:spcPts val="600"/>
+              </a:spcAft>
+              <a:buSzPct val="100000"/>
+              <a:buChar char="•"/>
+            </a:pPr>
+            <a:r>
+              <a:rPr lang="en-US" sz="1300" dirty="0">
+                <a:solidFill>
+                  <a:srgbClr val="FFFFFF"/>
+                </a:solidFill>
+                <a:latin typeface="Calibri" pitchFamily="34" charset="0"/>
+                <a:ea typeface="Calibri" pitchFamily="34" charset="-122"/>
+                <a:cs typeface="Calibri" pitchFamily="34" charset="-120"/>
+              </a:rPr>
+              <a:t>Une monnaie dont la quantité totale est fixée à l'avance (21 millions de bitcoins, pas un de plus) et que personne ne...</a:t>
+            </a:r>
+            <a:endParaRPr lang="en-US" sz="1300" dirty="0"/>
+          </a:p>
+          <a:p>
+            <a:pPr marL="342900" indent="-342900">
+              <a:spcAft>
+                <a:spcPts val="600"/>
+              </a:spcAft>
+              <a:buSzPct val="100000"/>
+              <a:buChar char="•"/>
+            </a:pPr>
+            <a:r>
+              <a:rPr lang="en-US" sz="1300" dirty="0">
+                <a:solidFill>
+                  <a:srgbClr val="FFFFFF"/>
+                </a:solidFill>
+                <a:latin typeface="Calibri" pitchFamily="34" charset="0"/>
+                <a:ea typeface="Calibri" pitchFamily="34" charset="-122"/>
+                <a:cs typeface="Calibri" pitchFamily="34" charset="-120"/>
+              </a:rPr>
+              <a:t>Le 3 janvier 2009, le premier bloc Bitcoin est créé. Satoshi y inscrit un message :</a:t>
+            </a:r>
+            <a:endParaRPr lang="en-US" sz="1300" dirty="0"/>
+          </a:p>
+          <a:p>
+            <a:pPr marL="342900" indent="-342900">
+              <a:spcAft>
+                <a:spcPts val="600"/>
+              </a:spcAft>
+              <a:buSzPct val="100000"/>
+              <a:buChar char="•"/>
+            </a:pPr>
+            <a:r>
+              <a:rPr lang="en-US" sz="1300" dirty="0">
+                <a:solidFill>
+                  <a:srgbClr val="FFFFFF"/>
+                </a:solidFill>
+                <a:latin typeface="Calibri" pitchFamily="34" charset="0"/>
+                <a:ea typeface="Calibri" pitchFamily="34" charset="-122"/>
+                <a:cs typeface="Calibri" pitchFamily="34" charset="-120"/>
+              </a:rPr>
+              <a:t>&gt; « The Times 03/Jan/2009 Chancellor on brink of second bailout for banks »</a:t>
+            </a:r>
+            <a:endParaRPr lang="en-US" sz="1300" dirty="0"/>
+          </a:p>
+          <a:p>
+            <a:pPr marL="342900" indent="-342900">
+              <a:spcAft>
+                <a:spcPts val="600"/>
+              </a:spcAft>
+              <a:buSzPct val="100000"/>
+              <a:buChar char="•"/>
+            </a:pPr>
+            <a:r>
+              <a:rPr lang="en-US" sz="1300" dirty="0">
+                <a:solidFill>
+                  <a:srgbClr val="FFFFFF"/>
+                </a:solidFill>
+                <a:latin typeface="Calibri" pitchFamily="34" charset="0"/>
+                <a:ea typeface="Calibri" pitchFamily="34" charset="-122"/>
+                <a:cs typeface="Calibri" pitchFamily="34" charset="-120"/>
+              </a:rPr>
+              <a:t>Une référence à la une du journal britannique The Times ce jour-là — les banques sont à nouveau au bord du gouffre.</a:t>
+            </a:r>
+            <a:endParaRPr lang="en-US" sz="1300" dirty="0"/>
+          </a:p>
+        </p:txBody>
+      </p:sp>
+      <p:sp>
+        <p:nvSpPr>
+          <p:cNvPr id="3" name="Shape 1"/>
           <p:cNvSpPr/>
           <p:nvPr/>
         </p:nvSpPr>
         <p:spPr>
           <a:xfrm>
-            <a:off x="548640" y="914400"/>
-            <a:ext cx="45720" cy="2560320"/>
-          </a:xfrm>
-          <a:prstGeom prst="rect">
-            <a:avLst/>
+            <a:off x="5120640" y="457200"/>
+            <a:ext cx="3474720" cy="640080"/>
+          </a:xfrm>
+          <a:prstGeom prst="roundRect">
+            <a:avLst>
+              <a:gd name="adj" fmla="val 14286"/>
+            </a:avLst>
           </a:prstGeom>
           <a:solidFill>
-            <a:srgbClr val="00BFA6"/>
+            <a:srgbClr val="1A2332"/>
           </a:solidFill>
           <a:ln/>
         </p:spPr>
       </p:sp>
-      <p:sp>
-        <p:nvSpPr>
-          <p:cNvPr id="3" name="Text 1"/>
+      <p:pic>
+        <p:nvPicPr>
+          <p:cNvPr id="4" name="Image 0" descr="preencoded.png">    </p:cNvPr>
+          <p:cNvPicPr>
+            <a:picLocks noChangeAspect="1"/>
+          </p:cNvPicPr>
+          <p:nvPr/>
+        </p:nvPicPr>
+        <p:blipFill>
+          <a:blip r:embed="rId1"/>
+          <a:stretch>
+            <a:fillRect/>
+          </a:stretch>
+        </p:blipFill>
+        <p:spPr>
+          <a:xfrm>
+            <a:off x="5257800" y="557784"/>
+            <a:ext cx="438912" cy="438912"/>
+          </a:xfrm>
+          <a:prstGeom prst="rect">
+            <a:avLst/>
+          </a:prstGeom>
+        </p:spPr>
+      </p:pic>
+      <p:sp>
+        <p:nvSpPr>
+          <p:cNvPr id="5" name="Text 2"/>
           <p:cNvSpPr txBox="1"/>
           <p:nvPr/>
         </p:nvSpPr>
         <p:spPr>
           <a:xfrm>
-            <a:off x="822960" y="1097280"/>
-            <a:ext cx="2743200" cy="365760"/>
+            <a:off x="5806440" y="457200"/>
+            <a:ext cx="2651760" cy="640080"/>
           </a:xfrm>
           <a:prstGeom prst="rect">
             <a:avLst/>
@@ -3649,15 +4658,15 @@
               <a:buNone/>
             </a:pPr>
             <a:r>
-              <a:rPr lang="en-US" sz="1200" b="1" spc="200" kern="0" dirty="0">
-                <a:solidFill>
-                  <a:srgbClr val="00BFA6"/>
-                </a:solidFill>
-                <a:latin typeface="Calibri" pitchFamily="34" charset="0"/>
-                <a:ea typeface="Calibri" pitchFamily="34" charset="-122"/>
-                <a:cs typeface="Calibri" pitchFamily="34" charset="-120"/>
-              </a:rPr>
-              <a:t>Lecon 4 / 4</a:t>
+              <a:rPr lang="en-US" sz="1200" dirty="0">
+                <a:solidFill>
+                  <a:srgbClr val="FFFFFF"/>
+                </a:solidFill>
+                <a:latin typeface="Calibri" pitchFamily="34" charset="0"/>
+                <a:ea typeface="Calibri" pitchFamily="34" charset="-122"/>
+                <a:cs typeface="Calibri" pitchFamily="34" charset="-120"/>
+              </a:rPr>
+              <a:t>Un pied-de-nez au système.</a:t>
             </a:r>
             <a:endParaRPr lang="en-US" sz="1200" dirty="0"/>
           </a:p>
@@ -3665,14 +4674,60 @@
       </p:sp>
       <p:sp>
         <p:nvSpPr>
-          <p:cNvPr id="4" name="Text 2"/>
+          <p:cNvPr id="6" name="Shape 3"/>
+          <p:cNvSpPr/>
+          <p:nvPr/>
+        </p:nvSpPr>
+        <p:spPr>
+          <a:xfrm>
+            <a:off x="5120640" y="1188720"/>
+            <a:ext cx="3474720" cy="640080"/>
+          </a:xfrm>
+          <a:prstGeom prst="roundRect">
+            <a:avLst>
+              <a:gd name="adj" fmla="val 14286"/>
+            </a:avLst>
+          </a:prstGeom>
+          <a:solidFill>
+            <a:srgbClr val="1A2332"/>
+          </a:solidFill>
+          <a:ln/>
+        </p:spPr>
+      </p:sp>
+      <p:pic>
+        <p:nvPicPr>
+          <p:cNvPr id="7" name="Image 1" descr="preencoded.png">    </p:cNvPr>
+          <p:cNvPicPr>
+            <a:picLocks noChangeAspect="1"/>
+          </p:cNvPicPr>
+          <p:nvPr/>
+        </p:nvPicPr>
+        <p:blipFill>
+          <a:blip r:embed="rId2"/>
+          <a:stretch>
+            <a:fillRect/>
+          </a:stretch>
+        </p:blipFill>
+        <p:spPr>
+          <a:xfrm>
+            <a:off x="5257800" y="1289304"/>
+            <a:ext cx="438912" cy="438912"/>
+          </a:xfrm>
+          <a:prstGeom prst="rect">
+            <a:avLst/>
+          </a:prstGeom>
+        </p:spPr>
+      </p:pic>
+      <p:sp>
+        <p:nvSpPr>
+          <p:cNvPr id="8" name="Text 4"/>
           <p:cNvSpPr txBox="1"/>
           <p:nvPr/>
         </p:nvSpPr>
         <p:spPr>
           <a:xfrm>
-            <a:off x="822960" y="1645920"/>
-            <a:ext cx="7498080" cy="1280160"/>
+            <a:off x="5806440" y="1188720"/>
+            <a:ext cx="2651760" cy="640080"/>
           </a:xfrm>
           <a:prstGeom prst="rect">
             <a:avLst/>
@@ -3681,14 +4736,14 @@
           <a:ln/>
         </p:spPr>
         <p:txBody>
-          <a:bodyPr wrap="square" lIns="0" tIns="0" rIns="0" bIns="0" rtlCol="0" anchor="t"/>
+          <a:bodyPr wrap="square" lIns="0" tIns="0" rIns="0" bIns="0" rtlCol="0" anchor="ctr"/>
           <a:lstStyle/>
           <a:p>
             <a:pPr indent="0" marL="0">
               <a:buNone/>
             </a:pPr>
             <a:r>
-              <a:rPr lang="en-US" sz="3000" b="1" dirty="0">
+              <a:rPr lang="en-US" sz="1200" dirty="0">
                 <a:solidFill>
                   <a:srgbClr val="FFFFFF"/>
                 </a:solidFill>
@@ -3696,22 +4751,68 @@
                 <a:ea typeface="Calibri" pitchFamily="34" charset="-122"/>
                 <a:cs typeface="Calibri" pitchFamily="34" charset="-120"/>
               </a:rPr>
-              <a:t>La révolution Satoshi</a:t>
-            </a:r>
-            <a:endParaRPr lang="en-US" sz="3000" dirty="0"/>
-          </a:p>
-        </p:txBody>
-      </p:sp>
-      <p:sp>
-        <p:nvSpPr>
-          <p:cNvPr id="5" name="Text 3"/>
+              <a:t>Jusqu'en 2010, Bitcoin ne valait rien.</a:t>
+            </a:r>
+            <a:endParaRPr lang="en-US" sz="1200" dirty="0"/>
+          </a:p>
+        </p:txBody>
+      </p:sp>
+      <p:sp>
+        <p:nvSpPr>
+          <p:cNvPr id="9" name="Shape 5"/>
+          <p:cNvSpPr/>
+          <p:nvPr/>
+        </p:nvSpPr>
+        <p:spPr>
+          <a:xfrm>
+            <a:off x="5120640" y="1920240"/>
+            <a:ext cx="3474720" cy="640080"/>
+          </a:xfrm>
+          <a:prstGeom prst="roundRect">
+            <a:avLst>
+              <a:gd name="adj" fmla="val 14286"/>
+            </a:avLst>
+          </a:prstGeom>
+          <a:solidFill>
+            <a:srgbClr val="1A2332"/>
+          </a:solidFill>
+          <a:ln/>
+        </p:spPr>
+      </p:sp>
+      <p:pic>
+        <p:nvPicPr>
+          <p:cNvPr id="10" name="Image 2" descr="preencoded.png">    </p:cNvPr>
+          <p:cNvPicPr>
+            <a:picLocks noChangeAspect="1"/>
+          </p:cNvPicPr>
+          <p:nvPr/>
+        </p:nvPicPr>
+        <p:blipFill>
+          <a:blip r:embed="rId3"/>
+          <a:stretch>
+            <a:fillRect/>
+          </a:stretch>
+        </p:blipFill>
+        <p:spPr>
+          <a:xfrm>
+            <a:off x="5257800" y="2020824"/>
+            <a:ext cx="438912" cy="438912"/>
+          </a:xfrm>
+          <a:prstGeom prst="rect">
+            <a:avLst/>
+          </a:prstGeom>
+        </p:spPr>
+      </p:pic>
+      <p:sp>
+        <p:nvSpPr>
+          <p:cNvPr id="11" name="Text 6"/>
           <p:cNvSpPr txBox="1"/>
           <p:nvPr/>
         </p:nvSpPr>
         <p:spPr>
           <a:xfrm>
-            <a:off x="822960" y="4206240"/>
-            <a:ext cx="5486400" cy="320040"/>
+            <a:off x="5806440" y="1920240"/>
+            <a:ext cx="2651760" cy="640080"/>
           </a:xfrm>
           <a:prstGeom prst="rect">
             <a:avLst/>
@@ -3727,17 +4828,17 @@
               <a:buNone/>
             </a:pPr>
             <a:r>
-              <a:rPr lang="en-US" sz="1100" dirty="0">
-                <a:solidFill>
-                  <a:srgbClr val="64748B"/>
-                </a:solidFill>
-                <a:latin typeface="Calibri" pitchFamily="34" charset="0"/>
-                <a:ea typeface="Calibri" pitchFamily="34" charset="-122"/>
-                <a:cs typeface="Calibri" pitchFamily="34" charset="-120"/>
-              </a:rPr>
-              <a:t>Premiers pas pratiques</a:t>
-            </a:r>
-            <a:endParaRPr lang="en-US" sz="1100" dirty="0"/>
+              <a:rPr lang="en-US" sz="1200" dirty="0">
+                <a:solidFill>
+                  <a:srgbClr val="FFFFFF"/>
+                </a:solidFill>
+                <a:latin typeface="Calibri" pitchFamily="34" charset="0"/>
+                <a:ea typeface="Calibri" pitchFamily="34" charset="-122"/>
+                <a:cs typeface="Calibri" pitchFamily="34" charset="-120"/>
+              </a:rPr>
+              <a:t>La première transaction commerciale connue : un développeur a payé 10 000 BTC...</a:t>
+            </a:r>
+            <a:endParaRPr lang="en-US" sz="1200" dirty="0"/>
           </a:p>
         </p:txBody>
       </p:sp>
@@ -3775,14 +4876,60 @@
       </p:grpSpPr>
       <p:sp>
         <p:nvSpPr>
-          <p:cNvPr id="2" name="Text 0"/>
+          <p:cNvPr id="2" name="Shape 0"/>
+          <p:cNvSpPr/>
+          <p:nvPr/>
+        </p:nvSpPr>
+        <p:spPr>
+          <a:xfrm>
+            <a:off x="594360" y="1005840"/>
+            <a:ext cx="2468880" cy="1371600"/>
+          </a:xfrm>
+          <a:prstGeom prst="roundRect">
+            <a:avLst>
+              <a:gd name="adj" fmla="val 6667"/>
+            </a:avLst>
+          </a:prstGeom>
+          <a:solidFill>
+            <a:srgbClr val="1A2332"/>
+          </a:solidFill>
+          <a:ln/>
+        </p:spPr>
+      </p:sp>
+      <p:pic>
+        <p:nvPicPr>
+          <p:cNvPr id="3" name="Image 0" descr="preencoded.png">    </p:cNvPr>
+          <p:cNvPicPr>
+            <a:picLocks noChangeAspect="1"/>
+          </p:cNvPicPr>
+          <p:nvPr/>
+        </p:nvPicPr>
+        <p:blipFill>
+          <a:blip r:embed="rId1"/>
+          <a:stretch>
+            <a:fillRect/>
+          </a:stretch>
+        </p:blipFill>
+        <p:spPr>
+          <a:xfrm>
+            <a:off x="731520" y="1143000"/>
+            <a:ext cx="502920" cy="502920"/>
+          </a:xfrm>
+          <a:prstGeom prst="rect">
+            <a:avLst/>
+          </a:prstGeom>
+        </p:spPr>
+      </p:pic>
+      <p:sp>
+        <p:nvSpPr>
+          <p:cNvPr id="4" name="Text 1"/>
           <p:cNvSpPr txBox="1"/>
           <p:nvPr/>
         </p:nvSpPr>
         <p:spPr>
           <a:xfrm>
-            <a:off x="731520" y="457200"/>
-            <a:ext cx="7680960" cy="3657600"/>
+            <a:off x="731520" y="1719072"/>
+            <a:ext cx="2194560" cy="320040"/>
           </a:xfrm>
           <a:prstGeom prst="rect">
             <a:avLst/>
@@ -3794,15 +4941,11 @@
           <a:bodyPr wrap="square" lIns="0" tIns="0" rIns="0" bIns="0" rtlCol="0" anchor="t"/>
           <a:lstStyle/>
           <a:p>
-            <a:pPr marL="342900" indent="-342900">
-              <a:spcAft>
-                <a:spcPts val="800"/>
-              </a:spcAft>
-              <a:buSzPct val="100000"/>
-              <a:buChar char="•"/>
-            </a:pPr>
-            <a:r>
-              <a:rPr lang="en-US" sz="1400" dirty="0">
+            <a:pPr indent="0" marL="0">
+              <a:buNone/>
+            </a:pPr>
+            <a:r>
+              <a:rPr lang="en-US" sz="1100" b="1" dirty="0">
                 <a:solidFill>
                   <a:srgbClr val="FFFFFF"/>
                 </a:solidFill>
@@ -3810,20 +4953,84 @@
                 <a:ea typeface="Calibri" pitchFamily="34" charset="-122"/>
                 <a:cs typeface="Calibri" pitchFamily="34" charset="-120"/>
               </a:rPr>
-              <a:t>Ce que Satoshi a inventé va bien au-delà de Bitcoin. Il a résolu un problème mathématique vieux de 30 ans : comment mettre d'accord un réseau de personnes qui ne se connaissent ...</a:t>
-            </a:r>
-            <a:endParaRPr lang="en-US" sz="1400" dirty="0"/>
-          </a:p>
-          <a:p>
-            <a:pPr marL="342900" indent="-342900">
-              <a:spcAft>
-                <a:spcPts val="800"/>
-              </a:spcAft>
-              <a:buSzPct val="100000"/>
-              <a:buChar char="•"/>
-            </a:pPr>
-            <a:r>
-              <a:rPr lang="en-US" sz="1400" dirty="0">
+              <a:t>À l'époque, cela valait 40 dollars.</a:t>
+            </a:r>
+            <a:endParaRPr lang="en-US" sz="1100" dirty="0"/>
+          </a:p>
+        </p:txBody>
+      </p:sp>
+      <p:sp>
+        <p:nvSpPr>
+          <p:cNvPr id="5" name="Shape 2"/>
+          <p:cNvSpPr/>
+          <p:nvPr/>
+        </p:nvSpPr>
+        <p:spPr>
+          <a:xfrm>
+            <a:off x="3246120" y="1005840"/>
+            <a:ext cx="2468880" cy="1371600"/>
+          </a:xfrm>
+          <a:prstGeom prst="roundRect">
+            <a:avLst>
+              <a:gd name="adj" fmla="val 6667"/>
+            </a:avLst>
+          </a:prstGeom>
+          <a:solidFill>
+            <a:srgbClr val="1A2332"/>
+          </a:solidFill>
+          <a:ln/>
+        </p:spPr>
+      </p:sp>
+      <p:pic>
+        <p:nvPicPr>
+          <p:cNvPr id="6" name="Image 1" descr="preencoded.png">    </p:cNvPr>
+          <p:cNvPicPr>
+            <a:picLocks noChangeAspect="1"/>
+          </p:cNvPicPr>
+          <p:nvPr/>
+        </p:nvPicPr>
+        <p:blipFill>
+          <a:blip r:embed="rId2"/>
+          <a:stretch>
+            <a:fillRect/>
+          </a:stretch>
+        </p:blipFill>
+        <p:spPr>
+          <a:xfrm>
+            <a:off x="3383280" y="1143000"/>
+            <a:ext cx="502920" cy="502920"/>
+          </a:xfrm>
+          <a:prstGeom prst="rect">
+            <a:avLst/>
+          </a:prstGeom>
+        </p:spPr>
+      </p:pic>
+      <p:sp>
+        <p:nvSpPr>
+          <p:cNvPr id="7" name="Text 3"/>
+          <p:cNvSpPr txBox="1"/>
+          <p:nvPr/>
+        </p:nvSpPr>
+        <p:spPr>
+          <a:xfrm>
+            <a:off x="3383280" y="1719072"/>
+            <a:ext cx="2194560" cy="320040"/>
+          </a:xfrm>
+          <a:prstGeom prst="rect">
+            <a:avLst/>
+          </a:prstGeom>
+          <a:noFill/>
+          <a:ln/>
+        </p:spPr>
+        <p:txBody>
+          <a:bodyPr wrap="square" lIns="0" tIns="0" rIns="0" bIns="0" rtlCol="0" anchor="t"/>
+          <a:lstStyle/>
+          <a:p>
+            <a:pPr indent="0" marL="0">
+              <a:buNone/>
+            </a:pPr>
+            <a:r>
+              <a:rPr lang="en-US" sz="1100" b="1" dirty="0">
                 <a:solidFill>
                   <a:srgbClr val="FFFFFF"/>
                 </a:solidFill>
@@ -3831,20 +5038,84 @@
                 <a:ea typeface="Calibri" pitchFamily="34" charset="-122"/>
                 <a:cs typeface="Calibri" pitchFamily="34" charset="-120"/>
               </a:rPr>
-              <a:t>Avant Bitcoin, tout système numérique de valeur reposait sur un tiers de confiance :</a:t>
-            </a:r>
-            <a:endParaRPr lang="en-US" sz="1400" dirty="0"/>
-          </a:p>
-          <a:p>
-            <a:pPr marL="342900" indent="-342900">
-              <a:spcAft>
-                <a:spcPts val="800"/>
-              </a:spcAft>
-              <a:buSzPct val="100000"/>
-              <a:buChar char="•"/>
-            </a:pPr>
-            <a:r>
-              <a:rPr lang="en-US" sz="1400" dirty="0">
+              <a:t>Aujourd'hui, ces 10 000 BTC vaudraient plus d'un milliard...</a:t>
+            </a:r>
+            <a:endParaRPr lang="en-US" sz="1100" dirty="0"/>
+          </a:p>
+        </p:txBody>
+      </p:sp>
+      <p:sp>
+        <p:nvSpPr>
+          <p:cNvPr id="8" name="Shape 4"/>
+          <p:cNvSpPr/>
+          <p:nvPr/>
+        </p:nvSpPr>
+        <p:spPr>
+          <a:xfrm>
+            <a:off x="5897880" y="1005840"/>
+            <a:ext cx="2468880" cy="1371600"/>
+          </a:xfrm>
+          <a:prstGeom prst="roundRect">
+            <a:avLst>
+              <a:gd name="adj" fmla="val 6667"/>
+            </a:avLst>
+          </a:prstGeom>
+          <a:solidFill>
+            <a:srgbClr val="1A2332"/>
+          </a:solidFill>
+          <a:ln/>
+        </p:spPr>
+      </p:sp>
+      <p:pic>
+        <p:nvPicPr>
+          <p:cNvPr id="9" name="Image 2" descr="preencoded.png">    </p:cNvPr>
+          <p:cNvPicPr>
+            <a:picLocks noChangeAspect="1"/>
+          </p:cNvPicPr>
+          <p:nvPr/>
+        </p:nvPicPr>
+        <p:blipFill>
+          <a:blip r:embed="rId3"/>
+          <a:stretch>
+            <a:fillRect/>
+          </a:stretch>
+        </p:blipFill>
+        <p:spPr>
+          <a:xfrm>
+            <a:off x="6035040" y="1143000"/>
+            <a:ext cx="502920" cy="502920"/>
+          </a:xfrm>
+          <a:prstGeom prst="rect">
+            <a:avLst/>
+          </a:prstGeom>
+        </p:spPr>
+      </p:pic>
+      <p:sp>
+        <p:nvSpPr>
+          <p:cNvPr id="10" name="Text 5"/>
+          <p:cNvSpPr txBox="1"/>
+          <p:nvPr/>
+        </p:nvSpPr>
+        <p:spPr>
+          <a:xfrm>
+            <a:off x="6035040" y="1719072"/>
+            <a:ext cx="2194560" cy="320040"/>
+          </a:xfrm>
+          <a:prstGeom prst="rect">
+            <a:avLst/>
+          </a:prstGeom>
+          <a:noFill/>
+          <a:ln/>
+        </p:spPr>
+        <p:txBody>
+          <a:bodyPr wrap="square" lIns="0" tIns="0" rIns="0" bIns="0" rtlCol="0" anchor="t"/>
+          <a:lstStyle/>
+          <a:p>
+            <a:pPr indent="0" marL="0">
+              <a:buNone/>
+            </a:pPr>
+            <a:r>
+              <a:rPr lang="en-US" sz="1100" b="1" dirty="0">
                 <a:solidFill>
                   <a:srgbClr val="FFFFFF"/>
                 </a:solidFill>
@@ -3852,20 +5123,84 @@
                 <a:ea typeface="Calibri" pitchFamily="34" charset="-122"/>
                 <a:cs typeface="Calibri" pitchFamily="34" charset="-120"/>
               </a:rPr>
-              <a:t>Votre banque garde le décompte de votre argent.</a:t>
-            </a:r>
-            <a:endParaRPr lang="en-US" sz="1400" dirty="0"/>
-          </a:p>
-          <a:p>
-            <a:pPr marL="342900" indent="-342900">
-              <a:spcAft>
-                <a:spcPts val="800"/>
-              </a:spcAft>
-              <a:buSzPct val="100000"/>
-              <a:buChar char="•"/>
-            </a:pPr>
-            <a:r>
-              <a:rPr lang="en-US" sz="1400" dirty="0">
+              <a:t>En 2011, Satoshi disparaît définitivement d'internet.</a:t>
+            </a:r>
+            <a:endParaRPr lang="en-US" sz="1100" dirty="0"/>
+          </a:p>
+        </p:txBody>
+      </p:sp>
+      <p:sp>
+        <p:nvSpPr>
+          <p:cNvPr id="11" name="Shape 6"/>
+          <p:cNvSpPr/>
+          <p:nvPr/>
+        </p:nvSpPr>
+        <p:spPr>
+          <a:xfrm>
+            <a:off x="594360" y="2514600"/>
+            <a:ext cx="2468880" cy="1371600"/>
+          </a:xfrm>
+          <a:prstGeom prst="roundRect">
+            <a:avLst>
+              <a:gd name="adj" fmla="val 6667"/>
+            </a:avLst>
+          </a:prstGeom>
+          <a:solidFill>
+            <a:srgbClr val="1A2332"/>
+          </a:solidFill>
+          <a:ln/>
+        </p:spPr>
+      </p:sp>
+      <p:pic>
+        <p:nvPicPr>
+          <p:cNvPr id="12" name="Image 3" descr="preencoded.png">    </p:cNvPr>
+          <p:cNvPicPr>
+            <a:picLocks noChangeAspect="1"/>
+          </p:cNvPicPr>
+          <p:nvPr/>
+        </p:nvPicPr>
+        <p:blipFill>
+          <a:blip r:embed="rId4"/>
+          <a:stretch>
+            <a:fillRect/>
+          </a:stretch>
+        </p:blipFill>
+        <p:spPr>
+          <a:xfrm>
+            <a:off x="731520" y="2651760"/>
+            <a:ext cx="502920" cy="502920"/>
+          </a:xfrm>
+          <a:prstGeom prst="rect">
+            <a:avLst/>
+          </a:prstGeom>
+        </p:spPr>
+      </p:pic>
+      <p:sp>
+        <p:nvSpPr>
+          <p:cNvPr id="13" name="Text 7"/>
+          <p:cNvSpPr txBox="1"/>
+          <p:nvPr/>
+        </p:nvSpPr>
+        <p:spPr>
+          <a:xfrm>
+            <a:off x="731520" y="3227832"/>
+            <a:ext cx="2194560" cy="320040"/>
+          </a:xfrm>
+          <a:prstGeom prst="rect">
+            <a:avLst/>
+          </a:prstGeom>
+          <a:noFill/>
+          <a:ln/>
+        </p:spPr>
+        <p:txBody>
+          <a:bodyPr wrap="square" lIns="0" tIns="0" rIns="0" bIns="0" rtlCol="0" anchor="t"/>
+          <a:lstStyle/>
+          <a:p>
+            <a:pPr indent="0" marL="0">
+              <a:buNone/>
+            </a:pPr>
+            <a:r>
+              <a:rPr lang="en-US" sz="1100" b="1" dirty="0">
                 <a:solidFill>
                   <a:srgbClr val="FFFFFF"/>
                 </a:solidFill>
@@ -3873,20 +5208,84 @@
                 <a:ea typeface="Calibri" pitchFamily="34" charset="-122"/>
                 <a:cs typeface="Calibri" pitchFamily="34" charset="-120"/>
               </a:rPr>
-              <a:t>PayPal enregistre vos paiements.</a:t>
-            </a:r>
-            <a:endParaRPr lang="en-US" sz="1400" dirty="0"/>
-          </a:p>
-          <a:p>
-            <a:pPr marL="342900" indent="-342900">
-              <a:spcAft>
-                <a:spcPts val="800"/>
-              </a:spcAft>
-              <a:buSzPct val="100000"/>
-              <a:buChar char="•"/>
-            </a:pPr>
-            <a:r>
-              <a:rPr lang="en-US" sz="1400" dirty="0">
+              <a:t>Personne ne sait qui il est vraiment.</a:t>
+            </a:r>
+            <a:endParaRPr lang="en-US" sz="1100" dirty="0"/>
+          </a:p>
+        </p:txBody>
+      </p:sp>
+      <p:sp>
+        <p:nvSpPr>
+          <p:cNvPr id="14" name="Shape 8"/>
+          <p:cNvSpPr/>
+          <p:nvPr/>
+        </p:nvSpPr>
+        <p:spPr>
+          <a:xfrm>
+            <a:off x="3246120" y="2514600"/>
+            <a:ext cx="2468880" cy="1371600"/>
+          </a:xfrm>
+          <a:prstGeom prst="roundRect">
+            <a:avLst>
+              <a:gd name="adj" fmla="val 6667"/>
+            </a:avLst>
+          </a:prstGeom>
+          <a:solidFill>
+            <a:srgbClr val="1A2332"/>
+          </a:solidFill>
+          <a:ln/>
+        </p:spPr>
+      </p:sp>
+      <p:pic>
+        <p:nvPicPr>
+          <p:cNvPr id="15" name="Image 4" descr="preencoded.png">    </p:cNvPr>
+          <p:cNvPicPr>
+            <a:picLocks noChangeAspect="1"/>
+          </p:cNvPicPr>
+          <p:nvPr/>
+        </p:nvPicPr>
+        <p:blipFill>
+          <a:blip r:embed="rId5"/>
+          <a:stretch>
+            <a:fillRect/>
+          </a:stretch>
+        </p:blipFill>
+        <p:spPr>
+          <a:xfrm>
+            <a:off x="3383280" y="2651760"/>
+            <a:ext cx="502920" cy="502920"/>
+          </a:xfrm>
+          <a:prstGeom prst="rect">
+            <a:avLst/>
+          </a:prstGeom>
+        </p:spPr>
+      </p:pic>
+      <p:sp>
+        <p:nvSpPr>
+          <p:cNvPr id="16" name="Text 9"/>
+          <p:cNvSpPr txBox="1"/>
+          <p:nvPr/>
+        </p:nvSpPr>
+        <p:spPr>
+          <a:xfrm>
+            <a:off x="3383280" y="3227832"/>
+            <a:ext cx="2194560" cy="320040"/>
+          </a:xfrm>
+          <a:prstGeom prst="rect">
+            <a:avLst/>
+          </a:prstGeom>
+          <a:noFill/>
+          <a:ln/>
+        </p:spPr>
+        <p:txBody>
+          <a:bodyPr wrap="square" lIns="0" tIns="0" rIns="0" bIns="0" rtlCol="0" anchor="t"/>
+          <a:lstStyle/>
+          <a:p>
+            <a:pPr indent="0" marL="0">
+              <a:buNone/>
+            </a:pPr>
+            <a:r>
+              <a:rPr lang="en-US" sz="1100" b="1" dirty="0">
                 <a:solidFill>
                   <a:srgbClr val="FFFFFF"/>
                 </a:solidFill>
@@ -3894,20 +5293,123 @@
                 <a:ea typeface="Calibri" pitchFamily="34" charset="-122"/>
                 <a:cs typeface="Calibri" pitchFamily="34" charset="-120"/>
               </a:rPr>
-              <a:t>Wave sait combien vous avez sur votre compte.</a:t>
-            </a:r>
-            <a:endParaRPr lang="en-US" sz="1400" dirty="0"/>
-          </a:p>
-          <a:p>
-            <a:pPr marL="342900" indent="-342900">
-              <a:spcAft>
-                <a:spcPts val="800"/>
-              </a:spcAft>
-              <a:buSzPct val="100000"/>
-              <a:buChar char="•"/>
-            </a:pPr>
-            <a:r>
-              <a:rPr lang="en-US" sz="1400" dirty="0">
+              <a:t>Il aurait environ 1 million de bitcoins — mais n'en a jam...</a:t>
+            </a:r>
+            <a:endParaRPr lang="en-US" sz="1100" dirty="0"/>
+          </a:p>
+        </p:txBody>
+      </p:sp>
+      <p:sp>
+        <p:nvSpPr>
+          <p:cNvPr id="17" name="Text 10"/>
+          <p:cNvSpPr txBox="1"/>
+          <p:nvPr/>
+        </p:nvSpPr>
+        <p:spPr>
+          <a:xfrm>
+            <a:off x="3383280" y="3520440"/>
+            <a:ext cx="2194560" cy="274320"/>
+          </a:xfrm>
+          <a:prstGeom prst="rect">
+            <a:avLst/>
+          </a:prstGeom>
+          <a:noFill/>
+          <a:ln/>
+        </p:spPr>
+        <p:txBody>
+          <a:bodyPr wrap="square" lIns="0" tIns="0" rIns="0" bIns="0" rtlCol="0" anchor="t"/>
+          <a:lstStyle/>
+          <a:p>
+            <a:pPr indent="0" marL="0">
+              <a:buNone/>
+            </a:pPr>
+            <a:r>
+              <a:rPr lang="en-US" sz="900" dirty="0">
+                <a:solidFill>
+                  <a:srgbClr val="94A3B8"/>
+                </a:solidFill>
+                <a:latin typeface="Calibri" pitchFamily="34" charset="0"/>
+                <a:ea typeface="Calibri" pitchFamily="34" charset="-122"/>
+                <a:cs typeface="Calibri" pitchFamily="34" charset="-120"/>
+              </a:rPr>
+              <a:t>seul.</a:t>
+            </a:r>
+            <a:endParaRPr lang="en-US" sz="900" dirty="0"/>
+          </a:p>
+        </p:txBody>
+      </p:sp>
+      <p:sp>
+        <p:nvSpPr>
+          <p:cNvPr id="18" name="Shape 11"/>
+          <p:cNvSpPr/>
+          <p:nvPr/>
+        </p:nvSpPr>
+        <p:spPr>
+          <a:xfrm>
+            <a:off x="5897880" y="2514600"/>
+            <a:ext cx="2468880" cy="1371600"/>
+          </a:xfrm>
+          <a:prstGeom prst="roundRect">
+            <a:avLst>
+              <a:gd name="adj" fmla="val 6667"/>
+            </a:avLst>
+          </a:prstGeom>
+          <a:solidFill>
+            <a:srgbClr val="1A2332"/>
+          </a:solidFill>
+          <a:ln/>
+        </p:spPr>
+      </p:sp>
+      <p:pic>
+        <p:nvPicPr>
+          <p:cNvPr id="19" name="Image 5" descr="preencoded.png">    </p:cNvPr>
+          <p:cNvPicPr>
+            <a:picLocks noChangeAspect="1"/>
+          </p:cNvPicPr>
+          <p:nvPr/>
+        </p:nvPicPr>
+        <p:blipFill>
+          <a:blip r:embed="rId6"/>
+          <a:stretch>
+            <a:fillRect/>
+          </a:stretch>
+        </p:blipFill>
+        <p:spPr>
+          <a:xfrm>
+            <a:off x="6035040" y="2651760"/>
+            <a:ext cx="502920" cy="502920"/>
+          </a:xfrm>
+          <a:prstGeom prst="rect">
+            <a:avLst/>
+          </a:prstGeom>
+        </p:spPr>
+      </p:pic>
+      <p:sp>
+        <p:nvSpPr>
+          <p:cNvPr id="20" name="Text 12"/>
+          <p:cNvSpPr txBox="1"/>
+          <p:nvPr/>
+        </p:nvSpPr>
+        <p:spPr>
+          <a:xfrm>
+            <a:off x="6035040" y="3227832"/>
+            <a:ext cx="2194560" cy="320040"/>
+          </a:xfrm>
+          <a:prstGeom prst="rect">
+            <a:avLst/>
+          </a:prstGeom>
+          <a:noFill/>
+          <a:ln/>
+        </p:spPr>
+        <p:txBody>
+          <a:bodyPr wrap="square" lIns="0" tIns="0" rIns="0" bIns="0" rtlCol="0" anchor="t"/>
+          <a:lstStyle/>
+          <a:p>
+            <a:pPr indent="0" marL="0">
+              <a:buNone/>
+            </a:pPr>
+            <a:r>
+              <a:rPr lang="en-US" sz="1100" b="1" dirty="0">
                 <a:solidFill>
                   <a:srgbClr val="FFFFFF"/>
                 </a:solidFill>
@@ -3915,43 +5417,22 @@
                 <a:ea typeface="Calibri" pitchFamily="34" charset="-122"/>
                 <a:cs typeface="Calibri" pitchFamily="34" charset="-120"/>
               </a:rPr>
-              <a:t>Si ce tiers ferme, disparaît, se fait pirater, ou décide de bloquer votre compte, votre argent est en péril.</a:t>
-            </a:r>
-            <a:endParaRPr lang="en-US" sz="1400" dirty="0"/>
-          </a:p>
-          <a:p>
-            <a:pPr marL="342900" indent="-342900">
-              <a:spcAft>
-                <a:spcPts val="800"/>
-              </a:spcAft>
-              <a:buSzPct val="100000"/>
-              <a:buChar char="•"/>
-            </a:pPr>
-            <a:r>
-              <a:rPr lang="en-US" sz="1400" dirty="0">
-                <a:solidFill>
-                  <a:srgbClr val="FFFFFF"/>
-                </a:solidFill>
-                <a:latin typeface="Calibri" pitchFamily="34" charset="0"/>
-                <a:ea typeface="Calibri" pitchFamily="34" charset="-122"/>
-                <a:cs typeface="Calibri" pitchFamily="34" charset="-120"/>
-              </a:rPr>
-              <a:t>Satoshi a proposé une alternative : la blockchain. Un grand livre de comptes copié sur des milliers d'ordinateurs à travers le monde, tenu à jour ensemble, sans chef. Si l'un me...</a:t>
-            </a:r>
-            <a:endParaRPr lang="en-US" sz="1400" dirty="0"/>
-          </a:p>
-        </p:txBody>
-      </p:sp>
-      <p:sp>
-        <p:nvSpPr>
-          <p:cNvPr id="3" name="Text 1"/>
+              <a:t>Bitcoin, lui, ne s'est jamais arrêté. Depuis 15 ans, le r...</a:t>
+            </a:r>
+            <a:endParaRPr lang="en-US" sz="1100" dirty="0"/>
+          </a:p>
+        </p:txBody>
+      </p:sp>
+      <p:sp>
+        <p:nvSpPr>
+          <p:cNvPr id="21" name="Text 13"/>
           <p:cNvSpPr txBox="1"/>
           <p:nvPr/>
         </p:nvSpPr>
         <p:spPr>
           <a:xfrm>
-            <a:off x="731520" y="4709160"/>
-            <a:ext cx="7680960" cy="274320"/>
+            <a:off x="6035040" y="3520440"/>
+            <a:ext cx="2194560" cy="274320"/>
           </a:xfrm>
           <a:prstGeom prst="rect">
             <a:avLst/>
@@ -3960,22 +5441,22 @@
           <a:ln/>
         </p:spPr>
         <p:txBody>
-          <a:bodyPr wrap="square" lIns="0" tIns="0" rIns="0" bIns="0" rtlCol="0" anchor="ctr"/>
-          <a:lstStyle/>
-          <a:p>
-            <a:pPr algn="r" indent="0" marL="0">
+          <a:bodyPr wrap="square" lIns="0" tIns="0" rIns="0" bIns="0" rtlCol="0" anchor="t"/>
+          <a:lstStyle/>
+          <a:p>
+            <a:pPr indent="0" marL="0">
               <a:buNone/>
             </a:pPr>
             <a:r>
               <a:rPr lang="en-US" sz="900" dirty="0">
                 <a:solidFill>
-                  <a:srgbClr val="64748B"/>
-                </a:solidFill>
-                <a:latin typeface="Calibri" pitchFamily="34" charset="0"/>
-                <a:ea typeface="Calibri" pitchFamily="34" charset="-122"/>
-                <a:cs typeface="Calibri" pitchFamily="34" charset="-120"/>
-              </a:rPr>
-              <a:t>Module 3 — Lecon 4</a:t>
+                  <a:srgbClr val="94A3B8"/>
+                </a:solidFill>
+                <a:latin typeface="Calibri" pitchFamily="34" charset="0"/>
+                <a:ea typeface="Calibri" pitchFamily="34" charset="-122"/>
+                <a:cs typeface="Calibri" pitchFamily="34" charset="-120"/>
+              </a:rPr>
+              <a:t>nne 24h/24, sans interruption, sans faille.</a:t>
             </a:r>
             <a:endParaRPr lang="en-US" sz="900" dirty="0"/>
           </a:p>
@@ -3992,6 +5473,245 @@
 <file path=ppt/slides/slide17.xml><?xml version="1.0" encoding="utf-8"?>
 <p:sld xmlns:a="http://schemas.openxmlformats.org/drawingml/2006/main" xmlns:r="http://schemas.openxmlformats.org/officeDocument/2006/relationships" xmlns:p="http://schemas.openxmlformats.org/presentationml/2006/main">
   <p:cSld name="Slide 17">
+    <p:bg>
+      <p:bgPr>
+        <a:solidFill>
+          <a:srgbClr val="0D2137"/>
+        </a:solidFill>
+      </p:bgPr>
+    </p:bg>
+    <p:spTree>
+      <p:nvGrpSpPr>
+        <p:cNvPr id="1" name=""/>
+        <p:cNvGrpSpPr/>
+        <p:nvPr/>
+      </p:nvGrpSpPr>
+      <p:grpSpPr>
+        <a:xfrm>
+          <a:off x="0" y="0"/>
+          <a:ext cx="0" cy="0"/>
+          <a:chOff x="0" y="0"/>
+          <a:chExt cx="0" cy="0"/>
+        </a:xfrm>
+      </p:grpSpPr>
+      <p:pic>
+        <p:nvPicPr>
+          <p:cNvPr id="2" name="Image 0" descr="preencoded.png">    </p:cNvPr>
+          <p:cNvPicPr>
+            <a:picLocks noChangeAspect="1"/>
+          </p:cNvPicPr>
+          <p:nvPr/>
+        </p:nvPicPr>
+        <p:blipFill>
+          <a:blip r:embed="rId1"/>
+          <a:stretch>
+            <a:fillRect/>
+          </a:stretch>
+        </p:blipFill>
+        <p:spPr>
+          <a:xfrm>
+            <a:off x="7315200" y="548640"/>
+            <a:ext cx="1280160" cy="1280160"/>
+          </a:xfrm>
+          <a:prstGeom prst="rect">
+            <a:avLst/>
+          </a:prstGeom>
+        </p:spPr>
+      </p:pic>
+      <p:pic>
+        <p:nvPicPr>
+          <p:cNvPr id="3" name="Image 1" descr="preencoded.png">    </p:cNvPr>
+          <p:cNvPicPr>
+            <a:picLocks noChangeAspect="1"/>
+          </p:cNvPicPr>
+          <p:nvPr/>
+        </p:nvPicPr>
+        <p:blipFill>
+          <a:blip r:embed="rId2"/>
+          <a:stretch>
+            <a:fillRect/>
+          </a:stretch>
+        </p:blipFill>
+        <p:spPr>
+          <a:xfrm>
+            <a:off x="7772400" y="2011680"/>
+            <a:ext cx="822960" cy="822960"/>
+          </a:xfrm>
+          <a:prstGeom prst="rect">
+            <a:avLst/>
+          </a:prstGeom>
+        </p:spPr>
+      </p:pic>
+      <p:sp>
+        <p:nvSpPr>
+          <p:cNvPr id="4" name="Shape 0"/>
+          <p:cNvSpPr/>
+          <p:nvPr/>
+        </p:nvSpPr>
+        <p:spPr>
+          <a:xfrm>
+            <a:off x="6583680" y="-274320"/>
+            <a:ext cx="3200400" cy="3200400"/>
+          </a:xfrm>
+          <a:prstGeom prst="ellipse">
+            <a:avLst/>
+          </a:prstGeom>
+          <a:solidFill>
+            <a:srgbClr val="EC4899">
+              <a:alpha val="6000"/>
+            </a:srgbClr>
+          </a:solidFill>
+          <a:ln/>
+        </p:spPr>
+      </p:sp>
+      <p:sp>
+        <p:nvSpPr>
+          <p:cNvPr id="5" name="Shape 1"/>
+          <p:cNvSpPr/>
+          <p:nvPr/>
+        </p:nvSpPr>
+        <p:spPr>
+          <a:xfrm>
+            <a:off x="731520" y="914400"/>
+            <a:ext cx="45720" cy="2194560"/>
+          </a:xfrm>
+          <a:prstGeom prst="rect">
+            <a:avLst/>
+          </a:prstGeom>
+          <a:solidFill>
+            <a:srgbClr val="EC4899"/>
+          </a:solidFill>
+          <a:ln/>
+        </p:spPr>
+      </p:sp>
+      <p:sp>
+        <p:nvSpPr>
+          <p:cNvPr id="6" name="Text 2"/>
+          <p:cNvSpPr txBox="1"/>
+          <p:nvPr/>
+        </p:nvSpPr>
+        <p:spPr>
+          <a:xfrm>
+            <a:off x="960120" y="914400"/>
+            <a:ext cx="2743200" cy="365760"/>
+          </a:xfrm>
+          <a:prstGeom prst="rect">
+            <a:avLst/>
+          </a:prstGeom>
+          <a:noFill/>
+          <a:ln/>
+        </p:spPr>
+        <p:txBody>
+          <a:bodyPr wrap="square" lIns="0" tIns="0" rIns="0" bIns="0" rtlCol="0" anchor="ctr"/>
+          <a:lstStyle/>
+          <a:p>
+            <a:pPr indent="0" marL="0">
+              <a:buNone/>
+            </a:pPr>
+            <a:r>
+              <a:rPr lang="en-US" sz="1200" b="1" spc="200" kern="0" dirty="0">
+                <a:solidFill>
+                  <a:srgbClr val="EC4899"/>
+                </a:solidFill>
+                <a:latin typeface="Calibri" pitchFamily="34" charset="0"/>
+                <a:ea typeface="Calibri" pitchFamily="34" charset="-122"/>
+                <a:cs typeface="Calibri" pitchFamily="34" charset="-120"/>
+              </a:rPr>
+              <a:t>Leçon 4 / 4</a:t>
+            </a:r>
+            <a:endParaRPr lang="en-US" sz="1200" dirty="0"/>
+          </a:p>
+        </p:txBody>
+      </p:sp>
+      <p:sp>
+        <p:nvSpPr>
+          <p:cNvPr id="7" name="Text 3"/>
+          <p:cNvSpPr txBox="1"/>
+          <p:nvPr/>
+        </p:nvSpPr>
+        <p:spPr>
+          <a:xfrm>
+            <a:off x="960120" y="1371600"/>
+            <a:ext cx="6217920" cy="1463040"/>
+          </a:xfrm>
+          <a:prstGeom prst="rect">
+            <a:avLst/>
+          </a:prstGeom>
+          <a:noFill/>
+          <a:ln/>
+        </p:spPr>
+        <p:txBody>
+          <a:bodyPr wrap="square" lIns="0" tIns="0" rIns="0" bIns="0" rtlCol="0" anchor="t"/>
+          <a:lstStyle/>
+          <a:p>
+            <a:pPr indent="0" marL="0">
+              <a:buNone/>
+            </a:pPr>
+            <a:r>
+              <a:rPr lang="en-US" sz="2800" b="1" dirty="0">
+                <a:solidFill>
+                  <a:srgbClr val="FFFFFF"/>
+                </a:solidFill>
+                <a:latin typeface="Calibri" pitchFamily="34" charset="0"/>
+                <a:ea typeface="Calibri" pitchFamily="34" charset="-122"/>
+                <a:cs typeface="Calibri" pitchFamily="34" charset="-120"/>
+              </a:rPr>
+              <a:t>La révolution Satoshi</a:t>
+            </a:r>
+            <a:endParaRPr lang="en-US" sz="2800" dirty="0"/>
+          </a:p>
+        </p:txBody>
+      </p:sp>
+      <p:sp>
+        <p:nvSpPr>
+          <p:cNvPr id="8" name="Text 4"/>
+          <p:cNvSpPr txBox="1"/>
+          <p:nvPr/>
+        </p:nvSpPr>
+        <p:spPr>
+          <a:xfrm>
+            <a:off x="960120" y="4114800"/>
+            <a:ext cx="5486400" cy="320040"/>
+          </a:xfrm>
+          <a:prstGeom prst="rect">
+            <a:avLst/>
+          </a:prstGeom>
+          <a:noFill/>
+          <a:ln/>
+        </p:spPr>
+        <p:txBody>
+          <a:bodyPr wrap="square" lIns="0" tIns="0" rIns="0" bIns="0" rtlCol="0" anchor="ctr"/>
+          <a:lstStyle/>
+          <a:p>
+            <a:pPr indent="0" marL="0">
+              <a:buNone/>
+            </a:pPr>
+            <a:r>
+              <a:rPr lang="en-US" sz="1100" dirty="0">
+                <a:solidFill>
+                  <a:srgbClr val="64748B"/>
+                </a:solidFill>
+                <a:latin typeface="Calibri" pitchFamily="34" charset="0"/>
+                <a:ea typeface="Calibri" pitchFamily="34" charset="-122"/>
+                <a:cs typeface="Calibri" pitchFamily="34" charset="-120"/>
+              </a:rPr>
+              <a:t>Premiers pas pratiques</a:t>
+            </a:r>
+            <a:endParaRPr lang="en-US" sz="1100" dirty="0"/>
+          </a:p>
+        </p:txBody>
+      </p:sp>
+    </p:spTree>
+  </p:cSld>
+  <p:clrMapOvr>
+    <a:masterClrMapping/>
+  </p:clrMapOvr>
+</p:sld>
+</file>
+
+<file path=ppt/slides/slide18.xml><?xml version="1.0" encoding="utf-8"?>
+<p:sld xmlns:a="http://schemas.openxmlformats.org/drawingml/2006/main" xmlns:r="http://schemas.openxmlformats.org/officeDocument/2006/relationships" xmlns:p="http://schemas.openxmlformats.org/presentationml/2006/main">
+  <p:cSld name="Slide 18">
     <p:bg>
       <p:bgPr>
         <a:solidFill>
@@ -4015,7 +5735,53 @@
       </p:grpSpPr>
       <p:sp>
         <p:nvSpPr>
-          <p:cNvPr id="2" name="Text 0"/>
+          <p:cNvPr id="2" name="Shape 0"/>
+          <p:cNvSpPr/>
+          <p:nvPr/>
+        </p:nvSpPr>
+        <p:spPr>
+          <a:xfrm>
+            <a:off x="7955280" y="182880"/>
+            <a:ext cx="640080" cy="640080"/>
+          </a:xfrm>
+          <a:prstGeom prst="ellipse">
+            <a:avLst/>
+          </a:prstGeom>
+          <a:solidFill>
+            <a:srgbClr val="EC4899">
+              <a:alpha val="12000"/>
+            </a:srgbClr>
+          </a:solidFill>
+          <a:ln/>
+        </p:spPr>
+      </p:sp>
+      <p:pic>
+        <p:nvPicPr>
+          <p:cNvPr id="3" name="Image 0" descr="preencoded.png">    </p:cNvPr>
+          <p:cNvPicPr>
+            <a:picLocks noChangeAspect="1"/>
+          </p:cNvPicPr>
+          <p:nvPr/>
+        </p:nvPicPr>
+        <p:blipFill>
+          <a:blip r:embed="rId1"/>
+          <a:stretch>
+            <a:fillRect/>
+          </a:stretch>
+        </p:blipFill>
+        <p:spPr>
+          <a:xfrm>
+            <a:off x="8028432" y="256032"/>
+            <a:ext cx="493776" cy="493776"/>
+          </a:xfrm>
+          <a:prstGeom prst="rect">
+            <a:avLst/>
+          </a:prstGeom>
+        </p:spPr>
+      </p:pic>
+      <p:sp>
+        <p:nvSpPr>
+          <p:cNvPr id="4" name="Text 1"/>
           <p:cNvSpPr txBox="1"/>
           <p:nvPr/>
         </p:nvSpPr>
@@ -4050,7 +5816,7 @@
                 <a:ea typeface="Calibri" pitchFamily="34" charset="-122"/>
                 <a:cs typeface="Calibri" pitchFamily="34" charset="-120"/>
               </a:rPr>
-              <a:t>Les trois innovations majeures :</a:t>
+              <a:t>Ce que Satoshi a inventé va bien au-delà de Bitcoin. Il a résolu un problème mathématique vieux de 30 ans : comment mettre d'accord un réseau de personnes qui ne se connaissent ...</a:t>
             </a:r>
             <a:endParaRPr lang="en-US" sz="1400" dirty="0"/>
           </a:p>
@@ -4071,7 +5837,7 @@
                 <a:ea typeface="Calibri" pitchFamily="34" charset="-122"/>
                 <a:cs typeface="Calibri" pitchFamily="34" charset="-120"/>
               </a:rPr>
-              <a:t>La preuve de travail (Proof-of-Work) : pour ajouter une transaction, il faut résoudre un puzzle mathématique coûteux en énergie. Cela empêche de tricher.</a:t>
+              <a:t>Avant Bitcoin, tout système numérique de valeur reposait sur un tiers de confiance :</a:t>
             </a:r>
             <a:endParaRPr lang="en-US" sz="1400" dirty="0"/>
           </a:p>
@@ -4092,7 +5858,7 @@
                 <a:ea typeface="Calibri" pitchFamily="34" charset="-122"/>
                 <a:cs typeface="Calibri" pitchFamily="34" charset="-120"/>
               </a:rPr>
-              <a:t>La chaîne de blocs cryptographique : chaque bloc contient l'empreinte du bloc précédent. Modifier un bloc oblige à modifier toute la chaîne — mathématiquement impossible.</a:t>
+              <a:t>Votre banque garde le décompte de votre argent.</a:t>
             </a:r>
             <a:endParaRPr lang="en-US" sz="1400" dirty="0"/>
           </a:p>
@@ -4113,7 +5879,7 @@
                 <a:ea typeface="Calibri" pitchFamily="34" charset="-122"/>
                 <a:cs typeface="Calibri" pitchFamily="34" charset="-120"/>
               </a:rPr>
-              <a:t>La récompense pour les mineurs : ceux qui sécurisent le réseau reçoivent de nouveaux bitcoins. Un incitatif économique aligné avec la sécurité du système.</a:t>
+              <a:t>PayPal enregistre vos paiements.</a:t>
             </a:r>
             <a:endParaRPr lang="en-US" sz="1400" dirty="0"/>
           </a:p>
@@ -4134,15 +5900,57 @@
                 <a:ea typeface="Calibri" pitchFamily="34" charset="-122"/>
                 <a:cs typeface="Calibri" pitchFamily="34" charset="-120"/>
               </a:rPr>
-              <a:t>Aujourd'hui, cette technologie inspire des milliers d'autres projets : Ethereum, Solana, les stablecoins, les NFT, la DeFi. Nous allons les voir dans les modules suivants.</a:t>
+              <a:t>Wave sait combien vous avez sur votre compte.</a:t>
             </a:r>
             <a:endParaRPr lang="en-US" sz="1400" dirty="0"/>
           </a:p>
-        </p:txBody>
-      </p:sp>
-      <p:sp>
-        <p:nvSpPr>
-          <p:cNvPr id="3" name="Text 1"/>
+          <a:p>
+            <a:pPr marL="342900" indent="-342900">
+              <a:spcAft>
+                <a:spcPts val="800"/>
+              </a:spcAft>
+              <a:buSzPct val="100000"/>
+              <a:buChar char="•"/>
+            </a:pPr>
+            <a:r>
+              <a:rPr lang="en-US" sz="1400" dirty="0">
+                <a:solidFill>
+                  <a:srgbClr val="FFFFFF"/>
+                </a:solidFill>
+                <a:latin typeface="Calibri" pitchFamily="34" charset="0"/>
+                <a:ea typeface="Calibri" pitchFamily="34" charset="-122"/>
+                <a:cs typeface="Calibri" pitchFamily="34" charset="-120"/>
+              </a:rPr>
+              <a:t>Si ce tiers ferme, disparaît, se fait pirater, ou décide de bloquer votre compte, votre argent est en péril.</a:t>
+            </a:r>
+            <a:endParaRPr lang="en-US" sz="1400" dirty="0"/>
+          </a:p>
+          <a:p>
+            <a:pPr marL="342900" indent="-342900">
+              <a:spcAft>
+                <a:spcPts val="800"/>
+              </a:spcAft>
+              <a:buSzPct val="100000"/>
+              <a:buChar char="•"/>
+            </a:pPr>
+            <a:r>
+              <a:rPr lang="en-US" sz="1400" dirty="0">
+                <a:solidFill>
+                  <a:srgbClr val="FFFFFF"/>
+                </a:solidFill>
+                <a:latin typeface="Calibri" pitchFamily="34" charset="0"/>
+                <a:ea typeface="Calibri" pitchFamily="34" charset="-122"/>
+                <a:cs typeface="Calibri" pitchFamily="34" charset="-120"/>
+              </a:rPr>
+              <a:t>Satoshi a proposé une alternative : la blockchain. Un grand livre de comptes copié sur des milliers d'ordinateurs à travers le monde, tenu à jour ensemble, sans chef. Si l'un me...</a:t>
+            </a:r>
+            <a:endParaRPr lang="en-US" sz="1400" dirty="0"/>
+          </a:p>
+        </p:txBody>
+      </p:sp>
+      <p:sp>
+        <p:nvSpPr>
+          <p:cNvPr id="5" name="Text 2"/>
           <p:cNvSpPr txBox="1"/>
           <p:nvPr/>
         </p:nvSpPr>
@@ -4173,529 +5981,9 @@
                 <a:ea typeface="Calibri" pitchFamily="34" charset="-122"/>
                 <a:cs typeface="Calibri" pitchFamily="34" charset="-120"/>
               </a:rPr>
-              <a:t>Module 3 — Lecon 4</a:t>
+              <a:t>Module 3 — Leçon 4</a:t>
             </a:r>
             <a:endParaRPr lang="en-US" sz="900" dirty="0"/>
-          </a:p>
-        </p:txBody>
-      </p:sp>
-    </p:spTree>
-  </p:cSld>
-  <p:clrMapOvr>
-    <a:masterClrMapping/>
-  </p:clrMapOvr>
-</p:sld>
-</file>
-
-<file path=ppt/slides/slide18.xml><?xml version="1.0" encoding="utf-8"?>
-<p:sld xmlns:a="http://schemas.openxmlformats.org/drawingml/2006/main" xmlns:r="http://schemas.openxmlformats.org/officeDocument/2006/relationships" xmlns:p="http://schemas.openxmlformats.org/presentationml/2006/main">
-  <p:cSld name="Slide 18">
-    <p:bg>
-      <p:bgPr>
-        <a:solidFill>
-          <a:srgbClr val="1A2332"/>
-        </a:solidFill>
-      </p:bgPr>
-    </p:bg>
-    <p:spTree>
-      <p:nvGrpSpPr>
-        <p:cNvPr id="1" name=""/>
-        <p:cNvGrpSpPr/>
-        <p:nvPr/>
-      </p:nvGrpSpPr>
-      <p:grpSpPr>
-        <a:xfrm>
-          <a:off x="0" y="0"/>
-          <a:ext cx="0" cy="0"/>
-          <a:chOff x="0" y="0"/>
-          <a:chExt cx="0" cy="0"/>
-        </a:xfrm>
-      </p:grpSpPr>
-      <p:sp>
-        <p:nvSpPr>
-          <p:cNvPr id="2" name="Text 0"/>
-          <p:cNvSpPr txBox="1"/>
-          <p:nvPr/>
-        </p:nvSpPr>
-        <p:spPr>
-          <a:xfrm>
-            <a:off x="731520" y="457200"/>
-            <a:ext cx="2743200" cy="365760"/>
-          </a:xfrm>
-          <a:prstGeom prst="rect">
-            <a:avLst/>
-          </a:prstGeom>
-          <a:noFill/>
-          <a:ln/>
-        </p:spPr>
-        <p:txBody>
-          <a:bodyPr wrap="square" lIns="0" tIns="0" rIns="0" bIns="0" rtlCol="0" anchor="ctr"/>
-          <a:lstStyle/>
-          <a:p>
-            <a:pPr indent="0" marL="0">
-              <a:buNone/>
-            </a:pPr>
-            <a:r>
-              <a:rPr lang="en-US" sz="1200" b="1" spc="300" kern="0" dirty="0">
-                <a:solidFill>
-                  <a:srgbClr val="F59E0B"/>
-                </a:solidFill>
-                <a:latin typeface="Calibri" pitchFamily="34" charset="0"/>
-                <a:ea typeface="Calibri" pitchFamily="34" charset="-122"/>
-                <a:cs typeface="Calibri" pitchFamily="34" charset="-120"/>
-              </a:rPr>
-              <a:t>A RETENIR</a:t>
-            </a:r>
-            <a:endParaRPr lang="en-US" sz="1200" dirty="0"/>
-          </a:p>
-        </p:txBody>
-      </p:sp>
-      <p:sp>
-        <p:nvSpPr>
-          <p:cNvPr id="3" name="Text 1"/>
-          <p:cNvSpPr txBox="1"/>
-          <p:nvPr/>
-        </p:nvSpPr>
-        <p:spPr>
-          <a:xfrm>
-            <a:off x="731520" y="868680"/>
-            <a:ext cx="7680960" cy="502920"/>
-          </a:xfrm>
-          <a:prstGeom prst="rect">
-            <a:avLst/>
-          </a:prstGeom>
-          <a:noFill/>
-          <a:ln/>
-        </p:spPr>
-        <p:txBody>
-          <a:bodyPr wrap="square" lIns="0" tIns="0" rIns="0" bIns="0" rtlCol="0" anchor="ctr"/>
-          <a:lstStyle/>
-          <a:p>
-            <a:pPr indent="0" marL="0">
-              <a:buNone/>
-            </a:pPr>
-            <a:r>
-              <a:rPr lang="en-US" sz="2200" b="1" dirty="0">
-                <a:solidFill>
-                  <a:srgbClr val="FFFFFF"/>
-                </a:solidFill>
-                <a:latin typeface="Calibri" pitchFamily="34" charset="0"/>
-                <a:ea typeface="Calibri" pitchFamily="34" charset="-122"/>
-                <a:cs typeface="Calibri" pitchFamily="34" charset="-120"/>
-              </a:rPr>
-              <a:t>La révolution Satoshi</a:t>
-            </a:r>
-            <a:endParaRPr lang="en-US" sz="2200" dirty="0"/>
-          </a:p>
-        </p:txBody>
-      </p:sp>
-      <p:sp>
-        <p:nvSpPr>
-          <p:cNvPr id="4" name="Text 2"/>
-          <p:cNvSpPr txBox="1"/>
-          <p:nvPr/>
-        </p:nvSpPr>
-        <p:spPr>
-          <a:xfrm>
-            <a:off x="731520" y="1554480"/>
-            <a:ext cx="457200" cy="548640"/>
-          </a:xfrm>
-          <a:prstGeom prst="roundRect">
-            <a:avLst>
-              <a:gd name="adj" fmla="val 50000"/>
-            </a:avLst>
-          </a:prstGeom>
-          <a:solidFill>
-            <a:srgbClr val="00BFA6"/>
-          </a:solidFill>
-          <a:ln/>
-        </p:spPr>
-        <p:txBody>
-          <a:bodyPr wrap="square" lIns="0" tIns="0" rIns="0" bIns="0" rtlCol="0" anchor="ctr"/>
-          <a:lstStyle/>
-          <a:p>
-            <a:pPr algn="ctr" indent="0" marL="0">
-              <a:buNone/>
-            </a:pPr>
-            <a:r>
-              <a:rPr lang="en-US" sz="1600" b="1" dirty="0">
-                <a:solidFill>
-                  <a:srgbClr val="0F1419"/>
-                </a:solidFill>
-                <a:latin typeface="Calibri" pitchFamily="34" charset="0"/>
-                <a:ea typeface="Calibri" pitchFamily="34" charset="-122"/>
-                <a:cs typeface="Calibri" pitchFamily="34" charset="-120"/>
-              </a:rPr>
-              <a:t>1</a:t>
-            </a:r>
-            <a:endParaRPr lang="en-US" sz="1600" dirty="0"/>
-          </a:p>
-        </p:txBody>
-      </p:sp>
-      <p:sp>
-        <p:nvSpPr>
-          <p:cNvPr id="5" name="Text 3"/>
-          <p:cNvSpPr txBox="1"/>
-          <p:nvPr/>
-        </p:nvSpPr>
-        <p:spPr>
-          <a:xfrm>
-            <a:off x="1371600" y="1554480"/>
-            <a:ext cx="7040880" cy="548640"/>
-          </a:xfrm>
-          <a:prstGeom prst="rect">
-            <a:avLst/>
-          </a:prstGeom>
-          <a:noFill/>
-          <a:ln/>
-        </p:spPr>
-        <p:txBody>
-          <a:bodyPr wrap="square" lIns="0" tIns="0" rIns="0" bIns="0" rtlCol="0" anchor="ctr"/>
-          <a:lstStyle/>
-          <a:p>
-            <a:pPr indent="0" marL="0">
-              <a:buNone/>
-            </a:pPr>
-            <a:r>
-              <a:rPr lang="en-US" sz="1400" dirty="0">
-                <a:solidFill>
-                  <a:srgbClr val="FFFFFF"/>
-                </a:solidFill>
-                <a:latin typeface="Calibri" pitchFamily="34" charset="0"/>
-                <a:ea typeface="Calibri" pitchFamily="34" charset="-122"/>
-                <a:cs typeface="Calibri" pitchFamily="34" charset="-120"/>
-              </a:rPr>
-              <a:t>Votre banque garde le décompte de votre argent.</a:t>
-            </a:r>
-            <a:endParaRPr lang="en-US" sz="1400" dirty="0"/>
-          </a:p>
-        </p:txBody>
-      </p:sp>
-      <p:sp>
-        <p:nvSpPr>
-          <p:cNvPr id="6" name="Text 4"/>
-          <p:cNvSpPr txBox="1"/>
-          <p:nvPr/>
-        </p:nvSpPr>
-        <p:spPr>
-          <a:xfrm>
-            <a:off x="731520" y="2212848"/>
-            <a:ext cx="457200" cy="548640"/>
-          </a:xfrm>
-          <a:prstGeom prst="roundRect">
-            <a:avLst>
-              <a:gd name="adj" fmla="val 50000"/>
-            </a:avLst>
-          </a:prstGeom>
-          <a:solidFill>
-            <a:srgbClr val="00BFA6"/>
-          </a:solidFill>
-          <a:ln/>
-        </p:spPr>
-        <p:txBody>
-          <a:bodyPr wrap="square" lIns="0" tIns="0" rIns="0" bIns="0" rtlCol="0" anchor="ctr"/>
-          <a:lstStyle/>
-          <a:p>
-            <a:pPr algn="ctr" indent="0" marL="0">
-              <a:buNone/>
-            </a:pPr>
-            <a:r>
-              <a:rPr lang="en-US" sz="1600" b="1" dirty="0">
-                <a:solidFill>
-                  <a:srgbClr val="0F1419"/>
-                </a:solidFill>
-                <a:latin typeface="Calibri" pitchFamily="34" charset="0"/>
-                <a:ea typeface="Calibri" pitchFamily="34" charset="-122"/>
-                <a:cs typeface="Calibri" pitchFamily="34" charset="-120"/>
-              </a:rPr>
-              <a:t>2</a:t>
-            </a:r>
-            <a:endParaRPr lang="en-US" sz="1600" dirty="0"/>
-          </a:p>
-        </p:txBody>
-      </p:sp>
-      <p:sp>
-        <p:nvSpPr>
-          <p:cNvPr id="7" name="Text 5"/>
-          <p:cNvSpPr txBox="1"/>
-          <p:nvPr/>
-        </p:nvSpPr>
-        <p:spPr>
-          <a:xfrm>
-            <a:off x="1371600" y="2212848"/>
-            <a:ext cx="7040880" cy="548640"/>
-          </a:xfrm>
-          <a:prstGeom prst="rect">
-            <a:avLst/>
-          </a:prstGeom>
-          <a:noFill/>
-          <a:ln/>
-        </p:spPr>
-        <p:txBody>
-          <a:bodyPr wrap="square" lIns="0" tIns="0" rIns="0" bIns="0" rtlCol="0" anchor="ctr"/>
-          <a:lstStyle/>
-          <a:p>
-            <a:pPr indent="0" marL="0">
-              <a:buNone/>
-            </a:pPr>
-            <a:r>
-              <a:rPr lang="en-US" sz="1400" dirty="0">
-                <a:solidFill>
-                  <a:srgbClr val="FFFFFF"/>
-                </a:solidFill>
-                <a:latin typeface="Calibri" pitchFamily="34" charset="0"/>
-                <a:ea typeface="Calibri" pitchFamily="34" charset="-122"/>
-                <a:cs typeface="Calibri" pitchFamily="34" charset="-120"/>
-              </a:rPr>
-              <a:t>PayPal enregistre vos paiements.</a:t>
-            </a:r>
-            <a:endParaRPr lang="en-US" sz="1400" dirty="0"/>
-          </a:p>
-        </p:txBody>
-      </p:sp>
-      <p:sp>
-        <p:nvSpPr>
-          <p:cNvPr id="8" name="Text 6"/>
-          <p:cNvSpPr txBox="1"/>
-          <p:nvPr/>
-        </p:nvSpPr>
-        <p:spPr>
-          <a:xfrm>
-            <a:off x="731520" y="2871216"/>
-            <a:ext cx="457200" cy="548640"/>
-          </a:xfrm>
-          <a:prstGeom prst="roundRect">
-            <a:avLst>
-              <a:gd name="adj" fmla="val 50000"/>
-            </a:avLst>
-          </a:prstGeom>
-          <a:solidFill>
-            <a:srgbClr val="00BFA6"/>
-          </a:solidFill>
-          <a:ln/>
-        </p:spPr>
-        <p:txBody>
-          <a:bodyPr wrap="square" lIns="0" tIns="0" rIns="0" bIns="0" rtlCol="0" anchor="ctr"/>
-          <a:lstStyle/>
-          <a:p>
-            <a:pPr algn="ctr" indent="0" marL="0">
-              <a:buNone/>
-            </a:pPr>
-            <a:r>
-              <a:rPr lang="en-US" sz="1600" b="1" dirty="0">
-                <a:solidFill>
-                  <a:srgbClr val="0F1419"/>
-                </a:solidFill>
-                <a:latin typeface="Calibri" pitchFamily="34" charset="0"/>
-                <a:ea typeface="Calibri" pitchFamily="34" charset="-122"/>
-                <a:cs typeface="Calibri" pitchFamily="34" charset="-120"/>
-              </a:rPr>
-              <a:t>3</a:t>
-            </a:r>
-            <a:endParaRPr lang="en-US" sz="1600" dirty="0"/>
-          </a:p>
-        </p:txBody>
-      </p:sp>
-      <p:sp>
-        <p:nvSpPr>
-          <p:cNvPr id="9" name="Text 7"/>
-          <p:cNvSpPr txBox="1"/>
-          <p:nvPr/>
-        </p:nvSpPr>
-        <p:spPr>
-          <a:xfrm>
-            <a:off x="1371600" y="2871216"/>
-            <a:ext cx="7040880" cy="548640"/>
-          </a:xfrm>
-          <a:prstGeom prst="rect">
-            <a:avLst/>
-          </a:prstGeom>
-          <a:noFill/>
-          <a:ln/>
-        </p:spPr>
-        <p:txBody>
-          <a:bodyPr wrap="square" lIns="0" tIns="0" rIns="0" bIns="0" rtlCol="0" anchor="ctr"/>
-          <a:lstStyle/>
-          <a:p>
-            <a:pPr indent="0" marL="0">
-              <a:buNone/>
-            </a:pPr>
-            <a:r>
-              <a:rPr lang="en-US" sz="1400" dirty="0">
-                <a:solidFill>
-                  <a:srgbClr val="FFFFFF"/>
-                </a:solidFill>
-                <a:latin typeface="Calibri" pitchFamily="34" charset="0"/>
-                <a:ea typeface="Calibri" pitchFamily="34" charset="-122"/>
-                <a:cs typeface="Calibri" pitchFamily="34" charset="-120"/>
-              </a:rPr>
-              <a:t>Wave sait combien vous avez sur votre compte.</a:t>
-            </a:r>
-            <a:endParaRPr lang="en-US" sz="1400" dirty="0"/>
-          </a:p>
-        </p:txBody>
-      </p:sp>
-      <p:sp>
-        <p:nvSpPr>
-          <p:cNvPr id="10" name="Text 8"/>
-          <p:cNvSpPr txBox="1"/>
-          <p:nvPr/>
-        </p:nvSpPr>
-        <p:spPr>
-          <a:xfrm>
-            <a:off x="731520" y="3529584"/>
-            <a:ext cx="457200" cy="548640"/>
-          </a:xfrm>
-          <a:prstGeom prst="roundRect">
-            <a:avLst>
-              <a:gd name="adj" fmla="val 50000"/>
-            </a:avLst>
-          </a:prstGeom>
-          <a:solidFill>
-            <a:srgbClr val="00BFA6"/>
-          </a:solidFill>
-          <a:ln/>
-        </p:spPr>
-        <p:txBody>
-          <a:bodyPr wrap="square" lIns="0" tIns="0" rIns="0" bIns="0" rtlCol="0" anchor="ctr"/>
-          <a:lstStyle/>
-          <a:p>
-            <a:pPr algn="ctr" indent="0" marL="0">
-              <a:buNone/>
-            </a:pPr>
-            <a:r>
-              <a:rPr lang="en-US" sz="1600" b="1" dirty="0">
-                <a:solidFill>
-                  <a:srgbClr val="0F1419"/>
-                </a:solidFill>
-                <a:latin typeface="Calibri" pitchFamily="34" charset="0"/>
-                <a:ea typeface="Calibri" pitchFamily="34" charset="-122"/>
-                <a:cs typeface="Calibri" pitchFamily="34" charset="-120"/>
-              </a:rPr>
-              <a:t>4</a:t>
-            </a:r>
-            <a:endParaRPr lang="en-US" sz="1600" dirty="0"/>
-          </a:p>
-        </p:txBody>
-      </p:sp>
-      <p:sp>
-        <p:nvSpPr>
-          <p:cNvPr id="11" name="Text 9"/>
-          <p:cNvSpPr txBox="1"/>
-          <p:nvPr/>
-        </p:nvSpPr>
-        <p:spPr>
-          <a:xfrm>
-            <a:off x="1371600" y="3529584"/>
-            <a:ext cx="7040880" cy="548640"/>
-          </a:xfrm>
-          <a:prstGeom prst="rect">
-            <a:avLst/>
-          </a:prstGeom>
-          <a:noFill/>
-          <a:ln/>
-        </p:spPr>
-        <p:txBody>
-          <a:bodyPr wrap="square" lIns="0" tIns="0" rIns="0" bIns="0" rtlCol="0" anchor="ctr"/>
-          <a:lstStyle/>
-          <a:p>
-            <a:pPr indent="0" marL="0">
-              <a:buNone/>
-            </a:pPr>
-            <a:r>
-              <a:rPr lang="en-US" sz="1400" dirty="0">
-                <a:solidFill>
-                  <a:srgbClr val="FFFFFF"/>
-                </a:solidFill>
-                <a:latin typeface="Calibri" pitchFamily="34" charset="0"/>
-                <a:ea typeface="Calibri" pitchFamily="34" charset="-122"/>
-                <a:cs typeface="Calibri" pitchFamily="34" charset="-120"/>
-              </a:rPr>
-              <a:t>La preuve de travail (Proof-of-Work) : pour ajouter une transaction, il faut résoudre un puzzle mathématique coûteux en énergie. Cela empêche de tr...</a:t>
-            </a:r>
-            <a:endParaRPr lang="en-US" sz="1400" dirty="0"/>
-          </a:p>
-        </p:txBody>
-      </p:sp>
-      <p:sp>
-        <p:nvSpPr>
-          <p:cNvPr id="12" name="Text 10"/>
-          <p:cNvSpPr txBox="1"/>
-          <p:nvPr/>
-        </p:nvSpPr>
-        <p:spPr>
-          <a:xfrm>
-            <a:off x="731520" y="4187952"/>
-            <a:ext cx="457200" cy="548640"/>
-          </a:xfrm>
-          <a:prstGeom prst="roundRect">
-            <a:avLst>
-              <a:gd name="adj" fmla="val 50000"/>
-            </a:avLst>
-          </a:prstGeom>
-          <a:solidFill>
-            <a:srgbClr val="00BFA6"/>
-          </a:solidFill>
-          <a:ln/>
-        </p:spPr>
-        <p:txBody>
-          <a:bodyPr wrap="square" lIns="0" tIns="0" rIns="0" bIns="0" rtlCol="0" anchor="ctr"/>
-          <a:lstStyle/>
-          <a:p>
-            <a:pPr algn="ctr" indent="0" marL="0">
-              <a:buNone/>
-            </a:pPr>
-            <a:r>
-              <a:rPr lang="en-US" sz="1600" b="1" dirty="0">
-                <a:solidFill>
-                  <a:srgbClr val="0F1419"/>
-                </a:solidFill>
-                <a:latin typeface="Calibri" pitchFamily="34" charset="0"/>
-                <a:ea typeface="Calibri" pitchFamily="34" charset="-122"/>
-                <a:cs typeface="Calibri" pitchFamily="34" charset="-120"/>
-              </a:rPr>
-              <a:t>5</a:t>
-            </a:r>
-            <a:endParaRPr lang="en-US" sz="1600" dirty="0"/>
-          </a:p>
-        </p:txBody>
-      </p:sp>
-      <p:sp>
-        <p:nvSpPr>
-          <p:cNvPr id="13" name="Text 11"/>
-          <p:cNvSpPr txBox="1"/>
-          <p:nvPr/>
-        </p:nvSpPr>
-        <p:spPr>
-          <a:xfrm>
-            <a:off x="1371600" y="4187952"/>
-            <a:ext cx="7040880" cy="548640"/>
-          </a:xfrm>
-          <a:prstGeom prst="rect">
-            <a:avLst/>
-          </a:prstGeom>
-          <a:noFill/>
-          <a:ln/>
-        </p:spPr>
-        <p:txBody>
-          <a:bodyPr wrap="square" lIns="0" tIns="0" rIns="0" bIns="0" rtlCol="0" anchor="ctr"/>
-          <a:lstStyle/>
-          <a:p>
-            <a:pPr indent="0" marL="0">
-              <a:buNone/>
-            </a:pPr>
-            <a:r>
-              <a:rPr lang="en-US" sz="1400" dirty="0">
-                <a:solidFill>
-                  <a:srgbClr val="FFFFFF"/>
-                </a:solidFill>
-                <a:latin typeface="Calibri" pitchFamily="34" charset="0"/>
-                <a:ea typeface="Calibri" pitchFamily="34" charset="-122"/>
-                <a:cs typeface="Calibri" pitchFamily="34" charset="-120"/>
-              </a:rPr>
-              <a:t>La chaîne de blocs cryptographique : chaque bloc contient l'empreinte du bloc précédent. Modifier un bloc oblige à modifier toute la chaîne — mathé...</a:t>
-            </a:r>
-            <a:endParaRPr lang="en-US" sz="1400" dirty="0"/>
           </a:p>
         </p:txBody>
       </p:sp>
@@ -4739,8 +6027,8 @@
         </p:nvSpPr>
         <p:spPr>
           <a:xfrm>
-            <a:off x="731520" y="1371600"/>
-            <a:ext cx="7680960" cy="640080"/>
+            <a:off x="731520" y="457200"/>
+            <a:ext cx="4206240" cy="3474720"/>
           </a:xfrm>
           <a:prstGeom prst="rect">
             <a:avLst/>
@@ -4749,14 +6037,145 @@
           <a:ln/>
         </p:spPr>
         <p:txBody>
+          <a:bodyPr wrap="square" lIns="0" tIns="0" rIns="0" bIns="0" rtlCol="0" anchor="t"/>
+          <a:lstStyle/>
+          <a:p>
+            <a:pPr marL="342900" indent="-342900">
+              <a:spcAft>
+                <a:spcPts val="600"/>
+              </a:spcAft>
+              <a:buSzPct val="100000"/>
+              <a:buChar char="•"/>
+            </a:pPr>
+            <a:r>
+              <a:rPr lang="en-US" sz="1300" dirty="0">
+                <a:solidFill>
+                  <a:srgbClr val="FFFFFF"/>
+                </a:solidFill>
+                <a:latin typeface="Calibri" pitchFamily="34" charset="0"/>
+                <a:ea typeface="Calibri" pitchFamily="34" charset="-122"/>
+                <a:cs typeface="Calibri" pitchFamily="34" charset="-120"/>
+              </a:rPr>
+              <a:t>Les trois innovations majeures :</a:t>
+            </a:r>
+            <a:endParaRPr lang="en-US" sz="1300" dirty="0"/>
+          </a:p>
+          <a:p>
+            <a:pPr marL="342900" indent="-342900">
+              <a:spcAft>
+                <a:spcPts val="600"/>
+              </a:spcAft>
+              <a:buSzPct val="100000"/>
+              <a:buChar char="•"/>
+            </a:pPr>
+            <a:r>
+              <a:rPr lang="en-US" sz="1300" dirty="0">
+                <a:solidFill>
+                  <a:srgbClr val="FFFFFF"/>
+                </a:solidFill>
+                <a:latin typeface="Calibri" pitchFamily="34" charset="0"/>
+                <a:ea typeface="Calibri" pitchFamily="34" charset="-122"/>
+                <a:cs typeface="Calibri" pitchFamily="34" charset="-120"/>
+              </a:rPr>
+              <a:t>La preuve de travail (Proof-of-Work) : pour ajouter une transaction, il faut résoudre un puzzle mathématique coûteux ...</a:t>
+            </a:r>
+            <a:endParaRPr lang="en-US" sz="1300" dirty="0"/>
+          </a:p>
+          <a:p>
+            <a:pPr marL="342900" indent="-342900">
+              <a:spcAft>
+                <a:spcPts val="600"/>
+              </a:spcAft>
+              <a:buSzPct val="100000"/>
+              <a:buChar char="•"/>
+            </a:pPr>
+            <a:r>
+              <a:rPr lang="en-US" sz="1300" dirty="0">
+                <a:solidFill>
+                  <a:srgbClr val="FFFFFF"/>
+                </a:solidFill>
+                <a:latin typeface="Calibri" pitchFamily="34" charset="0"/>
+                <a:ea typeface="Calibri" pitchFamily="34" charset="-122"/>
+                <a:cs typeface="Calibri" pitchFamily="34" charset="-120"/>
+              </a:rPr>
+              <a:t>La chaîne de blocs cryptographique : chaque bloc contient l'empreinte du bloc précédent. Modifier un bloc oblige à mo...</a:t>
+            </a:r>
+            <a:endParaRPr lang="en-US" sz="1300" dirty="0"/>
+          </a:p>
+        </p:txBody>
+      </p:sp>
+      <p:sp>
+        <p:nvSpPr>
+          <p:cNvPr id="3" name="Shape 1"/>
+          <p:cNvSpPr/>
+          <p:nvPr/>
+        </p:nvSpPr>
+        <p:spPr>
+          <a:xfrm>
+            <a:off x="5120640" y="457200"/>
+            <a:ext cx="3474720" cy="640080"/>
+          </a:xfrm>
+          <a:prstGeom prst="roundRect">
+            <a:avLst>
+              <a:gd name="adj" fmla="val 14286"/>
+            </a:avLst>
+          </a:prstGeom>
+          <a:solidFill>
+            <a:srgbClr val="1A2332"/>
+          </a:solidFill>
+          <a:ln/>
+        </p:spPr>
+      </p:sp>
+      <p:pic>
+        <p:nvPicPr>
+          <p:cNvPr id="4" name="Image 0" descr="preencoded.png">    </p:cNvPr>
+          <p:cNvPicPr>
+            <a:picLocks noChangeAspect="1"/>
+          </p:cNvPicPr>
+          <p:nvPr/>
+        </p:nvPicPr>
+        <p:blipFill>
+          <a:blip r:embed="rId1"/>
+          <a:stretch>
+            <a:fillRect/>
+          </a:stretch>
+        </p:blipFill>
+        <p:spPr>
+          <a:xfrm>
+            <a:off x="5257800" y="557784"/>
+            <a:ext cx="438912" cy="438912"/>
+          </a:xfrm>
+          <a:prstGeom prst="rect">
+            <a:avLst/>
+          </a:prstGeom>
+        </p:spPr>
+      </p:pic>
+      <p:sp>
+        <p:nvSpPr>
+          <p:cNvPr id="5" name="Text 2"/>
+          <p:cNvSpPr txBox="1"/>
+          <p:nvPr/>
+        </p:nvSpPr>
+        <p:spPr>
+          <a:xfrm>
+            <a:off x="5806440" y="457200"/>
+            <a:ext cx="2651760" cy="640080"/>
+          </a:xfrm>
+          <a:prstGeom prst="rect">
+            <a:avLst/>
+          </a:prstGeom>
+          <a:noFill/>
+          <a:ln/>
+        </p:spPr>
+        <p:txBody>
           <a:bodyPr wrap="square" lIns="0" tIns="0" rIns="0" bIns="0" rtlCol="0" anchor="ctr"/>
           <a:lstStyle/>
           <a:p>
-            <a:pPr algn="ctr" indent="0" marL="0">
+            <a:pPr indent="0" marL="0">
               <a:buNone/>
             </a:pPr>
             <a:r>
-              <a:rPr lang="en-US" sz="3000" b="1" dirty="0">
+              <a:rPr lang="en-US" sz="1200" dirty="0">
                 <a:solidFill>
                   <a:srgbClr val="FFFFFF"/>
                 </a:solidFill>
@@ -4764,22 +6183,68 @@
                 <a:ea typeface="Calibri" pitchFamily="34" charset="-122"/>
                 <a:cs typeface="Calibri" pitchFamily="34" charset="-120"/>
               </a:rPr>
-              <a:t>Module 3 termine</a:t>
-            </a:r>
-            <a:endParaRPr lang="en-US" sz="3000" dirty="0"/>
-          </a:p>
-        </p:txBody>
-      </p:sp>
-      <p:sp>
-        <p:nvSpPr>
-          <p:cNvPr id="3" name="Text 1"/>
+              <a:t>La récompense pour les mineurs : ceux qui sécurisent le réseau reçoivent de n...</a:t>
+            </a:r>
+            <a:endParaRPr lang="en-US" sz="1200" dirty="0"/>
+          </a:p>
+        </p:txBody>
+      </p:sp>
+      <p:sp>
+        <p:nvSpPr>
+          <p:cNvPr id="6" name="Shape 3"/>
+          <p:cNvSpPr/>
+          <p:nvPr/>
+        </p:nvSpPr>
+        <p:spPr>
+          <a:xfrm>
+            <a:off x="5120640" y="1188720"/>
+            <a:ext cx="3474720" cy="640080"/>
+          </a:xfrm>
+          <a:prstGeom prst="roundRect">
+            <a:avLst>
+              <a:gd name="adj" fmla="val 14286"/>
+            </a:avLst>
+          </a:prstGeom>
+          <a:solidFill>
+            <a:srgbClr val="1A2332"/>
+          </a:solidFill>
+          <a:ln/>
+        </p:spPr>
+      </p:sp>
+      <p:pic>
+        <p:nvPicPr>
+          <p:cNvPr id="7" name="Image 1" descr="preencoded.png">    </p:cNvPr>
+          <p:cNvPicPr>
+            <a:picLocks noChangeAspect="1"/>
+          </p:cNvPicPr>
+          <p:nvPr/>
+        </p:nvPicPr>
+        <p:blipFill>
+          <a:blip r:embed="rId2"/>
+          <a:stretch>
+            <a:fillRect/>
+          </a:stretch>
+        </p:blipFill>
+        <p:spPr>
+          <a:xfrm>
+            <a:off x="5257800" y="1289304"/>
+            <a:ext cx="438912" cy="438912"/>
+          </a:xfrm>
+          <a:prstGeom prst="rect">
+            <a:avLst/>
+          </a:prstGeom>
+        </p:spPr>
+      </p:pic>
+      <p:sp>
+        <p:nvSpPr>
+          <p:cNvPr id="8" name="Text 4"/>
           <p:cNvSpPr txBox="1"/>
           <p:nvPr/>
         </p:nvSpPr>
         <p:spPr>
           <a:xfrm>
-            <a:off x="1371600" y="2194560"/>
-            <a:ext cx="6400800" cy="457200"/>
+            <a:off x="5806440" y="1188720"/>
+            <a:ext cx="2651760" cy="640080"/>
           </a:xfrm>
           <a:prstGeom prst="rect">
             <a:avLst/>
@@ -4791,119 +6256,21 @@
           <a:bodyPr wrap="square" lIns="0" tIns="0" rIns="0" bIns="0" rtlCol="0" anchor="ctr"/>
           <a:lstStyle/>
           <a:p>
-            <a:pPr algn="ctr" indent="0" marL="0">
+            <a:pPr indent="0" marL="0">
               <a:buNone/>
             </a:pPr>
             <a:r>
-              <a:rPr lang="en-US" sz="1400" dirty="0">
-                <a:solidFill>
-                  <a:srgbClr val="94A3B8"/>
-                </a:solidFill>
-                <a:latin typeface="Calibri" pitchFamily="34" charset="0"/>
-                <a:ea typeface="Calibri" pitchFamily="34" charset="-122"/>
-                <a:cs typeface="Calibri" pitchFamily="34" charset="-120"/>
-              </a:rPr>
-              <a:t>Passez au module suivant pour continuer votre apprentissage.</a:t>
-            </a:r>
-            <a:endParaRPr lang="en-US" sz="1400" dirty="0"/>
-          </a:p>
-        </p:txBody>
-      </p:sp>
-      <p:sp>
-        <p:nvSpPr>
-          <p:cNvPr id="4" name="Shape 2"/>
-          <p:cNvSpPr/>
-          <p:nvPr/>
-        </p:nvSpPr>
-        <p:spPr>
-          <a:xfrm>
-            <a:off x="3200400" y="2926080"/>
-            <a:ext cx="2743200" cy="54864"/>
-          </a:xfrm>
-          <a:prstGeom prst="rect">
-            <a:avLst/>
-          </a:prstGeom>
-          <a:solidFill>
-            <a:srgbClr val="00BFA6"/>
-          </a:solidFill>
-          <a:ln/>
-        </p:spPr>
-      </p:sp>
-      <p:sp>
-        <p:nvSpPr>
-          <p:cNvPr id="5" name="Text 3"/>
-          <p:cNvSpPr txBox="1"/>
-          <p:nvPr/>
-        </p:nvSpPr>
-        <p:spPr>
-          <a:xfrm>
-            <a:off x="2286000" y="3291840"/>
-            <a:ext cx="4572000" cy="365760"/>
-          </a:xfrm>
-          <a:prstGeom prst="rect">
-            <a:avLst/>
-          </a:prstGeom>
-          <a:noFill/>
-          <a:ln/>
-        </p:spPr>
-        <p:txBody>
-          <a:bodyPr wrap="square" lIns="0" tIns="0" rIns="0" bIns="0" rtlCol="0" anchor="ctr"/>
-          <a:lstStyle/>
-          <a:p>
-            <a:pPr algn="ctr" indent="0" marL="0">
-              <a:buNone/>
-            </a:pPr>
-            <a:r>
-              <a:rPr lang="en-US" sz="1200" spc="300" kern="0" dirty="0">
-                <a:solidFill>
-                  <a:srgbClr val="64748B"/>
-                </a:solidFill>
-                <a:latin typeface="Calibri" pitchFamily="34" charset="0"/>
-                <a:ea typeface="Calibri" pitchFamily="34" charset="-122"/>
-                <a:cs typeface="Calibri" pitchFamily="34" charset="-120"/>
-              </a:rPr>
-              <a:t>TEREX ACADEMY</a:t>
+              <a:rPr lang="en-US" sz="1200" dirty="0">
+                <a:solidFill>
+                  <a:srgbClr val="FFFFFF"/>
+                </a:solidFill>
+                <a:latin typeface="Calibri" pitchFamily="34" charset="0"/>
+                <a:ea typeface="Calibri" pitchFamily="34" charset="-122"/>
+                <a:cs typeface="Calibri" pitchFamily="34" charset="-120"/>
+              </a:rPr>
+              <a:t>Aujourd'hui, cette technologie inspire des milliers d'autres projets : Ethere...</a:t>
             </a:r>
             <a:endParaRPr lang="en-US" sz="1200" dirty="0"/>
-          </a:p>
-        </p:txBody>
-      </p:sp>
-      <p:sp>
-        <p:nvSpPr>
-          <p:cNvPr id="6" name="Text 4"/>
-          <p:cNvSpPr txBox="1"/>
-          <p:nvPr/>
-        </p:nvSpPr>
-        <p:spPr>
-          <a:xfrm>
-            <a:off x="2286000" y="3657600"/>
-            <a:ext cx="4572000" cy="320040"/>
-          </a:xfrm>
-          <a:prstGeom prst="rect">
-            <a:avLst/>
-          </a:prstGeom>
-          <a:noFill/>
-          <a:ln/>
-        </p:spPr>
-        <p:txBody>
-          <a:bodyPr wrap="square" lIns="0" tIns="0" rIns="0" bIns="0" rtlCol="0" anchor="ctr"/>
-          <a:lstStyle/>
-          <a:p>
-            <a:pPr algn="ctr" indent="0" marL="0">
-              <a:buNone/>
-            </a:pPr>
-            <a:r>
-              <a:rPr lang="en-US" sz="1100" dirty="0">
-                <a:solidFill>
-                  <a:srgbClr val="009E8B"/>
-                </a:solidFill>
-                <a:latin typeface="Calibri" pitchFamily="34" charset="0"/>
-                <a:ea typeface="Calibri" pitchFamily="34" charset="-122"/>
-                <a:cs typeface="Calibri" pitchFamily="34" charset="-120"/>
-              </a:rPr>
-              <a:t>terangaexchange.com</a:t>
-            </a:r>
-            <a:endParaRPr lang="en-US" sz="1100" dirty="0"/>
           </a:p>
         </p:txBody>
       </p:sp>
@@ -4947,8 +6314,8 @@
         </p:nvSpPr>
         <p:spPr>
           <a:xfrm>
-            <a:off x="731520" y="457200"/>
-            <a:ext cx="2743200" cy="365760"/>
+            <a:off x="731520" y="365760"/>
+            <a:ext cx="2743200" cy="320040"/>
           </a:xfrm>
           <a:prstGeom prst="rect">
             <a:avLst/>
@@ -4966,7 +6333,7 @@
             <a:r>
               <a:rPr lang="en-US" sz="1200" b="1" spc="300" kern="0" dirty="0">
                 <a:solidFill>
-                  <a:srgbClr val="00BFA6"/>
+                  <a:srgbClr val="EC4899"/>
                 </a:solidFill>
                 <a:latin typeface="Calibri" pitchFamily="34" charset="0"/>
                 <a:ea typeface="Calibri" pitchFamily="34" charset="-122"/>
@@ -4986,7 +6353,7 @@
         </p:nvSpPr>
         <p:spPr>
           <a:xfrm>
-            <a:off x="731520" y="868680"/>
+            <a:off x="731520" y="731520"/>
             <a:ext cx="4572000" cy="457200"/>
           </a:xfrm>
           <a:prstGeom prst="rect">
@@ -5019,14 +6386,36 @@
       </p:sp>
       <p:sp>
         <p:nvSpPr>
-          <p:cNvPr id="4" name="Text 2"/>
+          <p:cNvPr id="4" name="Shape 2"/>
+          <p:cNvSpPr/>
+          <p:nvPr/>
+        </p:nvSpPr>
+        <p:spPr>
+          <a:xfrm>
+            <a:off x="731520" y="1371600"/>
+            <a:ext cx="7680960" cy="475488"/>
+          </a:xfrm>
+          <a:prstGeom prst="roundRect">
+            <a:avLst>
+              <a:gd name="adj" fmla="val 15385"/>
+            </a:avLst>
+          </a:prstGeom>
+          <a:solidFill>
+            <a:srgbClr val="1A2332"/>
+          </a:solidFill>
+          <a:ln/>
+        </p:spPr>
+      </p:sp>
+      <p:sp>
+        <p:nvSpPr>
+          <p:cNvPr id="5" name="Text 3"/>
           <p:cNvSpPr txBox="1"/>
           <p:nvPr/>
         </p:nvSpPr>
         <p:spPr>
           <a:xfrm>
-            <a:off x="731520" y="1554480"/>
-            <a:ext cx="7680960" cy="3200400"/>
+            <a:off x="868680" y="1371600"/>
+            <a:ext cx="320040" cy="475488"/>
           </a:xfrm>
           <a:prstGeom prst="rect">
             <a:avLst/>
@@ -5035,17 +6424,77 @@
           <a:ln/>
         </p:spPr>
         <p:txBody>
-          <a:bodyPr wrap="square" lIns="0" tIns="0" rIns="0" bIns="0" rtlCol="0" anchor="t"/>
+          <a:bodyPr wrap="square" lIns="0" tIns="0" rIns="0" bIns="0" rtlCol="0" anchor="ctr"/>
+          <a:lstStyle/>
+          <a:p>
+            <a:pPr algn="ctr" indent="0" marL="0">
+              <a:buNone/>
+            </a:pPr>
+            <a:r>
+              <a:rPr lang="en-US" sz="1300" b="1" dirty="0">
+                <a:solidFill>
+                  <a:srgbClr val="EC4899"/>
+                </a:solidFill>
+                <a:latin typeface="Calibri" pitchFamily="34" charset="0"/>
+                <a:ea typeface="Calibri" pitchFamily="34" charset="-122"/>
+                <a:cs typeface="Calibri" pitchFamily="34" charset="-120"/>
+              </a:rPr>
+              <a:t>1</a:t>
+            </a:r>
+            <a:endParaRPr lang="en-US" sz="1300" dirty="0"/>
+          </a:p>
+        </p:txBody>
+      </p:sp>
+      <p:pic>
+        <p:nvPicPr>
+          <p:cNvPr id="6" name="Image 0" descr="preencoded.png">    </p:cNvPr>
+          <p:cNvPicPr>
+            <a:picLocks noChangeAspect="1"/>
+          </p:cNvPicPr>
+          <p:nvPr/>
+        </p:nvPicPr>
+        <p:blipFill>
+          <a:blip r:embed="rId1"/>
+          <a:stretch>
+            <a:fillRect/>
+          </a:stretch>
+        </p:blipFill>
+        <p:spPr>
+          <a:xfrm>
+            <a:off x="1280160" y="1444752"/>
+            <a:ext cx="329184" cy="329184"/>
+          </a:xfrm>
+          <a:prstGeom prst="rect">
+            <a:avLst/>
+          </a:prstGeom>
+        </p:spPr>
+      </p:pic>
+      <p:sp>
+        <p:nvSpPr>
+          <p:cNvPr id="7" name="Text 4"/>
+          <p:cNvSpPr txBox="1"/>
+          <p:nvPr/>
+        </p:nvSpPr>
+        <p:spPr>
+          <a:xfrm>
+            <a:off x="1737360" y="1371600"/>
+            <a:ext cx="6492240" cy="475488"/>
+          </a:xfrm>
+          <a:prstGeom prst="rect">
+            <a:avLst/>
+          </a:prstGeom>
+          <a:noFill/>
+          <a:ln/>
+        </p:spPr>
+        <p:txBody>
+          <a:bodyPr wrap="square" lIns="0" tIns="0" rIns="0" bIns="0" rtlCol="0" anchor="ctr"/>
           <a:lstStyle/>
           <a:p>
             <a:pPr indent="0" marL="0">
-              <a:spcAft>
-                <a:spcPts val="1000"/>
-              </a:spcAft>
               <a:buNone/>
             </a:pPr>
             <a:r>
-              <a:rPr lang="en-US" sz="1500" dirty="0">
+              <a:rPr lang="en-US" sz="1300" dirty="0">
                 <a:solidFill>
                   <a:srgbClr val="FFFFFF"/>
                 </a:solidFill>
@@ -5053,19 +6502,609 @@
                 <a:ea typeface="Calibri" pitchFamily="34" charset="-122"/>
                 <a:cs typeface="Calibri" pitchFamily="34" charset="-120"/>
               </a:rPr>
-              <a:t>1.  Acheter votre premier USDT avec Terex</a:t>
+              <a:t>Acheter votre premier USDT avec Terex</a:t>
+            </a:r>
+            <a:endParaRPr lang="en-US" sz="1300" dirty="0"/>
+          </a:p>
+        </p:txBody>
+      </p:sp>
+      <p:sp>
+        <p:nvSpPr>
+          <p:cNvPr id="8" name="Shape 5"/>
+          <p:cNvSpPr/>
+          <p:nvPr/>
+        </p:nvSpPr>
+        <p:spPr>
+          <a:xfrm>
+            <a:off x="731520" y="1920240"/>
+            <a:ext cx="7680960" cy="475488"/>
+          </a:xfrm>
+          <a:prstGeom prst="roundRect">
+            <a:avLst>
+              <a:gd name="adj" fmla="val 15385"/>
+            </a:avLst>
+          </a:prstGeom>
+          <a:solidFill>
+            <a:srgbClr val="1A2332"/>
+          </a:solidFill>
+          <a:ln/>
+        </p:spPr>
+      </p:sp>
+      <p:sp>
+        <p:nvSpPr>
+          <p:cNvPr id="9" name="Text 6"/>
+          <p:cNvSpPr txBox="1"/>
+          <p:nvPr/>
+        </p:nvSpPr>
+        <p:spPr>
+          <a:xfrm>
+            <a:off x="868680" y="1920240"/>
+            <a:ext cx="320040" cy="475488"/>
+          </a:xfrm>
+          <a:prstGeom prst="rect">
+            <a:avLst/>
+          </a:prstGeom>
+          <a:noFill/>
+          <a:ln/>
+        </p:spPr>
+        <p:txBody>
+          <a:bodyPr wrap="square" lIns="0" tIns="0" rIns="0" bIns="0" rtlCol="0" anchor="ctr"/>
+          <a:lstStyle/>
+          <a:p>
+            <a:pPr algn="ctr" indent="0" marL="0">
+              <a:buNone/>
+            </a:pPr>
+            <a:r>
+              <a:rPr lang="en-US" sz="1300" b="1" dirty="0">
+                <a:solidFill>
+                  <a:srgbClr val="EC4899"/>
+                </a:solidFill>
+                <a:latin typeface="Calibri" pitchFamily="34" charset="0"/>
+                <a:ea typeface="Calibri" pitchFamily="34" charset="-122"/>
+                <a:cs typeface="Calibri" pitchFamily="34" charset="-120"/>
+              </a:rPr>
+              <a:t>2</a:t>
+            </a:r>
+            <a:endParaRPr lang="en-US" sz="1300" dirty="0"/>
+          </a:p>
+        </p:txBody>
+      </p:sp>
+      <p:pic>
+        <p:nvPicPr>
+          <p:cNvPr id="10" name="Image 1" descr="preencoded.png">    </p:cNvPr>
+          <p:cNvPicPr>
+            <a:picLocks noChangeAspect="1"/>
+          </p:cNvPicPr>
+          <p:nvPr/>
+        </p:nvPicPr>
+        <p:blipFill>
+          <a:blip r:embed="rId2"/>
+          <a:stretch>
+            <a:fillRect/>
+          </a:stretch>
+        </p:blipFill>
+        <p:spPr>
+          <a:xfrm>
+            <a:off x="1280160" y="1993392"/>
+            <a:ext cx="329184" cy="329184"/>
+          </a:xfrm>
+          <a:prstGeom prst="rect">
+            <a:avLst/>
+          </a:prstGeom>
+        </p:spPr>
+      </p:pic>
+      <p:sp>
+        <p:nvSpPr>
+          <p:cNvPr id="11" name="Text 7"/>
+          <p:cNvSpPr txBox="1"/>
+          <p:nvPr/>
+        </p:nvSpPr>
+        <p:spPr>
+          <a:xfrm>
+            <a:off x="1737360" y="1920240"/>
+            <a:ext cx="6492240" cy="475488"/>
+          </a:xfrm>
+          <a:prstGeom prst="rect">
+            <a:avLst/>
+          </a:prstGeom>
+          <a:noFill/>
+          <a:ln/>
+        </p:spPr>
+        <p:txBody>
+          <a:bodyPr wrap="square" lIns="0" tIns="0" rIns="0" bIns="0" rtlCol="0" anchor="ctr"/>
+          <a:lstStyle/>
+          <a:p>
+            <a:pPr indent="0" marL="0">
+              <a:buNone/>
+            </a:pPr>
+            <a:r>
+              <a:rPr lang="en-US" sz="1300" dirty="0">
+                <a:solidFill>
+                  <a:srgbClr val="FFFFFF"/>
+                </a:solidFill>
+                <a:latin typeface="Calibri" pitchFamily="34" charset="0"/>
+                <a:ea typeface="Calibri" pitchFamily="34" charset="-122"/>
+                <a:cs typeface="Calibri" pitchFamily="34" charset="-120"/>
+              </a:rPr>
+              <a:t>L'histoire de la monnaie en 10 minutes</a:t>
+            </a:r>
+            <a:endParaRPr lang="en-US" sz="1300" dirty="0"/>
+          </a:p>
+        </p:txBody>
+      </p:sp>
+      <p:sp>
+        <p:nvSpPr>
+          <p:cNvPr id="12" name="Shape 8"/>
+          <p:cNvSpPr/>
+          <p:nvPr/>
+        </p:nvSpPr>
+        <p:spPr>
+          <a:xfrm>
+            <a:off x="731520" y="2468880"/>
+            <a:ext cx="7680960" cy="475488"/>
+          </a:xfrm>
+          <a:prstGeom prst="roundRect">
+            <a:avLst>
+              <a:gd name="adj" fmla="val 15385"/>
+            </a:avLst>
+          </a:prstGeom>
+          <a:solidFill>
+            <a:srgbClr val="1A2332"/>
+          </a:solidFill>
+          <a:ln/>
+        </p:spPr>
+      </p:sp>
+      <p:sp>
+        <p:nvSpPr>
+          <p:cNvPr id="13" name="Text 9"/>
+          <p:cNvSpPr txBox="1"/>
+          <p:nvPr/>
+        </p:nvSpPr>
+        <p:spPr>
+          <a:xfrm>
+            <a:off x="868680" y="2468880"/>
+            <a:ext cx="320040" cy="475488"/>
+          </a:xfrm>
+          <a:prstGeom prst="rect">
+            <a:avLst/>
+          </a:prstGeom>
+          <a:noFill/>
+          <a:ln/>
+        </p:spPr>
+        <p:txBody>
+          <a:bodyPr wrap="square" lIns="0" tIns="0" rIns="0" bIns="0" rtlCol="0" anchor="ctr"/>
+          <a:lstStyle/>
+          <a:p>
+            <a:pPr algn="ctr" indent="0" marL="0">
+              <a:buNone/>
+            </a:pPr>
+            <a:r>
+              <a:rPr lang="en-US" sz="1300" b="1" dirty="0">
+                <a:solidFill>
+                  <a:srgbClr val="EC4899"/>
+                </a:solidFill>
+                <a:latin typeface="Calibri" pitchFamily="34" charset="0"/>
+                <a:ea typeface="Calibri" pitchFamily="34" charset="-122"/>
+                <a:cs typeface="Calibri" pitchFamily="34" charset="-120"/>
+              </a:rPr>
+              <a:t>3</a:t>
+            </a:r>
+            <a:endParaRPr lang="en-US" sz="1300" dirty="0"/>
+          </a:p>
+        </p:txBody>
+      </p:sp>
+      <p:pic>
+        <p:nvPicPr>
+          <p:cNvPr id="14" name="Image 2" descr="preencoded.png">    </p:cNvPr>
+          <p:cNvPicPr>
+            <a:picLocks noChangeAspect="1"/>
+          </p:cNvPicPr>
+          <p:nvPr/>
+        </p:nvPicPr>
+        <p:blipFill>
+          <a:blip r:embed="rId3"/>
+          <a:stretch>
+            <a:fillRect/>
+          </a:stretch>
+        </p:blipFill>
+        <p:spPr>
+          <a:xfrm>
+            <a:off x="1280160" y="2542032"/>
+            <a:ext cx="329184" cy="329184"/>
+          </a:xfrm>
+          <a:prstGeom prst="rect">
+            <a:avLst/>
+          </a:prstGeom>
+        </p:spPr>
+      </p:pic>
+      <p:sp>
+        <p:nvSpPr>
+          <p:cNvPr id="15" name="Text 10"/>
+          <p:cNvSpPr txBox="1"/>
+          <p:nvPr/>
+        </p:nvSpPr>
+        <p:spPr>
+          <a:xfrm>
+            <a:off x="1737360" y="2468880"/>
+            <a:ext cx="6492240" cy="475488"/>
+          </a:xfrm>
+          <a:prstGeom prst="rect">
+            <a:avLst/>
+          </a:prstGeom>
+          <a:noFill/>
+          <a:ln/>
+        </p:spPr>
+        <p:txBody>
+          <a:bodyPr wrap="square" lIns="0" tIns="0" rIns="0" bIns="0" rtlCol="0" anchor="ctr"/>
+          <a:lstStyle/>
+          <a:p>
+            <a:pPr indent="0" marL="0">
+              <a:buNone/>
+            </a:pPr>
+            <a:r>
+              <a:rPr lang="en-US" sz="1300" dirty="0">
+                <a:solidFill>
+                  <a:srgbClr val="FFFFFF"/>
+                </a:solidFill>
+                <a:latin typeface="Calibri" pitchFamily="34" charset="0"/>
+                <a:ea typeface="Calibri" pitchFamily="34" charset="-122"/>
+                <a:cs typeface="Calibri" pitchFamily="34" charset="-120"/>
+              </a:rPr>
+              <a:t>2008, la naissance de Bitcoin</a:t>
+            </a:r>
+            <a:endParaRPr lang="en-US" sz="1300" dirty="0"/>
+          </a:p>
+        </p:txBody>
+      </p:sp>
+      <p:sp>
+        <p:nvSpPr>
+          <p:cNvPr id="16" name="Shape 11"/>
+          <p:cNvSpPr/>
+          <p:nvPr/>
+        </p:nvSpPr>
+        <p:spPr>
+          <a:xfrm>
+            <a:off x="731520" y="3017520"/>
+            <a:ext cx="7680960" cy="475488"/>
+          </a:xfrm>
+          <a:prstGeom prst="roundRect">
+            <a:avLst>
+              <a:gd name="adj" fmla="val 15385"/>
+            </a:avLst>
+          </a:prstGeom>
+          <a:solidFill>
+            <a:srgbClr val="1A2332"/>
+          </a:solidFill>
+          <a:ln/>
+        </p:spPr>
+      </p:sp>
+      <p:sp>
+        <p:nvSpPr>
+          <p:cNvPr id="17" name="Text 12"/>
+          <p:cNvSpPr txBox="1"/>
+          <p:nvPr/>
+        </p:nvSpPr>
+        <p:spPr>
+          <a:xfrm>
+            <a:off x="868680" y="3017520"/>
+            <a:ext cx="320040" cy="475488"/>
+          </a:xfrm>
+          <a:prstGeom prst="rect">
+            <a:avLst/>
+          </a:prstGeom>
+          <a:noFill/>
+          <a:ln/>
+        </p:spPr>
+        <p:txBody>
+          <a:bodyPr wrap="square" lIns="0" tIns="0" rIns="0" bIns="0" rtlCol="0" anchor="ctr"/>
+          <a:lstStyle/>
+          <a:p>
+            <a:pPr algn="ctr" indent="0" marL="0">
+              <a:buNone/>
+            </a:pPr>
+            <a:r>
+              <a:rPr lang="en-US" sz="1300" b="1" dirty="0">
+                <a:solidFill>
+                  <a:srgbClr val="EC4899"/>
+                </a:solidFill>
+                <a:latin typeface="Calibri" pitchFamily="34" charset="0"/>
+                <a:ea typeface="Calibri" pitchFamily="34" charset="-122"/>
+                <a:cs typeface="Calibri" pitchFamily="34" charset="-120"/>
+              </a:rPr>
+              <a:t>4</a:t>
+            </a:r>
+            <a:endParaRPr lang="en-US" sz="1300" dirty="0"/>
+          </a:p>
+        </p:txBody>
+      </p:sp>
+      <p:pic>
+        <p:nvPicPr>
+          <p:cNvPr id="18" name="Image 3" descr="preencoded.png">    </p:cNvPr>
+          <p:cNvPicPr>
+            <a:picLocks noChangeAspect="1"/>
+          </p:cNvPicPr>
+          <p:nvPr/>
+        </p:nvPicPr>
+        <p:blipFill>
+          <a:blip r:embed="rId4"/>
+          <a:stretch>
+            <a:fillRect/>
+          </a:stretch>
+        </p:blipFill>
+        <p:spPr>
+          <a:xfrm>
+            <a:off x="1280160" y="3090672"/>
+            <a:ext cx="329184" cy="329184"/>
+          </a:xfrm>
+          <a:prstGeom prst="rect">
+            <a:avLst/>
+          </a:prstGeom>
+        </p:spPr>
+      </p:pic>
+      <p:sp>
+        <p:nvSpPr>
+          <p:cNvPr id="19" name="Text 13"/>
+          <p:cNvSpPr txBox="1"/>
+          <p:nvPr/>
+        </p:nvSpPr>
+        <p:spPr>
+          <a:xfrm>
+            <a:off x="1737360" y="3017520"/>
+            <a:ext cx="6492240" cy="475488"/>
+          </a:xfrm>
+          <a:prstGeom prst="rect">
+            <a:avLst/>
+          </a:prstGeom>
+          <a:noFill/>
+          <a:ln/>
+        </p:spPr>
+        <p:txBody>
+          <a:bodyPr wrap="square" lIns="0" tIns="0" rIns="0" bIns="0" rtlCol="0" anchor="ctr"/>
+          <a:lstStyle/>
+          <a:p>
+            <a:pPr indent="0" marL="0">
+              <a:buNone/>
+            </a:pPr>
+            <a:r>
+              <a:rPr lang="en-US" sz="1300" dirty="0">
+                <a:solidFill>
+                  <a:srgbClr val="FFFFFF"/>
+                </a:solidFill>
+                <a:latin typeface="Calibri" pitchFamily="34" charset="0"/>
+                <a:ea typeface="Calibri" pitchFamily="34" charset="-122"/>
+                <a:cs typeface="Calibri" pitchFamily="34" charset="-120"/>
+              </a:rPr>
+              <a:t>La révolution Satoshi</a:t>
+            </a:r>
+            <a:endParaRPr lang="en-US" sz="1300" dirty="0"/>
+          </a:p>
+        </p:txBody>
+      </p:sp>
+    </p:spTree>
+  </p:cSld>
+  <p:clrMapOvr>
+    <a:masterClrMapping/>
+  </p:clrMapOvr>
+</p:sld>
+</file>
+
+<file path=ppt/slides/slide20.xml><?xml version="1.0" encoding="utf-8"?>
+<p:sld xmlns:a="http://schemas.openxmlformats.org/drawingml/2006/main" xmlns:r="http://schemas.openxmlformats.org/officeDocument/2006/relationships" xmlns:p="http://schemas.openxmlformats.org/presentationml/2006/main">
+  <p:cSld name="Slide 20">
+    <p:bg>
+      <p:bgPr>
+        <a:solidFill>
+          <a:srgbClr val="1A2332"/>
+        </a:solidFill>
+      </p:bgPr>
+    </p:bg>
+    <p:spTree>
+      <p:nvGrpSpPr>
+        <p:cNvPr id="1" name=""/>
+        <p:cNvGrpSpPr/>
+        <p:nvPr/>
+      </p:nvGrpSpPr>
+      <p:grpSpPr>
+        <a:xfrm>
+          <a:off x="0" y="0"/>
+          <a:ext cx="0" cy="0"/>
+          <a:chOff x="0" y="0"/>
+          <a:chExt cx="0" cy="0"/>
+        </a:xfrm>
+      </p:grpSpPr>
+      <p:pic>
+        <p:nvPicPr>
+          <p:cNvPr id="2" name="Image 0" descr="preencoded.png">    </p:cNvPr>
+          <p:cNvPicPr>
+            <a:picLocks noChangeAspect="1"/>
+          </p:cNvPicPr>
+          <p:nvPr/>
+        </p:nvPicPr>
+        <p:blipFill>
+          <a:blip r:embed="rId1"/>
+          <a:stretch>
+            <a:fillRect/>
+          </a:stretch>
+        </p:blipFill>
+        <p:spPr>
+          <a:xfrm>
+            <a:off x="731520" y="320040"/>
+            <a:ext cx="457200" cy="457200"/>
+          </a:xfrm>
+          <a:prstGeom prst="rect">
+            <a:avLst/>
+          </a:prstGeom>
+        </p:spPr>
+      </p:pic>
+      <p:sp>
+        <p:nvSpPr>
+          <p:cNvPr id="3" name="Text 0"/>
+          <p:cNvSpPr txBox="1"/>
+          <p:nvPr/>
+        </p:nvSpPr>
+        <p:spPr>
+          <a:xfrm>
+            <a:off x="1280160" y="365760"/>
+            <a:ext cx="2743200" cy="320040"/>
+          </a:xfrm>
+          <a:prstGeom prst="rect">
+            <a:avLst/>
+          </a:prstGeom>
+          <a:noFill/>
+          <a:ln/>
+        </p:spPr>
+        <p:txBody>
+          <a:bodyPr wrap="square" lIns="0" tIns="0" rIns="0" bIns="0" rtlCol="0" anchor="ctr"/>
+          <a:lstStyle/>
+          <a:p>
+            <a:pPr indent="0" marL="0">
+              <a:buNone/>
+            </a:pPr>
+            <a:r>
+              <a:rPr lang="en-US" sz="1200" b="1" spc="300" kern="0" dirty="0">
+                <a:solidFill>
+                  <a:srgbClr val="F59E0B"/>
+                </a:solidFill>
+                <a:latin typeface="Calibri" pitchFamily="34" charset="0"/>
+                <a:ea typeface="Calibri" pitchFamily="34" charset="-122"/>
+                <a:cs typeface="Calibri" pitchFamily="34" charset="-120"/>
+              </a:rPr>
+              <a:t>A RETENIR</a:t>
+            </a:r>
+            <a:endParaRPr lang="en-US" sz="1200" dirty="0"/>
+          </a:p>
+        </p:txBody>
+      </p:sp>
+      <p:sp>
+        <p:nvSpPr>
+          <p:cNvPr id="4" name="Text 1"/>
+          <p:cNvSpPr txBox="1"/>
+          <p:nvPr/>
+        </p:nvSpPr>
+        <p:spPr>
+          <a:xfrm>
+            <a:off x="731520" y="822960"/>
+            <a:ext cx="7680960" cy="457200"/>
+          </a:xfrm>
+          <a:prstGeom prst="rect">
+            <a:avLst/>
+          </a:prstGeom>
+          <a:noFill/>
+          <a:ln/>
+        </p:spPr>
+        <p:txBody>
+          <a:bodyPr wrap="square" lIns="0" tIns="0" rIns="0" bIns="0" rtlCol="0" anchor="ctr"/>
+          <a:lstStyle/>
+          <a:p>
+            <a:pPr indent="0" marL="0">
+              <a:buNone/>
+            </a:pPr>
+            <a:r>
+              <a:rPr lang="en-US" sz="2000" b="1" dirty="0">
+                <a:solidFill>
+                  <a:srgbClr val="FFFFFF"/>
+                </a:solidFill>
+                <a:latin typeface="Calibri" pitchFamily="34" charset="0"/>
+                <a:ea typeface="Calibri" pitchFamily="34" charset="-122"/>
+                <a:cs typeface="Calibri" pitchFamily="34" charset="-120"/>
+              </a:rPr>
+              <a:t>La révolution Satoshi</a:t>
+            </a:r>
+            <a:endParaRPr lang="en-US" sz="2000" dirty="0"/>
+          </a:p>
+        </p:txBody>
+      </p:sp>
+      <p:sp>
+        <p:nvSpPr>
+          <p:cNvPr id="5" name="Shape 2"/>
+          <p:cNvSpPr/>
+          <p:nvPr/>
+        </p:nvSpPr>
+        <p:spPr>
+          <a:xfrm>
+            <a:off x="731520" y="1463040"/>
+            <a:ext cx="7680960" cy="548640"/>
+          </a:xfrm>
+          <a:prstGeom prst="roundRect">
+            <a:avLst>
+              <a:gd name="adj" fmla="val 13333"/>
+            </a:avLst>
+          </a:prstGeom>
+          <a:solidFill>
+            <a:srgbClr val="0F1419"/>
+          </a:solidFill>
+          <a:ln/>
+        </p:spPr>
+      </p:sp>
+      <p:sp>
+        <p:nvSpPr>
+          <p:cNvPr id="6" name="Text 3"/>
+          <p:cNvSpPr txBox="1"/>
+          <p:nvPr/>
+        </p:nvSpPr>
+        <p:spPr>
+          <a:xfrm>
+            <a:off x="914400" y="1463040"/>
+            <a:ext cx="411480" cy="548640"/>
+          </a:xfrm>
+          <a:prstGeom prst="roundRect">
+            <a:avLst>
+              <a:gd name="adj" fmla="val 48889"/>
+            </a:avLst>
+          </a:prstGeom>
+          <a:solidFill>
+            <a:srgbClr val="EC4899"/>
+          </a:solidFill>
+          <a:ln/>
+        </p:spPr>
+        <p:txBody>
+          <a:bodyPr wrap="square" lIns="0" tIns="0" rIns="0" bIns="0" rtlCol="0" anchor="ctr"/>
+          <a:lstStyle/>
+          <a:p>
+            <a:pPr algn="ctr" indent="0" marL="0">
+              <a:buNone/>
+            </a:pPr>
+            <a:r>
+              <a:rPr lang="en-US" sz="1500" b="1" dirty="0">
+                <a:solidFill>
+                  <a:srgbClr val="0F1419"/>
+                </a:solidFill>
+                <a:latin typeface="Calibri" pitchFamily="34" charset="0"/>
+                <a:ea typeface="Calibri" pitchFamily="34" charset="-122"/>
+                <a:cs typeface="Calibri" pitchFamily="34" charset="-120"/>
+              </a:rPr>
+              <a:t>1</a:t>
             </a:r>
             <a:endParaRPr lang="en-US" sz="1500" dirty="0"/>
           </a:p>
+        </p:txBody>
+      </p:sp>
+      <p:sp>
+        <p:nvSpPr>
+          <p:cNvPr id="7" name="Text 4"/>
+          <p:cNvSpPr txBox="1"/>
+          <p:nvPr/>
+        </p:nvSpPr>
+        <p:spPr>
+          <a:xfrm>
+            <a:off x="1508760" y="1463040"/>
+            <a:ext cx="6766560" cy="548640"/>
+          </a:xfrm>
+          <a:prstGeom prst="rect">
+            <a:avLst/>
+          </a:prstGeom>
+          <a:noFill/>
+          <a:ln/>
+        </p:spPr>
+        <p:txBody>
+          <a:bodyPr wrap="square" lIns="0" tIns="0" rIns="0" bIns="0" rtlCol="0" anchor="ctr"/>
+          <a:lstStyle/>
           <a:p>
             <a:pPr indent="0" marL="0">
-              <a:spcAft>
-                <a:spcPts val="1000"/>
-              </a:spcAft>
               <a:buNone/>
             </a:pPr>
             <a:r>
-              <a:rPr lang="en-US" sz="1500" dirty="0">
+              <a:rPr lang="en-US" sz="1300" dirty="0">
                 <a:solidFill>
                   <a:srgbClr val="FFFFFF"/>
                 </a:solidFill>
@@ -5073,19 +7112,103 @@
                 <a:ea typeface="Calibri" pitchFamily="34" charset="-122"/>
                 <a:cs typeface="Calibri" pitchFamily="34" charset="-120"/>
               </a:rPr>
-              <a:t>2.  L'histoire de la monnaie en 10 minutes</a:t>
+              <a:t>Votre banque garde le décompte de votre argent.</a:t>
+            </a:r>
+            <a:endParaRPr lang="en-US" sz="1300" dirty="0"/>
+          </a:p>
+        </p:txBody>
+      </p:sp>
+      <p:sp>
+        <p:nvSpPr>
+          <p:cNvPr id="8" name="Shape 5"/>
+          <p:cNvSpPr/>
+          <p:nvPr/>
+        </p:nvSpPr>
+        <p:spPr>
+          <a:xfrm>
+            <a:off x="731520" y="2103120"/>
+            <a:ext cx="7680960" cy="548640"/>
+          </a:xfrm>
+          <a:prstGeom prst="roundRect">
+            <a:avLst>
+              <a:gd name="adj" fmla="val 13333"/>
+            </a:avLst>
+          </a:prstGeom>
+          <a:solidFill>
+            <a:srgbClr val="0F1419"/>
+          </a:solidFill>
+          <a:ln/>
+        </p:spPr>
+      </p:sp>
+      <p:sp>
+        <p:nvSpPr>
+          <p:cNvPr id="9" name="Text 6"/>
+          <p:cNvSpPr txBox="1"/>
+          <p:nvPr/>
+        </p:nvSpPr>
+        <p:spPr>
+          <a:xfrm>
+            <a:off x="914400" y="2103120"/>
+            <a:ext cx="411480" cy="548640"/>
+          </a:xfrm>
+          <a:prstGeom prst="roundRect">
+            <a:avLst>
+              <a:gd name="adj" fmla="val 48889"/>
+            </a:avLst>
+          </a:prstGeom>
+          <a:solidFill>
+            <a:srgbClr val="EC4899"/>
+          </a:solidFill>
+          <a:ln/>
+        </p:spPr>
+        <p:txBody>
+          <a:bodyPr wrap="square" lIns="0" tIns="0" rIns="0" bIns="0" rtlCol="0" anchor="ctr"/>
+          <a:lstStyle/>
+          <a:p>
+            <a:pPr algn="ctr" indent="0" marL="0">
+              <a:buNone/>
+            </a:pPr>
+            <a:r>
+              <a:rPr lang="en-US" sz="1500" b="1" dirty="0">
+                <a:solidFill>
+                  <a:srgbClr val="0F1419"/>
+                </a:solidFill>
+                <a:latin typeface="Calibri" pitchFamily="34" charset="0"/>
+                <a:ea typeface="Calibri" pitchFamily="34" charset="-122"/>
+                <a:cs typeface="Calibri" pitchFamily="34" charset="-120"/>
+              </a:rPr>
+              <a:t>2</a:t>
             </a:r>
             <a:endParaRPr lang="en-US" sz="1500" dirty="0"/>
           </a:p>
+        </p:txBody>
+      </p:sp>
+      <p:sp>
+        <p:nvSpPr>
+          <p:cNvPr id="10" name="Text 7"/>
+          <p:cNvSpPr txBox="1"/>
+          <p:nvPr/>
+        </p:nvSpPr>
+        <p:spPr>
+          <a:xfrm>
+            <a:off x="1508760" y="2103120"/>
+            <a:ext cx="6766560" cy="548640"/>
+          </a:xfrm>
+          <a:prstGeom prst="rect">
+            <a:avLst/>
+          </a:prstGeom>
+          <a:noFill/>
+          <a:ln/>
+        </p:spPr>
+        <p:txBody>
+          <a:bodyPr wrap="square" lIns="0" tIns="0" rIns="0" bIns="0" rtlCol="0" anchor="ctr"/>
+          <a:lstStyle/>
           <a:p>
             <a:pPr indent="0" marL="0">
-              <a:spcAft>
-                <a:spcPts val="1000"/>
-              </a:spcAft>
               <a:buNone/>
             </a:pPr>
             <a:r>
-              <a:rPr lang="en-US" sz="1500" dirty="0">
+              <a:rPr lang="en-US" sz="1300" dirty="0">
                 <a:solidFill>
                   <a:srgbClr val="FFFFFF"/>
                 </a:solidFill>
@@ -5093,19 +7216,103 @@
                 <a:ea typeface="Calibri" pitchFamily="34" charset="-122"/>
                 <a:cs typeface="Calibri" pitchFamily="34" charset="-120"/>
               </a:rPr>
-              <a:t>3.  2008, la naissance de Bitcoin</a:t>
+              <a:t>PayPal enregistre vos paiements.</a:t>
+            </a:r>
+            <a:endParaRPr lang="en-US" sz="1300" dirty="0"/>
+          </a:p>
+        </p:txBody>
+      </p:sp>
+      <p:sp>
+        <p:nvSpPr>
+          <p:cNvPr id="11" name="Shape 8"/>
+          <p:cNvSpPr/>
+          <p:nvPr/>
+        </p:nvSpPr>
+        <p:spPr>
+          <a:xfrm>
+            <a:off x="731520" y="2743200"/>
+            <a:ext cx="7680960" cy="548640"/>
+          </a:xfrm>
+          <a:prstGeom prst="roundRect">
+            <a:avLst>
+              <a:gd name="adj" fmla="val 13333"/>
+            </a:avLst>
+          </a:prstGeom>
+          <a:solidFill>
+            <a:srgbClr val="0F1419"/>
+          </a:solidFill>
+          <a:ln/>
+        </p:spPr>
+      </p:sp>
+      <p:sp>
+        <p:nvSpPr>
+          <p:cNvPr id="12" name="Text 9"/>
+          <p:cNvSpPr txBox="1"/>
+          <p:nvPr/>
+        </p:nvSpPr>
+        <p:spPr>
+          <a:xfrm>
+            <a:off x="914400" y="2743200"/>
+            <a:ext cx="411480" cy="548640"/>
+          </a:xfrm>
+          <a:prstGeom prst="roundRect">
+            <a:avLst>
+              <a:gd name="adj" fmla="val 48889"/>
+            </a:avLst>
+          </a:prstGeom>
+          <a:solidFill>
+            <a:srgbClr val="EC4899"/>
+          </a:solidFill>
+          <a:ln/>
+        </p:spPr>
+        <p:txBody>
+          <a:bodyPr wrap="square" lIns="0" tIns="0" rIns="0" bIns="0" rtlCol="0" anchor="ctr"/>
+          <a:lstStyle/>
+          <a:p>
+            <a:pPr algn="ctr" indent="0" marL="0">
+              <a:buNone/>
+            </a:pPr>
+            <a:r>
+              <a:rPr lang="en-US" sz="1500" b="1" dirty="0">
+                <a:solidFill>
+                  <a:srgbClr val="0F1419"/>
+                </a:solidFill>
+                <a:latin typeface="Calibri" pitchFamily="34" charset="0"/>
+                <a:ea typeface="Calibri" pitchFamily="34" charset="-122"/>
+                <a:cs typeface="Calibri" pitchFamily="34" charset="-120"/>
+              </a:rPr>
+              <a:t>3</a:t>
             </a:r>
             <a:endParaRPr lang="en-US" sz="1500" dirty="0"/>
           </a:p>
+        </p:txBody>
+      </p:sp>
+      <p:sp>
+        <p:nvSpPr>
+          <p:cNvPr id="13" name="Text 10"/>
+          <p:cNvSpPr txBox="1"/>
+          <p:nvPr/>
+        </p:nvSpPr>
+        <p:spPr>
+          <a:xfrm>
+            <a:off x="1508760" y="2743200"/>
+            <a:ext cx="6766560" cy="548640"/>
+          </a:xfrm>
+          <a:prstGeom prst="rect">
+            <a:avLst/>
+          </a:prstGeom>
+          <a:noFill/>
+          <a:ln/>
+        </p:spPr>
+        <p:txBody>
+          <a:bodyPr wrap="square" lIns="0" tIns="0" rIns="0" bIns="0" rtlCol="0" anchor="ctr"/>
+          <a:lstStyle/>
           <a:p>
             <a:pPr indent="0" marL="0">
-              <a:spcAft>
-                <a:spcPts val="1000"/>
-              </a:spcAft>
               <a:buNone/>
             </a:pPr>
             <a:r>
-              <a:rPr lang="en-US" sz="1500" dirty="0">
+              <a:rPr lang="en-US" sz="1300" dirty="0">
                 <a:solidFill>
                   <a:srgbClr val="FFFFFF"/>
                 </a:solidFill>
@@ -5113,9 +7320,471 @@
                 <a:ea typeface="Calibri" pitchFamily="34" charset="-122"/>
                 <a:cs typeface="Calibri" pitchFamily="34" charset="-120"/>
               </a:rPr>
-              <a:t>4.  La révolution Satoshi</a:t>
+              <a:t>Wave sait combien vous avez sur votre compte.</a:t>
+            </a:r>
+            <a:endParaRPr lang="en-US" sz="1300" dirty="0"/>
+          </a:p>
+        </p:txBody>
+      </p:sp>
+      <p:sp>
+        <p:nvSpPr>
+          <p:cNvPr id="14" name="Shape 11"/>
+          <p:cNvSpPr/>
+          <p:nvPr/>
+        </p:nvSpPr>
+        <p:spPr>
+          <a:xfrm>
+            <a:off x="731520" y="3383280"/>
+            <a:ext cx="7680960" cy="548640"/>
+          </a:xfrm>
+          <a:prstGeom prst="roundRect">
+            <a:avLst>
+              <a:gd name="adj" fmla="val 13333"/>
+            </a:avLst>
+          </a:prstGeom>
+          <a:solidFill>
+            <a:srgbClr val="0F1419"/>
+          </a:solidFill>
+          <a:ln/>
+        </p:spPr>
+      </p:sp>
+      <p:sp>
+        <p:nvSpPr>
+          <p:cNvPr id="15" name="Text 12"/>
+          <p:cNvSpPr txBox="1"/>
+          <p:nvPr/>
+        </p:nvSpPr>
+        <p:spPr>
+          <a:xfrm>
+            <a:off x="914400" y="3383280"/>
+            <a:ext cx="411480" cy="548640"/>
+          </a:xfrm>
+          <a:prstGeom prst="roundRect">
+            <a:avLst>
+              <a:gd name="adj" fmla="val 48889"/>
+            </a:avLst>
+          </a:prstGeom>
+          <a:solidFill>
+            <a:srgbClr val="EC4899"/>
+          </a:solidFill>
+          <a:ln/>
+        </p:spPr>
+        <p:txBody>
+          <a:bodyPr wrap="square" lIns="0" tIns="0" rIns="0" bIns="0" rtlCol="0" anchor="ctr"/>
+          <a:lstStyle/>
+          <a:p>
+            <a:pPr algn="ctr" indent="0" marL="0">
+              <a:buNone/>
+            </a:pPr>
+            <a:r>
+              <a:rPr lang="en-US" sz="1500" b="1" dirty="0">
+                <a:solidFill>
+                  <a:srgbClr val="0F1419"/>
+                </a:solidFill>
+                <a:latin typeface="Calibri" pitchFamily="34" charset="0"/>
+                <a:ea typeface="Calibri" pitchFamily="34" charset="-122"/>
+                <a:cs typeface="Calibri" pitchFamily="34" charset="-120"/>
+              </a:rPr>
+              <a:t>4</a:t>
             </a:r>
             <a:endParaRPr lang="en-US" sz="1500" dirty="0"/>
+          </a:p>
+        </p:txBody>
+      </p:sp>
+      <p:sp>
+        <p:nvSpPr>
+          <p:cNvPr id="16" name="Text 13"/>
+          <p:cNvSpPr txBox="1"/>
+          <p:nvPr/>
+        </p:nvSpPr>
+        <p:spPr>
+          <a:xfrm>
+            <a:off x="1508760" y="3383280"/>
+            <a:ext cx="6766560" cy="548640"/>
+          </a:xfrm>
+          <a:prstGeom prst="rect">
+            <a:avLst/>
+          </a:prstGeom>
+          <a:noFill/>
+          <a:ln/>
+        </p:spPr>
+        <p:txBody>
+          <a:bodyPr wrap="square" lIns="0" tIns="0" rIns="0" bIns="0" rtlCol="0" anchor="ctr"/>
+          <a:lstStyle/>
+          <a:p>
+            <a:pPr indent="0" marL="0">
+              <a:buNone/>
+            </a:pPr>
+            <a:r>
+              <a:rPr lang="en-US" sz="1300" dirty="0">
+                <a:solidFill>
+                  <a:srgbClr val="FFFFFF"/>
+                </a:solidFill>
+                <a:latin typeface="Calibri" pitchFamily="34" charset="0"/>
+                <a:ea typeface="Calibri" pitchFamily="34" charset="-122"/>
+                <a:cs typeface="Calibri" pitchFamily="34" charset="-120"/>
+              </a:rPr>
+              <a:t>La preuve de travail (Proof-of-Work) : pour ajouter une transaction, il faut résoudre un puzzle mathématique coûteux en énergie. Cela empêche de tr...</a:t>
+            </a:r>
+            <a:endParaRPr lang="en-US" sz="1300" dirty="0"/>
+          </a:p>
+        </p:txBody>
+      </p:sp>
+      <p:sp>
+        <p:nvSpPr>
+          <p:cNvPr id="17" name="Shape 14"/>
+          <p:cNvSpPr/>
+          <p:nvPr/>
+        </p:nvSpPr>
+        <p:spPr>
+          <a:xfrm>
+            <a:off x="731520" y="4023360"/>
+            <a:ext cx="7680960" cy="548640"/>
+          </a:xfrm>
+          <a:prstGeom prst="roundRect">
+            <a:avLst>
+              <a:gd name="adj" fmla="val 13333"/>
+            </a:avLst>
+          </a:prstGeom>
+          <a:solidFill>
+            <a:srgbClr val="0F1419"/>
+          </a:solidFill>
+          <a:ln/>
+        </p:spPr>
+      </p:sp>
+      <p:sp>
+        <p:nvSpPr>
+          <p:cNvPr id="18" name="Text 15"/>
+          <p:cNvSpPr txBox="1"/>
+          <p:nvPr/>
+        </p:nvSpPr>
+        <p:spPr>
+          <a:xfrm>
+            <a:off x="914400" y="4023360"/>
+            <a:ext cx="411480" cy="548640"/>
+          </a:xfrm>
+          <a:prstGeom prst="roundRect">
+            <a:avLst>
+              <a:gd name="adj" fmla="val 48889"/>
+            </a:avLst>
+          </a:prstGeom>
+          <a:solidFill>
+            <a:srgbClr val="EC4899"/>
+          </a:solidFill>
+          <a:ln/>
+        </p:spPr>
+        <p:txBody>
+          <a:bodyPr wrap="square" lIns="0" tIns="0" rIns="0" bIns="0" rtlCol="0" anchor="ctr"/>
+          <a:lstStyle/>
+          <a:p>
+            <a:pPr algn="ctr" indent="0" marL="0">
+              <a:buNone/>
+            </a:pPr>
+            <a:r>
+              <a:rPr lang="en-US" sz="1500" b="1" dirty="0">
+                <a:solidFill>
+                  <a:srgbClr val="0F1419"/>
+                </a:solidFill>
+                <a:latin typeface="Calibri" pitchFamily="34" charset="0"/>
+                <a:ea typeface="Calibri" pitchFamily="34" charset="-122"/>
+                <a:cs typeface="Calibri" pitchFamily="34" charset="-120"/>
+              </a:rPr>
+              <a:t>5</a:t>
+            </a:r>
+            <a:endParaRPr lang="en-US" sz="1500" dirty="0"/>
+          </a:p>
+        </p:txBody>
+      </p:sp>
+      <p:sp>
+        <p:nvSpPr>
+          <p:cNvPr id="19" name="Text 16"/>
+          <p:cNvSpPr txBox="1"/>
+          <p:nvPr/>
+        </p:nvSpPr>
+        <p:spPr>
+          <a:xfrm>
+            <a:off x="1508760" y="4023360"/>
+            <a:ext cx="6766560" cy="548640"/>
+          </a:xfrm>
+          <a:prstGeom prst="rect">
+            <a:avLst/>
+          </a:prstGeom>
+          <a:noFill/>
+          <a:ln/>
+        </p:spPr>
+        <p:txBody>
+          <a:bodyPr wrap="square" lIns="0" tIns="0" rIns="0" bIns="0" rtlCol="0" anchor="ctr"/>
+          <a:lstStyle/>
+          <a:p>
+            <a:pPr indent="0" marL="0">
+              <a:buNone/>
+            </a:pPr>
+            <a:r>
+              <a:rPr lang="en-US" sz="1300" dirty="0">
+                <a:solidFill>
+                  <a:srgbClr val="FFFFFF"/>
+                </a:solidFill>
+                <a:latin typeface="Calibri" pitchFamily="34" charset="0"/>
+                <a:ea typeface="Calibri" pitchFamily="34" charset="-122"/>
+                <a:cs typeface="Calibri" pitchFamily="34" charset="-120"/>
+              </a:rPr>
+              <a:t>La chaîne de blocs cryptographique : chaque bloc contient l'empreinte du bloc précédent. Modifier un bloc oblige à modifier toute la chaîne — mathé...</a:t>
+            </a:r>
+            <a:endParaRPr lang="en-US" sz="1300" dirty="0"/>
+          </a:p>
+        </p:txBody>
+      </p:sp>
+    </p:spTree>
+  </p:cSld>
+  <p:clrMapOvr>
+    <a:masterClrMapping/>
+  </p:clrMapOvr>
+</p:sld>
+</file>
+
+<file path=ppt/slides/slide21.xml><?xml version="1.0" encoding="utf-8"?>
+<p:sld xmlns:a="http://schemas.openxmlformats.org/drawingml/2006/main" xmlns:r="http://schemas.openxmlformats.org/officeDocument/2006/relationships" xmlns:p="http://schemas.openxmlformats.org/presentationml/2006/main">
+  <p:cSld name="Slide 21">
+    <p:bg>
+      <p:bgPr>
+        <a:solidFill>
+          <a:srgbClr val="0F1419"/>
+        </a:solidFill>
+      </p:bgPr>
+    </p:bg>
+    <p:spTree>
+      <p:nvGrpSpPr>
+        <p:cNvPr id="1" name=""/>
+        <p:cNvGrpSpPr/>
+        <p:nvPr/>
+      </p:nvGrpSpPr>
+      <p:grpSpPr>
+        <a:xfrm>
+          <a:off x="0" y="0"/>
+          <a:ext cx="0" cy="0"/>
+          <a:chOff x="0" y="0"/>
+          <a:chExt cx="0" cy="0"/>
+        </a:xfrm>
+      </p:grpSpPr>
+      <p:sp>
+        <p:nvSpPr>
+          <p:cNvPr id="2" name="Shape 0"/>
+          <p:cNvSpPr/>
+          <p:nvPr/>
+        </p:nvSpPr>
+        <p:spPr>
+          <a:xfrm>
+            <a:off x="2743200" y="457200"/>
+            <a:ext cx="3657600" cy="3657600"/>
+          </a:xfrm>
+          <a:prstGeom prst="ellipse">
+            <a:avLst/>
+          </a:prstGeom>
+          <a:solidFill>
+            <a:srgbClr val="EC4899">
+              <a:alpha val="6000"/>
+            </a:srgbClr>
+          </a:solidFill>
+          <a:ln/>
+        </p:spPr>
+      </p:sp>
+      <p:pic>
+        <p:nvPicPr>
+          <p:cNvPr id="3" name="Image 0" descr="preencoded.png">    </p:cNvPr>
+          <p:cNvPicPr>
+            <a:picLocks noChangeAspect="1"/>
+          </p:cNvPicPr>
+          <p:nvPr/>
+        </p:nvPicPr>
+        <p:blipFill>
+          <a:blip r:embed="rId1"/>
+          <a:stretch>
+            <a:fillRect/>
+          </a:stretch>
+        </p:blipFill>
+        <p:spPr>
+          <a:xfrm>
+            <a:off x="3931920" y="914400"/>
+            <a:ext cx="1280160" cy="1280160"/>
+          </a:xfrm>
+          <a:prstGeom prst="rect">
+            <a:avLst/>
+          </a:prstGeom>
+        </p:spPr>
+      </p:pic>
+      <p:sp>
+        <p:nvSpPr>
+          <p:cNvPr id="4" name="Text 1"/>
+          <p:cNvSpPr txBox="1"/>
+          <p:nvPr/>
+        </p:nvSpPr>
+        <p:spPr>
+          <a:xfrm>
+            <a:off x="731520" y="2377440"/>
+            <a:ext cx="7680960" cy="548640"/>
+          </a:xfrm>
+          <a:prstGeom prst="rect">
+            <a:avLst/>
+          </a:prstGeom>
+          <a:noFill/>
+          <a:ln/>
+        </p:spPr>
+        <p:txBody>
+          <a:bodyPr wrap="square" lIns="0" tIns="0" rIns="0" bIns="0" rtlCol="0" anchor="ctr"/>
+          <a:lstStyle/>
+          <a:p>
+            <a:pPr algn="ctr" indent="0" marL="0">
+              <a:buNone/>
+            </a:pPr>
+            <a:r>
+              <a:rPr lang="en-US" sz="2800" b="1" dirty="0">
+                <a:solidFill>
+                  <a:srgbClr val="FFFFFF"/>
+                </a:solidFill>
+                <a:latin typeface="Calibri" pitchFamily="34" charset="0"/>
+                <a:ea typeface="Calibri" pitchFamily="34" charset="-122"/>
+                <a:cs typeface="Calibri" pitchFamily="34" charset="-120"/>
+              </a:rPr>
+              <a:t>Module 3 termine</a:t>
+            </a:r>
+            <a:endParaRPr lang="en-US" sz="2800" dirty="0"/>
+          </a:p>
+        </p:txBody>
+      </p:sp>
+      <p:sp>
+        <p:nvSpPr>
+          <p:cNvPr id="5" name="Text 2"/>
+          <p:cNvSpPr txBox="1"/>
+          <p:nvPr/>
+        </p:nvSpPr>
+        <p:spPr>
+          <a:xfrm>
+            <a:off x="1371600" y="3017520"/>
+            <a:ext cx="6400800" cy="365760"/>
+          </a:xfrm>
+          <a:prstGeom prst="rect">
+            <a:avLst/>
+          </a:prstGeom>
+          <a:noFill/>
+          <a:ln/>
+        </p:spPr>
+        <p:txBody>
+          <a:bodyPr wrap="square" lIns="0" tIns="0" rIns="0" bIns="0" rtlCol="0" anchor="ctr"/>
+          <a:lstStyle/>
+          <a:p>
+            <a:pPr algn="ctr" indent="0" marL="0">
+              <a:buNone/>
+            </a:pPr>
+            <a:r>
+              <a:rPr lang="en-US" sz="1300" dirty="0">
+                <a:solidFill>
+                  <a:srgbClr val="94A3B8"/>
+                </a:solidFill>
+                <a:latin typeface="Calibri" pitchFamily="34" charset="0"/>
+                <a:ea typeface="Calibri" pitchFamily="34" charset="-122"/>
+                <a:cs typeface="Calibri" pitchFamily="34" charset="-120"/>
+              </a:rPr>
+              <a:t>Passez au module suivant pour continuer votre apprentissage.</a:t>
+            </a:r>
+            <a:endParaRPr lang="en-US" sz="1300" dirty="0"/>
+          </a:p>
+        </p:txBody>
+      </p:sp>
+      <p:sp>
+        <p:nvSpPr>
+          <p:cNvPr id="6" name="Shape 3"/>
+          <p:cNvSpPr/>
+          <p:nvPr/>
+        </p:nvSpPr>
+        <p:spPr>
+          <a:xfrm>
+            <a:off x="3200400" y="3657600"/>
+            <a:ext cx="2743200" cy="36576"/>
+          </a:xfrm>
+          <a:prstGeom prst="rect">
+            <a:avLst/>
+          </a:prstGeom>
+          <a:solidFill>
+            <a:srgbClr val="EC4899"/>
+          </a:solidFill>
+          <a:ln/>
+        </p:spPr>
+      </p:sp>
+      <p:sp>
+        <p:nvSpPr>
+          <p:cNvPr id="7" name="Text 4"/>
+          <p:cNvSpPr txBox="1"/>
+          <p:nvPr/>
+        </p:nvSpPr>
+        <p:spPr>
+          <a:xfrm>
+            <a:off x="2286000" y="3931920"/>
+            <a:ext cx="4572000" cy="320040"/>
+          </a:xfrm>
+          <a:prstGeom prst="rect">
+            <a:avLst/>
+          </a:prstGeom>
+          <a:noFill/>
+          <a:ln/>
+        </p:spPr>
+        <p:txBody>
+          <a:bodyPr wrap="square" lIns="0" tIns="0" rIns="0" bIns="0" rtlCol="0" anchor="ctr"/>
+          <a:lstStyle/>
+          <a:p>
+            <a:pPr algn="ctr" indent="0" marL="0">
+              <a:buNone/>
+            </a:pPr>
+            <a:r>
+              <a:rPr lang="en-US" sz="1100" spc="300" kern="0" dirty="0">
+                <a:solidFill>
+                  <a:srgbClr val="64748B"/>
+                </a:solidFill>
+                <a:latin typeface="Calibri" pitchFamily="34" charset="0"/>
+                <a:ea typeface="Calibri" pitchFamily="34" charset="-122"/>
+                <a:cs typeface="Calibri" pitchFamily="34" charset="-120"/>
+              </a:rPr>
+              <a:t>TEREX ACADEMY</a:t>
+            </a:r>
+            <a:endParaRPr lang="en-US" sz="1100" dirty="0"/>
+          </a:p>
+        </p:txBody>
+      </p:sp>
+      <p:sp>
+        <p:nvSpPr>
+          <p:cNvPr id="8" name="Text 5"/>
+          <p:cNvSpPr txBox="1"/>
+          <p:nvPr/>
+        </p:nvSpPr>
+        <p:spPr>
+          <a:xfrm>
+            <a:off x="2286000" y="4251960"/>
+            <a:ext cx="4572000" cy="274320"/>
+          </a:xfrm>
+          <a:prstGeom prst="rect">
+            <a:avLst/>
+          </a:prstGeom>
+          <a:noFill/>
+          <a:ln/>
+        </p:spPr>
+        <p:txBody>
+          <a:bodyPr wrap="square" lIns="0" tIns="0" rIns="0" bIns="0" rtlCol="0" anchor="ctr"/>
+          <a:lstStyle/>
+          <a:p>
+            <a:pPr algn="ctr" indent="0" marL="0">
+              <a:buNone/>
+            </a:pPr>
+            <a:r>
+              <a:rPr lang="en-US" sz="1100" dirty="0">
+                <a:solidFill>
+                  <a:srgbClr val="009E8B"/>
+                </a:solidFill>
+                <a:latin typeface="Calibri" pitchFamily="34" charset="0"/>
+                <a:ea typeface="Calibri" pitchFamily="34" charset="-122"/>
+                <a:cs typeface="Calibri" pitchFamily="34" charset="-120"/>
+              </a:rPr>
+              <a:t>terangaexchange.com</a:t>
+            </a:r>
+            <a:endParaRPr lang="en-US" sz="1100" dirty="0"/>
           </a:p>
         </p:txBody>
       </p:sp>
@@ -5151,35 +7820,105 @@
           <a:chExt cx="0" cy="0"/>
         </a:xfrm>
       </p:grpSpPr>
-      <p:sp>
-        <p:nvSpPr>
-          <p:cNvPr id="2" name="Shape 0"/>
+      <p:pic>
+        <p:nvPicPr>
+          <p:cNvPr id="2" name="Image 0" descr="preencoded.png">    </p:cNvPr>
+          <p:cNvPicPr>
+            <a:picLocks noChangeAspect="1"/>
+          </p:cNvPicPr>
+          <p:nvPr/>
+        </p:nvPicPr>
+        <p:blipFill>
+          <a:blip r:embed="rId1"/>
+          <a:stretch>
+            <a:fillRect/>
+          </a:stretch>
+        </p:blipFill>
+        <p:spPr>
+          <a:xfrm>
+            <a:off x="7315200" y="548640"/>
+            <a:ext cx="1280160" cy="1280160"/>
+          </a:xfrm>
+          <a:prstGeom prst="rect">
+            <a:avLst/>
+          </a:prstGeom>
+        </p:spPr>
+      </p:pic>
+      <p:pic>
+        <p:nvPicPr>
+          <p:cNvPr id="3" name="Image 1" descr="preencoded.png">    </p:cNvPr>
+          <p:cNvPicPr>
+            <a:picLocks noChangeAspect="1"/>
+          </p:cNvPicPr>
+          <p:nvPr/>
+        </p:nvPicPr>
+        <p:blipFill>
+          <a:blip r:embed="rId2"/>
+          <a:stretch>
+            <a:fillRect/>
+          </a:stretch>
+        </p:blipFill>
+        <p:spPr>
+          <a:xfrm>
+            <a:off x="7772400" y="2011680"/>
+            <a:ext cx="822960" cy="822960"/>
+          </a:xfrm>
+          <a:prstGeom prst="rect">
+            <a:avLst/>
+          </a:prstGeom>
+        </p:spPr>
+      </p:pic>
+      <p:sp>
+        <p:nvSpPr>
+          <p:cNvPr id="4" name="Shape 0"/>
           <p:cNvSpPr/>
           <p:nvPr/>
         </p:nvSpPr>
         <p:spPr>
           <a:xfrm>
-            <a:off x="548640" y="914400"/>
-            <a:ext cx="45720" cy="2560320"/>
-          </a:xfrm>
-          <a:prstGeom prst="rect">
+            <a:off x="6583680" y="-274320"/>
+            <a:ext cx="3200400" cy="3200400"/>
+          </a:xfrm>
+          <a:prstGeom prst="ellipse">
             <a:avLst/>
           </a:prstGeom>
           <a:solidFill>
-            <a:srgbClr val="00BFA6"/>
+            <a:srgbClr val="EC4899">
+              <a:alpha val="6000"/>
+            </a:srgbClr>
           </a:solidFill>
           <a:ln/>
         </p:spPr>
       </p:sp>
       <p:sp>
         <p:nvSpPr>
-          <p:cNvPr id="3" name="Text 1"/>
+          <p:cNvPr id="5" name="Shape 1"/>
+          <p:cNvSpPr/>
+          <p:nvPr/>
+        </p:nvSpPr>
+        <p:spPr>
+          <a:xfrm>
+            <a:off x="731520" y="914400"/>
+            <a:ext cx="45720" cy="2194560"/>
+          </a:xfrm>
+          <a:prstGeom prst="rect">
+            <a:avLst/>
+          </a:prstGeom>
+          <a:solidFill>
+            <a:srgbClr val="EC4899"/>
+          </a:solidFill>
+          <a:ln/>
+        </p:spPr>
+      </p:sp>
+      <p:sp>
+        <p:nvSpPr>
+          <p:cNvPr id="6" name="Text 2"/>
           <p:cNvSpPr txBox="1"/>
           <p:nvPr/>
         </p:nvSpPr>
         <p:spPr>
           <a:xfrm>
-            <a:off x="822960" y="1097280"/>
+            <a:off x="960120" y="914400"/>
             <a:ext cx="2743200" cy="365760"/>
           </a:xfrm>
           <a:prstGeom prst="rect">
@@ -5198,13 +7937,13 @@
             <a:r>
               <a:rPr lang="en-US" sz="1200" b="1" spc="200" kern="0" dirty="0">
                 <a:solidFill>
-                  <a:srgbClr val="00BFA6"/>
-                </a:solidFill>
-                <a:latin typeface="Calibri" pitchFamily="34" charset="0"/>
-                <a:ea typeface="Calibri" pitchFamily="34" charset="-122"/>
-                <a:cs typeface="Calibri" pitchFamily="34" charset="-120"/>
-              </a:rPr>
-              <a:t>Lecon 1 / 4</a:t>
+                  <a:srgbClr val="EC4899"/>
+                </a:solidFill>
+                <a:latin typeface="Calibri" pitchFamily="34" charset="0"/>
+                <a:ea typeface="Calibri" pitchFamily="34" charset="-122"/>
+                <a:cs typeface="Calibri" pitchFamily="34" charset="-120"/>
+              </a:rPr>
+              <a:t>Leçon 1 / 4</a:t>
             </a:r>
             <a:endParaRPr lang="en-US" sz="1200" dirty="0"/>
           </a:p>
@@ -5212,14 +7951,14 @@
       </p:sp>
       <p:sp>
         <p:nvSpPr>
-          <p:cNvPr id="4" name="Text 2"/>
+          <p:cNvPr id="7" name="Text 3"/>
           <p:cNvSpPr txBox="1"/>
           <p:nvPr/>
         </p:nvSpPr>
         <p:spPr>
           <a:xfrm>
-            <a:off x="822960" y="1645920"/>
-            <a:ext cx="7498080" cy="1280160"/>
+            <a:off x="960120" y="1371600"/>
+            <a:ext cx="6217920" cy="1463040"/>
           </a:xfrm>
           <a:prstGeom prst="rect">
             <a:avLst/>
@@ -5235,7 +7974,7 @@
               <a:buNone/>
             </a:pPr>
             <a:r>
-              <a:rPr lang="en-US" sz="3000" b="1" dirty="0">
+              <a:rPr lang="en-US" sz="2800" b="1" dirty="0">
                 <a:solidFill>
                   <a:srgbClr val="FFFFFF"/>
                 </a:solidFill>
@@ -5245,19 +7984,19 @@
               </a:rPr>
               <a:t>Acheter votre premier USDT avec Terex</a:t>
             </a:r>
-            <a:endParaRPr lang="en-US" sz="3000" dirty="0"/>
-          </a:p>
-        </p:txBody>
-      </p:sp>
-      <p:sp>
-        <p:nvSpPr>
-          <p:cNvPr id="5" name="Text 3"/>
+            <a:endParaRPr lang="en-US" sz="2800" dirty="0"/>
+          </a:p>
+        </p:txBody>
+      </p:sp>
+      <p:sp>
+        <p:nvSpPr>
+          <p:cNvPr id="8" name="Text 4"/>
           <p:cNvSpPr txBox="1"/>
           <p:nvPr/>
         </p:nvSpPr>
         <p:spPr>
           <a:xfrm>
-            <a:off x="822960" y="4206240"/>
+            <a:off x="960120" y="4114800"/>
             <a:ext cx="5486400" cy="320040"/>
           </a:xfrm>
           <a:prstGeom prst="rect">
@@ -5322,7 +8061,53 @@
       </p:grpSpPr>
       <p:sp>
         <p:nvSpPr>
-          <p:cNvPr id="2" name="Text 0"/>
+          <p:cNvPr id="2" name="Shape 0"/>
+          <p:cNvSpPr/>
+          <p:nvPr/>
+        </p:nvSpPr>
+        <p:spPr>
+          <a:xfrm>
+            <a:off x="7955280" y="182880"/>
+            <a:ext cx="640080" cy="640080"/>
+          </a:xfrm>
+          <a:prstGeom prst="ellipse">
+            <a:avLst/>
+          </a:prstGeom>
+          <a:solidFill>
+            <a:srgbClr val="EC4899">
+              <a:alpha val="12000"/>
+            </a:srgbClr>
+          </a:solidFill>
+          <a:ln/>
+        </p:spPr>
+      </p:sp>
+      <p:pic>
+        <p:nvPicPr>
+          <p:cNvPr id="3" name="Image 0" descr="preencoded.png">    </p:cNvPr>
+          <p:cNvPicPr>
+            <a:picLocks noChangeAspect="1"/>
+          </p:cNvPicPr>
+          <p:nvPr/>
+        </p:nvPicPr>
+        <p:blipFill>
+          <a:blip r:embed="rId1"/>
+          <a:stretch>
+            <a:fillRect/>
+          </a:stretch>
+        </p:blipFill>
+        <p:spPr>
+          <a:xfrm>
+            <a:off x="8028432" y="256032"/>
+            <a:ext cx="493776" cy="493776"/>
+          </a:xfrm>
+          <a:prstGeom prst="rect">
+            <a:avLst/>
+          </a:prstGeom>
+        </p:spPr>
+      </p:pic>
+      <p:sp>
+        <p:nvSpPr>
+          <p:cNvPr id="4" name="Text 1"/>
           <p:cNvSpPr txBox="1"/>
           <p:nvPr/>
         </p:nvSpPr>
@@ -5357,15 +8142,36 @@
                 <a:ea typeface="Calibri" pitchFamily="34" charset="-122"/>
                 <a:cs typeface="Calibri" pitchFamily="34" charset="-120"/>
               </a:rPr>
-              <a:t>USDT (Tether) est un stablecoin : sa valeur est stable à 1 dollar américain. C'est la cryptomonnaie idéale pour débuter car elle ne fluctue pas comme le Bitcoin.</a:t>
+              <a:t>USDT (Tether) est un stablecoin : sa valeur est stable à 1 dollar américain.</a:t>
             </a:r>
             <a:endParaRPr lang="en-US" sz="1400" dirty="0"/>
           </a:p>
-        </p:txBody>
-      </p:sp>
-      <p:sp>
-        <p:nvSpPr>
-          <p:cNvPr id="3" name="Text 1"/>
+          <a:p>
+            <a:pPr marL="342900" indent="-342900">
+              <a:spcAft>
+                <a:spcPts val="800"/>
+              </a:spcAft>
+              <a:buSzPct val="100000"/>
+              <a:buChar char="•"/>
+            </a:pPr>
+            <a:r>
+              <a:rPr lang="en-US" sz="1400" dirty="0">
+                <a:solidFill>
+                  <a:srgbClr val="FFFFFF"/>
+                </a:solidFill>
+                <a:latin typeface="Calibri" pitchFamily="34" charset="0"/>
+                <a:ea typeface="Calibri" pitchFamily="34" charset="-122"/>
+                <a:cs typeface="Calibri" pitchFamily="34" charset="-120"/>
+              </a:rPr>
+              <a:t>C'est la cryptomonnaie idéale pour débuter car elle ne fluctue pas comme le Bitcoin.</a:t>
+            </a:r>
+            <a:endParaRPr lang="en-US" sz="1400" dirty="0"/>
+          </a:p>
+        </p:txBody>
+      </p:sp>
+      <p:sp>
+        <p:nvSpPr>
+          <p:cNvPr id="5" name="Text 2"/>
           <p:cNvSpPr txBox="1"/>
           <p:nvPr/>
         </p:nvSpPr>
@@ -5396,7 +8202,7 @@
                 <a:ea typeface="Calibri" pitchFamily="34" charset="-122"/>
                 <a:cs typeface="Calibri" pitchFamily="34" charset="-120"/>
               </a:rPr>
-              <a:t>Module 3 — Lecon 1</a:t>
+              <a:t>Module 3 — Leçon 1</a:t>
             </a:r>
             <a:endParaRPr lang="en-US" sz="900" dirty="0"/>
           </a:p>
@@ -5442,8 +8248,8 @@
         </p:nvSpPr>
         <p:spPr>
           <a:xfrm>
-            <a:off x="731520" y="365760"/>
-            <a:ext cx="7680960" cy="548640"/>
+            <a:off x="731520" y="274320"/>
+            <a:ext cx="7680960" cy="502920"/>
           </a:xfrm>
           <a:prstGeom prst="rect">
             <a:avLst/>
@@ -5459,9 +8265,9 @@
               <a:buNone/>
             </a:pPr>
             <a:r>
-              <a:rPr lang="en-US" sz="2200" b="1" dirty="0">
-                <a:solidFill>
-                  <a:srgbClr val="00BFA6"/>
+              <a:rPr lang="en-US" sz="2000" b="1" dirty="0">
+                <a:solidFill>
+                  <a:srgbClr val="EC4899"/>
                 </a:solidFill>
                 <a:latin typeface="Calibri" pitchFamily="34" charset="0"/>
                 <a:ea typeface="Calibri" pitchFamily="34" charset="-122"/>
@@ -5469,7 +8275,7 @@
               </a:rPr>
               <a:t>ÉTAPES POUR ACHETER DU USDT SUR TEREX :</a:t>
             </a:r>
-            <a:endParaRPr lang="en-US" sz="2200" dirty="0"/>
+            <a:endParaRPr lang="en-US" sz="2000" dirty="0"/>
           </a:p>
         </p:txBody>
       </p:sp>
@@ -5481,8 +8287,8 @@
         </p:nvSpPr>
         <p:spPr>
           <a:xfrm>
-            <a:off x="731520" y="1051560"/>
-            <a:ext cx="7680960" cy="3657600"/>
+            <a:off x="731520" y="1005840"/>
+            <a:ext cx="4206240" cy="3474720"/>
           </a:xfrm>
           <a:prstGeom prst="rect">
             <a:avLst/>
@@ -5496,13 +8302,13 @@
           <a:p>
             <a:pPr marL="342900" indent="-342900">
               <a:spcAft>
-                <a:spcPts val="800"/>
+                <a:spcPts val="600"/>
               </a:spcAft>
               <a:buSzPct val="100000"/>
               <a:buChar char="•"/>
             </a:pPr>
             <a:r>
-              <a:rPr lang="en-US" sz="1400" dirty="0">
+              <a:rPr lang="en-US" sz="1300" dirty="0">
                 <a:solidFill>
                   <a:srgbClr val="FFFFFF"/>
                 </a:solidFill>
@@ -5512,18 +8318,18 @@
               </a:rPr>
               <a:t>Créez votre compte sur terangaexchange.com</a:t>
             </a:r>
-            <a:endParaRPr lang="en-US" sz="1400" dirty="0"/>
+            <a:endParaRPr lang="en-US" sz="1300" dirty="0"/>
           </a:p>
           <a:p>
             <a:pPr marL="342900" indent="-342900">
               <a:spcAft>
-                <a:spcPts val="800"/>
+                <a:spcPts val="600"/>
               </a:spcAft>
               <a:buSzPct val="100000"/>
               <a:buChar char="•"/>
             </a:pPr>
             <a:r>
-              <a:rPr lang="en-US" sz="1400" dirty="0">
+              <a:rPr lang="en-US" sz="1300" dirty="0">
                 <a:solidFill>
                   <a:srgbClr val="FFFFFF"/>
                 </a:solidFill>
@@ -5533,18 +8339,18 @@
               </a:rPr>
               <a:t>Complétez votre vérification KYC (identité)</a:t>
             </a:r>
-            <a:endParaRPr lang="en-US" sz="1400" dirty="0"/>
+            <a:endParaRPr lang="en-US" sz="1300" dirty="0"/>
           </a:p>
           <a:p>
             <a:pPr marL="342900" indent="-342900">
               <a:spcAft>
-                <a:spcPts val="800"/>
+                <a:spcPts val="600"/>
               </a:spcAft>
               <a:buSzPct val="100000"/>
               <a:buChar char="•"/>
             </a:pPr>
             <a:r>
-              <a:rPr lang="en-US" sz="1400" dirty="0">
+              <a:rPr lang="en-US" sz="1300" dirty="0">
                 <a:solidFill>
                   <a:srgbClr val="FFFFFF"/>
                 </a:solidFill>
@@ -5554,18 +8360,18 @@
               </a:rPr>
               <a:t>Cliquez sur "Acheter" dans votre tableau de bord</a:t>
             </a:r>
-            <a:endParaRPr lang="en-US" sz="1400" dirty="0"/>
+            <a:endParaRPr lang="en-US" sz="1300" dirty="0"/>
           </a:p>
           <a:p>
             <a:pPr marL="342900" indent="-342900">
               <a:spcAft>
-                <a:spcPts val="800"/>
+                <a:spcPts val="600"/>
               </a:spcAft>
               <a:buSzPct val="100000"/>
               <a:buChar char="•"/>
             </a:pPr>
             <a:r>
-              <a:rPr lang="en-US" sz="1400" dirty="0">
+              <a:rPr lang="en-US" sz="1300" dirty="0">
                 <a:solidFill>
                   <a:srgbClr val="FFFFFF"/>
                 </a:solidFill>
@@ -5575,18 +8381,82 @@
               </a:rPr>
               <a:t>Entrez le montant en CFA que vous souhaitez investir</a:t>
             </a:r>
-            <a:endParaRPr lang="en-US" sz="1400" dirty="0"/>
-          </a:p>
-          <a:p>
-            <a:pPr marL="342900" indent="-342900">
-              <a:spcAft>
-                <a:spcPts val="800"/>
-              </a:spcAft>
-              <a:buSzPct val="100000"/>
-              <a:buChar char="•"/>
-            </a:pPr>
-            <a:r>
-              <a:rPr lang="en-US" sz="1400" dirty="0">
+            <a:endParaRPr lang="en-US" sz="1300" dirty="0"/>
+          </a:p>
+        </p:txBody>
+      </p:sp>
+      <p:sp>
+        <p:nvSpPr>
+          <p:cNvPr id="4" name="Shape 2"/>
+          <p:cNvSpPr/>
+          <p:nvPr/>
+        </p:nvSpPr>
+        <p:spPr>
+          <a:xfrm>
+            <a:off x="5120640" y="1005840"/>
+            <a:ext cx="3474720" cy="640080"/>
+          </a:xfrm>
+          <a:prstGeom prst="roundRect">
+            <a:avLst>
+              <a:gd name="adj" fmla="val 14286"/>
+            </a:avLst>
+          </a:prstGeom>
+          <a:solidFill>
+            <a:srgbClr val="1A2332"/>
+          </a:solidFill>
+          <a:ln/>
+        </p:spPr>
+      </p:sp>
+      <p:pic>
+        <p:nvPicPr>
+          <p:cNvPr id="5" name="Image 0" descr="preencoded.png">    </p:cNvPr>
+          <p:cNvPicPr>
+            <a:picLocks noChangeAspect="1"/>
+          </p:cNvPicPr>
+          <p:nvPr/>
+        </p:nvPicPr>
+        <p:blipFill>
+          <a:blip r:embed="rId1"/>
+          <a:stretch>
+            <a:fillRect/>
+          </a:stretch>
+        </p:blipFill>
+        <p:spPr>
+          <a:xfrm>
+            <a:off x="5257800" y="1106424"/>
+            <a:ext cx="438912" cy="438912"/>
+          </a:xfrm>
+          <a:prstGeom prst="rect">
+            <a:avLst/>
+          </a:prstGeom>
+        </p:spPr>
+      </p:pic>
+      <p:sp>
+        <p:nvSpPr>
+          <p:cNvPr id="6" name="Text 3"/>
+          <p:cNvSpPr txBox="1"/>
+          <p:nvPr/>
+        </p:nvSpPr>
+        <p:spPr>
+          <a:xfrm>
+            <a:off x="5806440" y="1005840"/>
+            <a:ext cx="2651760" cy="640080"/>
+          </a:xfrm>
+          <a:prstGeom prst="rect">
+            <a:avLst/>
+          </a:prstGeom>
+          <a:noFill/>
+          <a:ln/>
+        </p:spPr>
+        <p:txBody>
+          <a:bodyPr wrap="square" lIns="0" tIns="0" rIns="0" bIns="0" rtlCol="0" anchor="ctr"/>
+          <a:lstStyle/>
+          <a:p>
+            <a:pPr indent="0" marL="0">
+              <a:buNone/>
+            </a:pPr>
+            <a:r>
+              <a:rPr lang="en-US" sz="1200" dirty="0">
                 <a:solidFill>
                   <a:srgbClr val="FFFFFF"/>
                 </a:solidFill>
@@ -5596,18 +8466,82 @@
               </a:rPr>
               <a:t>Renseignez votre adresse de portefeuille USDT (réseau TRC20 recommandé)</a:t>
             </a:r>
-            <a:endParaRPr lang="en-US" sz="1400" dirty="0"/>
-          </a:p>
-          <a:p>
-            <a:pPr marL="342900" indent="-342900">
-              <a:spcAft>
-                <a:spcPts val="800"/>
-              </a:spcAft>
-              <a:buSzPct val="100000"/>
-              <a:buChar char="•"/>
-            </a:pPr>
-            <a:r>
-              <a:rPr lang="en-US" sz="1400" dirty="0">
+            <a:endParaRPr lang="en-US" sz="1200" dirty="0"/>
+          </a:p>
+        </p:txBody>
+      </p:sp>
+      <p:sp>
+        <p:nvSpPr>
+          <p:cNvPr id="7" name="Shape 4"/>
+          <p:cNvSpPr/>
+          <p:nvPr/>
+        </p:nvSpPr>
+        <p:spPr>
+          <a:xfrm>
+            <a:off x="5120640" y="1737360"/>
+            <a:ext cx="3474720" cy="640080"/>
+          </a:xfrm>
+          <a:prstGeom prst="roundRect">
+            <a:avLst>
+              <a:gd name="adj" fmla="val 14286"/>
+            </a:avLst>
+          </a:prstGeom>
+          <a:solidFill>
+            <a:srgbClr val="1A2332"/>
+          </a:solidFill>
+          <a:ln/>
+        </p:spPr>
+      </p:sp>
+      <p:pic>
+        <p:nvPicPr>
+          <p:cNvPr id="8" name="Image 1" descr="preencoded.png">    </p:cNvPr>
+          <p:cNvPicPr>
+            <a:picLocks noChangeAspect="1"/>
+          </p:cNvPicPr>
+          <p:nvPr/>
+        </p:nvPicPr>
+        <p:blipFill>
+          <a:blip r:embed="rId2"/>
+          <a:stretch>
+            <a:fillRect/>
+          </a:stretch>
+        </p:blipFill>
+        <p:spPr>
+          <a:xfrm>
+            <a:off x="5257800" y="1837944"/>
+            <a:ext cx="438912" cy="438912"/>
+          </a:xfrm>
+          <a:prstGeom prst="rect">
+            <a:avLst/>
+          </a:prstGeom>
+        </p:spPr>
+      </p:pic>
+      <p:sp>
+        <p:nvSpPr>
+          <p:cNvPr id="9" name="Text 5"/>
+          <p:cNvSpPr txBox="1"/>
+          <p:nvPr/>
+        </p:nvSpPr>
+        <p:spPr>
+          <a:xfrm>
+            <a:off x="5806440" y="1737360"/>
+            <a:ext cx="2651760" cy="640080"/>
+          </a:xfrm>
+          <a:prstGeom prst="rect">
+            <a:avLst/>
+          </a:prstGeom>
+          <a:noFill/>
+          <a:ln/>
+        </p:spPr>
+        <p:txBody>
+          <a:bodyPr wrap="square" lIns="0" tIns="0" rIns="0" bIns="0" rtlCol="0" anchor="ctr"/>
+          <a:lstStyle/>
+          <a:p>
+            <a:pPr indent="0" marL="0">
+              <a:buNone/>
+            </a:pPr>
+            <a:r>
+              <a:rPr lang="en-US" sz="1200" dirty="0">
                 <a:solidFill>
                   <a:srgbClr val="FFFFFF"/>
                 </a:solidFill>
@@ -5617,18 +8551,82 @@
               </a:rPr>
               <a:t>Effectuez le paiement via NabooPay ou Wave</a:t>
             </a:r>
-            <a:endParaRPr lang="en-US" sz="1400" dirty="0"/>
-          </a:p>
-          <a:p>
-            <a:pPr marL="342900" indent="-342900">
-              <a:spcAft>
-                <a:spcPts val="800"/>
-              </a:spcAft>
-              <a:buSzPct val="100000"/>
-              <a:buChar char="•"/>
-            </a:pPr>
-            <a:r>
-              <a:rPr lang="en-US" sz="1400" dirty="0">
+            <a:endParaRPr lang="en-US" sz="1200" dirty="0"/>
+          </a:p>
+        </p:txBody>
+      </p:sp>
+      <p:sp>
+        <p:nvSpPr>
+          <p:cNvPr id="10" name="Shape 6"/>
+          <p:cNvSpPr/>
+          <p:nvPr/>
+        </p:nvSpPr>
+        <p:spPr>
+          <a:xfrm>
+            <a:off x="5120640" y="2468880"/>
+            <a:ext cx="3474720" cy="640080"/>
+          </a:xfrm>
+          <a:prstGeom prst="roundRect">
+            <a:avLst>
+              <a:gd name="adj" fmla="val 14286"/>
+            </a:avLst>
+          </a:prstGeom>
+          <a:solidFill>
+            <a:srgbClr val="1A2332"/>
+          </a:solidFill>
+          <a:ln/>
+        </p:spPr>
+      </p:sp>
+      <p:pic>
+        <p:nvPicPr>
+          <p:cNvPr id="11" name="Image 2" descr="preencoded.png">    </p:cNvPr>
+          <p:cNvPicPr>
+            <a:picLocks noChangeAspect="1"/>
+          </p:cNvPicPr>
+          <p:nvPr/>
+        </p:nvPicPr>
+        <p:blipFill>
+          <a:blip r:embed="rId3"/>
+          <a:stretch>
+            <a:fillRect/>
+          </a:stretch>
+        </p:blipFill>
+        <p:spPr>
+          <a:xfrm>
+            <a:off x="5257800" y="2569464"/>
+            <a:ext cx="438912" cy="438912"/>
+          </a:xfrm>
+          <a:prstGeom prst="rect">
+            <a:avLst/>
+          </a:prstGeom>
+        </p:spPr>
+      </p:pic>
+      <p:sp>
+        <p:nvSpPr>
+          <p:cNvPr id="12" name="Text 7"/>
+          <p:cNvSpPr txBox="1"/>
+          <p:nvPr/>
+        </p:nvSpPr>
+        <p:spPr>
+          <a:xfrm>
+            <a:off x="5806440" y="2468880"/>
+            <a:ext cx="2651760" cy="640080"/>
+          </a:xfrm>
+          <a:prstGeom prst="rect">
+            <a:avLst/>
+          </a:prstGeom>
+          <a:noFill/>
+          <a:ln/>
+        </p:spPr>
+        <p:txBody>
+          <a:bodyPr wrap="square" lIns="0" tIns="0" rIns="0" bIns="0" rtlCol="0" anchor="ctr"/>
+          <a:lstStyle/>
+          <a:p>
+            <a:pPr indent="0" marL="0">
+              <a:buNone/>
+            </a:pPr>
+            <a:r>
+              <a:rPr lang="en-US" sz="1200" dirty="0">
                 <a:solidFill>
                   <a:srgbClr val="FFFFFF"/>
                 </a:solidFill>
@@ -5638,46 +8636,7 @@
               </a:rPr>
               <a:t>Recevez vos USDT en quelques minutes !</a:t>
             </a:r>
-            <a:endParaRPr lang="en-US" sz="1400" dirty="0"/>
-          </a:p>
-        </p:txBody>
-      </p:sp>
-      <p:sp>
-        <p:nvSpPr>
-          <p:cNvPr id="4" name="Text 2"/>
-          <p:cNvSpPr txBox="1"/>
-          <p:nvPr/>
-        </p:nvSpPr>
-        <p:spPr>
-          <a:xfrm>
-            <a:off x="731520" y="4709160"/>
-            <a:ext cx="7680960" cy="274320"/>
-          </a:xfrm>
-          <a:prstGeom prst="rect">
-            <a:avLst/>
-          </a:prstGeom>
-          <a:noFill/>
-          <a:ln/>
-        </p:spPr>
-        <p:txBody>
-          <a:bodyPr wrap="square" lIns="0" tIns="0" rIns="0" bIns="0" rtlCol="0" anchor="ctr"/>
-          <a:lstStyle/>
-          <a:p>
-            <a:pPr algn="r" indent="0" marL="0">
-              <a:buNone/>
-            </a:pPr>
-            <a:r>
-              <a:rPr lang="en-US" sz="900" dirty="0">
-                <a:solidFill>
-                  <a:srgbClr val="64748B"/>
-                </a:solidFill>
-                <a:latin typeface="Calibri" pitchFamily="34" charset="0"/>
-                <a:ea typeface="Calibri" pitchFamily="34" charset="-122"/>
-                <a:cs typeface="Calibri" pitchFamily="34" charset="-120"/>
-              </a:rPr>
-              <a:t>Module 3 — Lecon 1</a:t>
-            </a:r>
-            <a:endParaRPr lang="en-US" sz="900" dirty="0"/>
+            <a:endParaRPr lang="en-US" sz="1200" dirty="0"/>
           </a:p>
         </p:txBody>
       </p:sp>
@@ -5721,8 +8680,8 @@
         </p:nvSpPr>
         <p:spPr>
           <a:xfrm>
-            <a:off x="731520" y="365760"/>
-            <a:ext cx="7680960" cy="548640"/>
+            <a:off x="731520" y="274320"/>
+            <a:ext cx="7680960" cy="502920"/>
           </a:xfrm>
           <a:prstGeom prst="rect">
             <a:avLst/>
@@ -5738,9 +8697,9 @@
               <a:buNone/>
             </a:pPr>
             <a:r>
-              <a:rPr lang="en-US" sz="2200" b="1" dirty="0">
-                <a:solidFill>
-                  <a:srgbClr val="00BFA6"/>
+              <a:rPr lang="en-US" sz="2000" b="1" dirty="0">
+                <a:solidFill>
+                  <a:srgbClr val="EC4899"/>
                 </a:solidFill>
                 <a:latin typeface="Calibri" pitchFamily="34" charset="0"/>
                 <a:ea typeface="Calibri" pitchFamily="34" charset="-122"/>
@@ -5748,20 +8707,66 @@
               </a:rPr>
               <a:t>ÉTAPES POUR ACHETER DU USDT SUR TEREX :</a:t>
             </a:r>
-            <a:endParaRPr lang="en-US" sz="2200" dirty="0"/>
-          </a:p>
-        </p:txBody>
-      </p:sp>
-      <p:sp>
-        <p:nvSpPr>
-          <p:cNvPr id="3" name="Text 1"/>
+            <a:endParaRPr lang="en-US" sz="2000" dirty="0"/>
+          </a:p>
+        </p:txBody>
+      </p:sp>
+      <p:sp>
+        <p:nvSpPr>
+          <p:cNvPr id="3" name="Shape 1"/>
+          <p:cNvSpPr/>
+          <p:nvPr/>
+        </p:nvSpPr>
+        <p:spPr>
+          <a:xfrm>
+            <a:off x="594360" y="1005840"/>
+            <a:ext cx="2468880" cy="1371600"/>
+          </a:xfrm>
+          <a:prstGeom prst="roundRect">
+            <a:avLst>
+              <a:gd name="adj" fmla="val 6667"/>
+            </a:avLst>
+          </a:prstGeom>
+          <a:solidFill>
+            <a:srgbClr val="1A2332"/>
+          </a:solidFill>
+          <a:ln/>
+        </p:spPr>
+      </p:sp>
+      <p:pic>
+        <p:nvPicPr>
+          <p:cNvPr id="4" name="Image 0" descr="preencoded.png">    </p:cNvPr>
+          <p:cNvPicPr>
+            <a:picLocks noChangeAspect="1"/>
+          </p:cNvPicPr>
+          <p:nvPr/>
+        </p:nvPicPr>
+        <p:blipFill>
+          <a:blip r:embed="rId1"/>
+          <a:stretch>
+            <a:fillRect/>
+          </a:stretch>
+        </p:blipFill>
+        <p:spPr>
+          <a:xfrm>
+            <a:off x="731520" y="1143000"/>
+            <a:ext cx="502920" cy="502920"/>
+          </a:xfrm>
+          <a:prstGeom prst="rect">
+            <a:avLst/>
+          </a:prstGeom>
+        </p:spPr>
+      </p:pic>
+      <p:sp>
+        <p:nvSpPr>
+          <p:cNvPr id="5" name="Text 2"/>
           <p:cNvSpPr txBox="1"/>
           <p:nvPr/>
         </p:nvSpPr>
         <p:spPr>
           <a:xfrm>
-            <a:off x="731520" y="1051560"/>
-            <a:ext cx="7680960" cy="3657600"/>
+            <a:off x="731520" y="1719072"/>
+            <a:ext cx="2194560" cy="320040"/>
           </a:xfrm>
           <a:prstGeom prst="rect">
             <a:avLst/>
@@ -5773,15 +8778,11 @@
           <a:bodyPr wrap="square" lIns="0" tIns="0" rIns="0" bIns="0" rtlCol="0" anchor="t"/>
           <a:lstStyle/>
           <a:p>
-            <a:pPr marL="342900" indent="-342900">
-              <a:spcAft>
-                <a:spcPts val="800"/>
-              </a:spcAft>
-              <a:buSzPct val="100000"/>
-              <a:buChar char="•"/>
-            </a:pPr>
-            <a:r>
-              <a:rPr lang="en-US" sz="1400" dirty="0">
+            <a:pPr indent="0" marL="0">
+              <a:buNone/>
+            </a:pPr>
+            <a:r>
+              <a:rPr lang="en-US" sz="1100" b="1" dirty="0">
                 <a:solidFill>
                   <a:srgbClr val="FFFFFF"/>
                 </a:solidFill>
@@ -5791,18 +8792,82 @@
               </a:rPr>
               <a:t>QUEL RÉSEAU CHOISIR ?</a:t>
             </a:r>
-            <a:endParaRPr lang="en-US" sz="1400" dirty="0"/>
-          </a:p>
-          <a:p>
-            <a:pPr marL="342900" indent="-342900">
-              <a:spcAft>
-                <a:spcPts val="800"/>
-              </a:spcAft>
-              <a:buSzPct val="100000"/>
-              <a:buChar char="•"/>
-            </a:pPr>
-            <a:r>
-              <a:rPr lang="en-US" sz="1400" dirty="0">
+            <a:endParaRPr lang="en-US" sz="1100" dirty="0"/>
+          </a:p>
+        </p:txBody>
+      </p:sp>
+      <p:sp>
+        <p:nvSpPr>
+          <p:cNvPr id="6" name="Shape 3"/>
+          <p:cNvSpPr/>
+          <p:nvPr/>
+        </p:nvSpPr>
+        <p:spPr>
+          <a:xfrm>
+            <a:off x="3246120" y="1005840"/>
+            <a:ext cx="2468880" cy="1371600"/>
+          </a:xfrm>
+          <a:prstGeom prst="roundRect">
+            <a:avLst>
+              <a:gd name="adj" fmla="val 6667"/>
+            </a:avLst>
+          </a:prstGeom>
+          <a:solidFill>
+            <a:srgbClr val="1A2332"/>
+          </a:solidFill>
+          <a:ln/>
+        </p:spPr>
+      </p:sp>
+      <p:pic>
+        <p:nvPicPr>
+          <p:cNvPr id="7" name="Image 1" descr="preencoded.png">    </p:cNvPr>
+          <p:cNvPicPr>
+            <a:picLocks noChangeAspect="1"/>
+          </p:cNvPicPr>
+          <p:nvPr/>
+        </p:nvPicPr>
+        <p:blipFill>
+          <a:blip r:embed="rId2"/>
+          <a:stretch>
+            <a:fillRect/>
+          </a:stretch>
+        </p:blipFill>
+        <p:spPr>
+          <a:xfrm>
+            <a:off x="3383280" y="1143000"/>
+            <a:ext cx="502920" cy="502920"/>
+          </a:xfrm>
+          <a:prstGeom prst="rect">
+            <a:avLst/>
+          </a:prstGeom>
+        </p:spPr>
+      </p:pic>
+      <p:sp>
+        <p:nvSpPr>
+          <p:cNvPr id="8" name="Text 4"/>
+          <p:cNvSpPr txBox="1"/>
+          <p:nvPr/>
+        </p:nvSpPr>
+        <p:spPr>
+          <a:xfrm>
+            <a:off x="3383280" y="1719072"/>
+            <a:ext cx="2194560" cy="320040"/>
+          </a:xfrm>
+          <a:prstGeom prst="rect">
+            <a:avLst/>
+          </a:prstGeom>
+          <a:noFill/>
+          <a:ln/>
+        </p:spPr>
+        <p:txBody>
+          <a:bodyPr wrap="square" lIns="0" tIns="0" rIns="0" bIns="0" rtlCol="0" anchor="t"/>
+          <a:lstStyle/>
+          <a:p>
+            <a:pPr indent="0" marL="0">
+              <a:buNone/>
+            </a:pPr>
+            <a:r>
+              <a:rPr lang="en-US" sz="1100" b="1" dirty="0">
                 <a:solidFill>
                   <a:srgbClr val="FFFFFF"/>
                 </a:solidFill>
@@ -5810,20 +8875,123 @@
                 <a:ea typeface="Calibri" pitchFamily="34" charset="-122"/>
                 <a:cs typeface="Calibri" pitchFamily="34" charset="-120"/>
               </a:rPr>
-              <a:t>TRC20 (Tron) — Le moins cher en frais de transfert. Recommandé pour les débutants.</a:t>
-            </a:r>
-            <a:endParaRPr lang="en-US" sz="1400" dirty="0"/>
-          </a:p>
-          <a:p>
-            <a:pPr marL="342900" indent="-342900">
-              <a:spcAft>
-                <a:spcPts val="800"/>
-              </a:spcAft>
-              <a:buSzPct val="100000"/>
-              <a:buChar char="•"/>
-            </a:pPr>
-            <a:r>
-              <a:rPr lang="en-US" sz="1400" dirty="0">
+              <a:t>TRC20 (Tron) — Le moins cher en frais de transfert. Recom...</a:t>
+            </a:r>
+            <a:endParaRPr lang="en-US" sz="1100" dirty="0"/>
+          </a:p>
+        </p:txBody>
+      </p:sp>
+      <p:sp>
+        <p:nvSpPr>
+          <p:cNvPr id="9" name="Text 5"/>
+          <p:cNvSpPr txBox="1"/>
+          <p:nvPr/>
+        </p:nvSpPr>
+        <p:spPr>
+          <a:xfrm>
+            <a:off x="3383280" y="2011680"/>
+            <a:ext cx="2194560" cy="274320"/>
+          </a:xfrm>
+          <a:prstGeom prst="rect">
+            <a:avLst/>
+          </a:prstGeom>
+          <a:noFill/>
+          <a:ln/>
+        </p:spPr>
+        <p:txBody>
+          <a:bodyPr wrap="square" lIns="0" tIns="0" rIns="0" bIns="0" rtlCol="0" anchor="t"/>
+          <a:lstStyle/>
+          <a:p>
+            <a:pPr indent="0" marL="0">
+              <a:buNone/>
+            </a:pPr>
+            <a:r>
+              <a:rPr lang="en-US" sz="900" dirty="0">
+                <a:solidFill>
+                  <a:srgbClr val="94A3B8"/>
+                </a:solidFill>
+                <a:latin typeface="Calibri" pitchFamily="34" charset="0"/>
+                <a:ea typeface="Calibri" pitchFamily="34" charset="-122"/>
+                <a:cs typeface="Calibri" pitchFamily="34" charset="-120"/>
+              </a:rPr>
+              <a:t>s débutants.</a:t>
+            </a:r>
+            <a:endParaRPr lang="en-US" sz="900" dirty="0"/>
+          </a:p>
+        </p:txBody>
+      </p:sp>
+      <p:sp>
+        <p:nvSpPr>
+          <p:cNvPr id="10" name="Shape 6"/>
+          <p:cNvSpPr/>
+          <p:nvPr/>
+        </p:nvSpPr>
+        <p:spPr>
+          <a:xfrm>
+            <a:off x="5897880" y="1005840"/>
+            <a:ext cx="2468880" cy="1371600"/>
+          </a:xfrm>
+          <a:prstGeom prst="roundRect">
+            <a:avLst>
+              <a:gd name="adj" fmla="val 6667"/>
+            </a:avLst>
+          </a:prstGeom>
+          <a:solidFill>
+            <a:srgbClr val="1A2332"/>
+          </a:solidFill>
+          <a:ln/>
+        </p:spPr>
+      </p:sp>
+      <p:pic>
+        <p:nvPicPr>
+          <p:cNvPr id="11" name="Image 2" descr="preencoded.png">    </p:cNvPr>
+          <p:cNvPicPr>
+            <a:picLocks noChangeAspect="1"/>
+          </p:cNvPicPr>
+          <p:nvPr/>
+        </p:nvPicPr>
+        <p:blipFill>
+          <a:blip r:embed="rId3"/>
+          <a:stretch>
+            <a:fillRect/>
+          </a:stretch>
+        </p:blipFill>
+        <p:spPr>
+          <a:xfrm>
+            <a:off x="6035040" y="1143000"/>
+            <a:ext cx="502920" cy="502920"/>
+          </a:xfrm>
+          <a:prstGeom prst="rect">
+            <a:avLst/>
+          </a:prstGeom>
+        </p:spPr>
+      </p:pic>
+      <p:sp>
+        <p:nvSpPr>
+          <p:cNvPr id="12" name="Text 7"/>
+          <p:cNvSpPr txBox="1"/>
+          <p:nvPr/>
+        </p:nvSpPr>
+        <p:spPr>
+          <a:xfrm>
+            <a:off x="6035040" y="1719072"/>
+            <a:ext cx="2194560" cy="320040"/>
+          </a:xfrm>
+          <a:prstGeom prst="rect">
+            <a:avLst/>
+          </a:prstGeom>
+          <a:noFill/>
+          <a:ln/>
+        </p:spPr>
+        <p:txBody>
+          <a:bodyPr wrap="square" lIns="0" tIns="0" rIns="0" bIns="0" rtlCol="0" anchor="t"/>
+          <a:lstStyle/>
+          <a:p>
+            <a:pPr indent="0" marL="0">
+              <a:buNone/>
+            </a:pPr>
+            <a:r>
+              <a:rPr lang="en-US" sz="1100" b="1" dirty="0">
                 <a:solidFill>
                   <a:srgbClr val="FFFFFF"/>
                 </a:solidFill>
@@ -5831,20 +8999,123 @@
                 <a:ea typeface="Calibri" pitchFamily="34" charset="-122"/>
                 <a:cs typeface="Calibri" pitchFamily="34" charset="-120"/>
               </a:rPr>
-              <a:t>BEP20 (BNB Chain) — Frais bas aussi, compatible avec l'écosystème Binance.</a:t>
-            </a:r>
-            <a:endParaRPr lang="en-US" sz="1400" dirty="0"/>
-          </a:p>
-          <a:p>
-            <a:pPr marL="342900" indent="-342900">
-              <a:spcAft>
-                <a:spcPts val="800"/>
-              </a:spcAft>
-              <a:buSzPct val="100000"/>
-              <a:buChar char="•"/>
-            </a:pPr>
-            <a:r>
-              <a:rPr lang="en-US" sz="1400" dirty="0">
+              <a:t>BEP20 (BNB Chain) — Frais bas aussi, compatible avec l'éc...</a:t>
+            </a:r>
+            <a:endParaRPr lang="en-US" sz="1100" dirty="0"/>
+          </a:p>
+        </p:txBody>
+      </p:sp>
+      <p:sp>
+        <p:nvSpPr>
+          <p:cNvPr id="13" name="Text 8"/>
+          <p:cNvSpPr txBox="1"/>
+          <p:nvPr/>
+        </p:nvSpPr>
+        <p:spPr>
+          <a:xfrm>
+            <a:off x="6035040" y="2011680"/>
+            <a:ext cx="2194560" cy="274320"/>
+          </a:xfrm>
+          <a:prstGeom prst="rect">
+            <a:avLst/>
+          </a:prstGeom>
+          <a:noFill/>
+          <a:ln/>
+        </p:spPr>
+        <p:txBody>
+          <a:bodyPr wrap="square" lIns="0" tIns="0" rIns="0" bIns="0" rtlCol="0" anchor="t"/>
+          <a:lstStyle/>
+          <a:p>
+            <a:pPr indent="0" marL="0">
+              <a:buNone/>
+            </a:pPr>
+            <a:r>
+              <a:rPr lang="en-US" sz="900" dirty="0">
+                <a:solidFill>
+                  <a:srgbClr val="94A3B8"/>
+                </a:solidFill>
+                <a:latin typeface="Calibri" pitchFamily="34" charset="0"/>
+                <a:ea typeface="Calibri" pitchFamily="34" charset="-122"/>
+                <a:cs typeface="Calibri" pitchFamily="34" charset="-120"/>
+              </a:rPr>
+              <a:t>nce.</a:t>
+            </a:r>
+            <a:endParaRPr lang="en-US" sz="900" dirty="0"/>
+          </a:p>
+        </p:txBody>
+      </p:sp>
+      <p:sp>
+        <p:nvSpPr>
+          <p:cNvPr id="14" name="Shape 9"/>
+          <p:cNvSpPr/>
+          <p:nvPr/>
+        </p:nvSpPr>
+        <p:spPr>
+          <a:xfrm>
+            <a:off x="594360" y="2514600"/>
+            <a:ext cx="2468880" cy="1371600"/>
+          </a:xfrm>
+          <a:prstGeom prst="roundRect">
+            <a:avLst>
+              <a:gd name="adj" fmla="val 6667"/>
+            </a:avLst>
+          </a:prstGeom>
+          <a:solidFill>
+            <a:srgbClr val="1A2332"/>
+          </a:solidFill>
+          <a:ln/>
+        </p:spPr>
+      </p:sp>
+      <p:pic>
+        <p:nvPicPr>
+          <p:cNvPr id="15" name="Image 3" descr="preencoded.png">    </p:cNvPr>
+          <p:cNvPicPr>
+            <a:picLocks noChangeAspect="1"/>
+          </p:cNvPicPr>
+          <p:nvPr/>
+        </p:nvPicPr>
+        <p:blipFill>
+          <a:blip r:embed="rId4"/>
+          <a:stretch>
+            <a:fillRect/>
+          </a:stretch>
+        </p:blipFill>
+        <p:spPr>
+          <a:xfrm>
+            <a:off x="731520" y="2651760"/>
+            <a:ext cx="502920" cy="502920"/>
+          </a:xfrm>
+          <a:prstGeom prst="rect">
+            <a:avLst/>
+          </a:prstGeom>
+        </p:spPr>
+      </p:pic>
+      <p:sp>
+        <p:nvSpPr>
+          <p:cNvPr id="16" name="Text 10"/>
+          <p:cNvSpPr txBox="1"/>
+          <p:nvPr/>
+        </p:nvSpPr>
+        <p:spPr>
+          <a:xfrm>
+            <a:off x="731520" y="3227832"/>
+            <a:ext cx="2194560" cy="320040"/>
+          </a:xfrm>
+          <a:prstGeom prst="rect">
+            <a:avLst/>
+          </a:prstGeom>
+          <a:noFill/>
+          <a:ln/>
+        </p:spPr>
+        <p:txBody>
+          <a:bodyPr wrap="square" lIns="0" tIns="0" rIns="0" bIns="0" rtlCol="0" anchor="t"/>
+          <a:lstStyle/>
+          <a:p>
+            <a:pPr indent="0" marL="0">
+              <a:buNone/>
+            </a:pPr>
+            <a:r>
+              <a:rPr lang="en-US" sz="1100" b="1" dirty="0">
                 <a:solidFill>
                   <a:srgbClr val="FFFFFF"/>
                 </a:solidFill>
@@ -5852,20 +9123,84 @@
                 <a:ea typeface="Calibri" pitchFamily="34" charset="-122"/>
                 <a:cs typeface="Calibri" pitchFamily="34" charset="-120"/>
               </a:rPr>
-              <a:t>ERC20 (Ethereum) — Le plus ancien mais les frais peuvent être élevés.</a:t>
-            </a:r>
-            <a:endParaRPr lang="en-US" sz="1400" dirty="0"/>
-          </a:p>
-          <a:p>
-            <a:pPr marL="342900" indent="-342900">
-              <a:spcAft>
-                <a:spcPts val="800"/>
-              </a:spcAft>
-              <a:buSzPct val="100000"/>
-              <a:buChar char="•"/>
-            </a:pPr>
-            <a:r>
-              <a:rPr lang="en-US" sz="1400" dirty="0">
+              <a:t>ERC20 (Ethereum) — Le plus ancien mais les frais peuvent ...</a:t>
+            </a:r>
+            <a:endParaRPr lang="en-US" sz="1100" dirty="0"/>
+          </a:p>
+        </p:txBody>
+      </p:sp>
+      <p:sp>
+        <p:nvSpPr>
+          <p:cNvPr id="17" name="Shape 11"/>
+          <p:cNvSpPr/>
+          <p:nvPr/>
+        </p:nvSpPr>
+        <p:spPr>
+          <a:xfrm>
+            <a:off x="3246120" y="2514600"/>
+            <a:ext cx="2468880" cy="1371600"/>
+          </a:xfrm>
+          <a:prstGeom prst="roundRect">
+            <a:avLst>
+              <a:gd name="adj" fmla="val 6667"/>
+            </a:avLst>
+          </a:prstGeom>
+          <a:solidFill>
+            <a:srgbClr val="1A2332"/>
+          </a:solidFill>
+          <a:ln/>
+        </p:spPr>
+      </p:sp>
+      <p:pic>
+        <p:nvPicPr>
+          <p:cNvPr id="18" name="Image 4" descr="preencoded.png">    </p:cNvPr>
+          <p:cNvPicPr>
+            <a:picLocks noChangeAspect="1"/>
+          </p:cNvPicPr>
+          <p:nvPr/>
+        </p:nvPicPr>
+        <p:blipFill>
+          <a:blip r:embed="rId5"/>
+          <a:stretch>
+            <a:fillRect/>
+          </a:stretch>
+        </p:blipFill>
+        <p:spPr>
+          <a:xfrm>
+            <a:off x="3383280" y="2651760"/>
+            <a:ext cx="502920" cy="502920"/>
+          </a:xfrm>
+          <a:prstGeom prst="rect">
+            <a:avLst/>
+          </a:prstGeom>
+        </p:spPr>
+      </p:pic>
+      <p:sp>
+        <p:nvSpPr>
+          <p:cNvPr id="19" name="Text 12"/>
+          <p:cNvSpPr txBox="1"/>
+          <p:nvPr/>
+        </p:nvSpPr>
+        <p:spPr>
+          <a:xfrm>
+            <a:off x="3383280" y="3227832"/>
+            <a:ext cx="2194560" cy="320040"/>
+          </a:xfrm>
+          <a:prstGeom prst="rect">
+            <a:avLst/>
+          </a:prstGeom>
+          <a:noFill/>
+          <a:ln/>
+        </p:spPr>
+        <p:txBody>
+          <a:bodyPr wrap="square" lIns="0" tIns="0" rIns="0" bIns="0" rtlCol="0" anchor="t"/>
+          <a:lstStyle/>
+          <a:p>
+            <a:pPr indent="0" marL="0">
+              <a:buNone/>
+            </a:pPr>
+            <a:r>
+              <a:rPr lang="en-US" sz="1100" b="1" dirty="0">
                 <a:solidFill>
                   <a:srgbClr val="FFFFFF"/>
                 </a:solidFill>
@@ -5873,22 +9208,22 @@
                 <a:ea typeface="Calibri" pitchFamily="34" charset="-122"/>
                 <a:cs typeface="Calibri" pitchFamily="34" charset="-120"/>
               </a:rPr>
-              <a:t>IMPORTANT : Vérifiez TOUJOURS que le réseau de votre adresse de réception correspond au réseau choisi sur Terex. Envoyer du USDT TRC20 à une adresse ERC20 = perte définitive des...</a:t>
-            </a:r>
-            <a:endParaRPr lang="en-US" sz="1400" dirty="0"/>
-          </a:p>
-        </p:txBody>
-      </p:sp>
-      <p:sp>
-        <p:nvSpPr>
-          <p:cNvPr id="4" name="Text 2"/>
+              <a:t>IMPORTANT : Vérifiez TOUJOURS que le réseau de votre adre...</a:t>
+            </a:r>
+            <a:endParaRPr lang="en-US" sz="1100" dirty="0"/>
+          </a:p>
+        </p:txBody>
+      </p:sp>
+      <p:sp>
+        <p:nvSpPr>
+          <p:cNvPr id="20" name="Text 13"/>
           <p:cNvSpPr txBox="1"/>
           <p:nvPr/>
         </p:nvSpPr>
         <p:spPr>
           <a:xfrm>
-            <a:off x="731520" y="4709160"/>
-            <a:ext cx="7680960" cy="274320"/>
+            <a:off x="3383280" y="3520440"/>
+            <a:ext cx="2194560" cy="274320"/>
           </a:xfrm>
           <a:prstGeom prst="rect">
             <a:avLst/>
@@ -5897,22 +9232,22 @@
           <a:ln/>
         </p:spPr>
         <p:txBody>
-          <a:bodyPr wrap="square" lIns="0" tIns="0" rIns="0" bIns="0" rtlCol="0" anchor="ctr"/>
-          <a:lstStyle/>
-          <a:p>
-            <a:pPr algn="r" indent="0" marL="0">
+          <a:bodyPr wrap="square" lIns="0" tIns="0" rIns="0" bIns="0" rtlCol="0" anchor="t"/>
+          <a:lstStyle/>
+          <a:p>
+            <a:pPr indent="0" marL="0">
               <a:buNone/>
             </a:pPr>
             <a:r>
               <a:rPr lang="en-US" sz="900" dirty="0">
                 <a:solidFill>
-                  <a:srgbClr val="64748B"/>
-                </a:solidFill>
-                <a:latin typeface="Calibri" pitchFamily="34" charset="0"/>
-                <a:ea typeface="Calibri" pitchFamily="34" charset="-122"/>
-                <a:cs typeface="Calibri" pitchFamily="34" charset="-120"/>
-              </a:rPr>
-              <a:t>Module 3 — Lecon 1</a:t>
+                  <a:srgbClr val="94A3B8"/>
+                </a:solidFill>
+                <a:latin typeface="Calibri" pitchFamily="34" charset="0"/>
+                <a:ea typeface="Calibri" pitchFamily="34" charset="-122"/>
+                <a:cs typeface="Calibri" pitchFamily="34" charset="-120"/>
+              </a:rPr>
+              <a:t>ion correspond au réseau choisi sur Terex. Envoyer du USDT TRC20 à une adresse E</a:t>
             </a:r>
             <a:endParaRPr lang="en-US" sz="900" dirty="0"/>
           </a:p>
@@ -5950,16 +9285,40 @@
           <a:chExt cx="0" cy="0"/>
         </a:xfrm>
       </p:grpSpPr>
-      <p:sp>
-        <p:nvSpPr>
-          <p:cNvPr id="2" name="Text 0"/>
+      <p:pic>
+        <p:nvPicPr>
+          <p:cNvPr id="2" name="Image 0" descr="preencoded.png">    </p:cNvPr>
+          <p:cNvPicPr>
+            <a:picLocks noChangeAspect="1"/>
+          </p:cNvPicPr>
+          <p:nvPr/>
+        </p:nvPicPr>
+        <p:blipFill>
+          <a:blip r:embed="rId1"/>
+          <a:stretch>
+            <a:fillRect/>
+          </a:stretch>
+        </p:blipFill>
+        <p:spPr>
+          <a:xfrm>
+            <a:off x="731520" y="320040"/>
+            <a:ext cx="457200" cy="457200"/>
+          </a:xfrm>
+          <a:prstGeom prst="rect">
+            <a:avLst/>
+          </a:prstGeom>
+        </p:spPr>
+      </p:pic>
+      <p:sp>
+        <p:nvSpPr>
+          <p:cNvPr id="3" name="Text 0"/>
           <p:cNvSpPr txBox="1"/>
           <p:nvPr/>
         </p:nvSpPr>
         <p:spPr>
           <a:xfrm>
-            <a:off x="731520" y="457200"/>
-            <a:ext cx="2743200" cy="365760"/>
+            <a:off x="1280160" y="365760"/>
+            <a:ext cx="2743200" cy="320040"/>
           </a:xfrm>
           <a:prstGeom prst="rect">
             <a:avLst/>
@@ -5991,14 +9350,14 @@
       </p:sp>
       <p:sp>
         <p:nvSpPr>
-          <p:cNvPr id="3" name="Text 1"/>
+          <p:cNvPr id="4" name="Text 1"/>
           <p:cNvSpPr txBox="1"/>
           <p:nvPr/>
         </p:nvSpPr>
         <p:spPr>
           <a:xfrm>
-            <a:off x="731520" y="868680"/>
-            <a:ext cx="7680960" cy="502920"/>
+            <a:off x="731520" y="822960"/>
+            <a:ext cx="7680960" cy="457200"/>
           </a:xfrm>
           <a:prstGeom prst="rect">
             <a:avLst/>
@@ -6014,7 +9373,7 @@
               <a:buNone/>
             </a:pPr>
             <a:r>
-              <a:rPr lang="en-US" sz="2200" b="1" dirty="0">
+              <a:rPr lang="en-US" sz="2000" b="1" dirty="0">
                 <a:solidFill>
                   <a:srgbClr val="FFFFFF"/>
                 </a:solidFill>
@@ -6024,28 +9383,50 @@
               </a:rPr>
               <a:t>Acheter votre premier USDT avec Terex</a:t>
             </a:r>
-            <a:endParaRPr lang="en-US" sz="2200" dirty="0"/>
-          </a:p>
-        </p:txBody>
-      </p:sp>
-      <p:sp>
-        <p:nvSpPr>
-          <p:cNvPr id="4" name="Text 2"/>
-          <p:cNvSpPr txBox="1"/>
-          <p:nvPr/>
-        </p:nvSpPr>
-        <p:spPr>
-          <a:xfrm>
-            <a:off x="731520" y="1554480"/>
-            <a:ext cx="457200" cy="548640"/>
+            <a:endParaRPr lang="en-US" sz="2000" dirty="0"/>
+          </a:p>
+        </p:txBody>
+      </p:sp>
+      <p:sp>
+        <p:nvSpPr>
+          <p:cNvPr id="5" name="Shape 2"/>
+          <p:cNvSpPr/>
+          <p:nvPr/>
+        </p:nvSpPr>
+        <p:spPr>
+          <a:xfrm>
+            <a:off x="731520" y="1463040"/>
+            <a:ext cx="7680960" cy="548640"/>
           </a:xfrm>
           <a:prstGeom prst="roundRect">
             <a:avLst>
-              <a:gd name="adj" fmla="val 50000"/>
+              <a:gd name="adj" fmla="val 13333"/>
             </a:avLst>
           </a:prstGeom>
           <a:solidFill>
-            <a:srgbClr val="00BFA6"/>
+            <a:srgbClr val="0F1419"/>
+          </a:solidFill>
+          <a:ln/>
+        </p:spPr>
+      </p:sp>
+      <p:sp>
+        <p:nvSpPr>
+          <p:cNvPr id="6" name="Text 3"/>
+          <p:cNvSpPr txBox="1"/>
+          <p:nvPr/>
+        </p:nvSpPr>
+        <p:spPr>
+          <a:xfrm>
+            <a:off x="914400" y="1463040"/>
+            <a:ext cx="411480" cy="548640"/>
+          </a:xfrm>
+          <a:prstGeom prst="roundRect">
+            <a:avLst>
+              <a:gd name="adj" fmla="val 48889"/>
+            </a:avLst>
+          </a:prstGeom>
+          <a:solidFill>
+            <a:srgbClr val="EC4899"/>
           </a:solidFill>
           <a:ln/>
         </p:spPr>
@@ -6057,7 +9438,7 @@
               <a:buNone/>
             </a:pPr>
             <a:r>
-              <a:rPr lang="en-US" sz="1600" b="1" dirty="0">
+              <a:rPr lang="en-US" sz="1500" b="1" dirty="0">
                 <a:solidFill>
                   <a:srgbClr val="0F1419"/>
                 </a:solidFill>
@@ -6067,20 +9448,20 @@
               </a:rPr>
               <a:t>1</a:t>
             </a:r>
-            <a:endParaRPr lang="en-US" sz="1600" dirty="0"/>
-          </a:p>
-        </p:txBody>
-      </p:sp>
-      <p:sp>
-        <p:nvSpPr>
-          <p:cNvPr id="5" name="Text 3"/>
+            <a:endParaRPr lang="en-US" sz="1500" dirty="0"/>
+          </a:p>
+        </p:txBody>
+      </p:sp>
+      <p:sp>
+        <p:nvSpPr>
+          <p:cNvPr id="7" name="Text 4"/>
           <p:cNvSpPr txBox="1"/>
           <p:nvPr/>
         </p:nvSpPr>
         <p:spPr>
           <a:xfrm>
-            <a:off x="1371600" y="1554480"/>
-            <a:ext cx="7040880" cy="548640"/>
+            <a:off x="1508760" y="1463040"/>
+            <a:ext cx="6766560" cy="548640"/>
           </a:xfrm>
           <a:prstGeom prst="rect">
             <a:avLst/>
@@ -6096,7 +9477,7 @@
               <a:buNone/>
             </a:pPr>
             <a:r>
-              <a:rPr lang="en-US" sz="1400" dirty="0">
+              <a:rPr lang="en-US" sz="1300" dirty="0">
                 <a:solidFill>
                   <a:srgbClr val="FFFFFF"/>
                 </a:solidFill>
@@ -6106,28 +9487,50 @@
               </a:rPr>
               <a:t>Créez votre compte sur terangaexchange.com</a:t>
             </a:r>
-            <a:endParaRPr lang="en-US" sz="1400" dirty="0"/>
-          </a:p>
-        </p:txBody>
-      </p:sp>
-      <p:sp>
-        <p:nvSpPr>
-          <p:cNvPr id="6" name="Text 4"/>
-          <p:cNvSpPr txBox="1"/>
-          <p:nvPr/>
-        </p:nvSpPr>
-        <p:spPr>
-          <a:xfrm>
-            <a:off x="731520" y="2212848"/>
-            <a:ext cx="457200" cy="548640"/>
+            <a:endParaRPr lang="en-US" sz="1300" dirty="0"/>
+          </a:p>
+        </p:txBody>
+      </p:sp>
+      <p:sp>
+        <p:nvSpPr>
+          <p:cNvPr id="8" name="Shape 5"/>
+          <p:cNvSpPr/>
+          <p:nvPr/>
+        </p:nvSpPr>
+        <p:spPr>
+          <a:xfrm>
+            <a:off x="731520" y="2103120"/>
+            <a:ext cx="7680960" cy="548640"/>
           </a:xfrm>
           <a:prstGeom prst="roundRect">
             <a:avLst>
-              <a:gd name="adj" fmla="val 50000"/>
+              <a:gd name="adj" fmla="val 13333"/>
             </a:avLst>
           </a:prstGeom>
           <a:solidFill>
-            <a:srgbClr val="00BFA6"/>
+            <a:srgbClr val="0F1419"/>
+          </a:solidFill>
+          <a:ln/>
+        </p:spPr>
+      </p:sp>
+      <p:sp>
+        <p:nvSpPr>
+          <p:cNvPr id="9" name="Text 6"/>
+          <p:cNvSpPr txBox="1"/>
+          <p:nvPr/>
+        </p:nvSpPr>
+        <p:spPr>
+          <a:xfrm>
+            <a:off x="914400" y="2103120"/>
+            <a:ext cx="411480" cy="548640"/>
+          </a:xfrm>
+          <a:prstGeom prst="roundRect">
+            <a:avLst>
+              <a:gd name="adj" fmla="val 48889"/>
+            </a:avLst>
+          </a:prstGeom>
+          <a:solidFill>
+            <a:srgbClr val="EC4899"/>
           </a:solidFill>
           <a:ln/>
         </p:spPr>
@@ -6139,7 +9542,7 @@
               <a:buNone/>
             </a:pPr>
             <a:r>
-              <a:rPr lang="en-US" sz="1600" b="1" dirty="0">
+              <a:rPr lang="en-US" sz="1500" b="1" dirty="0">
                 <a:solidFill>
                   <a:srgbClr val="0F1419"/>
                 </a:solidFill>
@@ -6149,20 +9552,20 @@
               </a:rPr>
               <a:t>2</a:t>
             </a:r>
-            <a:endParaRPr lang="en-US" sz="1600" dirty="0"/>
-          </a:p>
-        </p:txBody>
-      </p:sp>
-      <p:sp>
-        <p:nvSpPr>
-          <p:cNvPr id="7" name="Text 5"/>
+            <a:endParaRPr lang="en-US" sz="1500" dirty="0"/>
+          </a:p>
+        </p:txBody>
+      </p:sp>
+      <p:sp>
+        <p:nvSpPr>
+          <p:cNvPr id="10" name="Text 7"/>
           <p:cNvSpPr txBox="1"/>
           <p:nvPr/>
         </p:nvSpPr>
         <p:spPr>
           <a:xfrm>
-            <a:off x="1371600" y="2212848"/>
-            <a:ext cx="7040880" cy="548640"/>
+            <a:off x="1508760" y="2103120"/>
+            <a:ext cx="6766560" cy="548640"/>
           </a:xfrm>
           <a:prstGeom prst="rect">
             <a:avLst/>
@@ -6178,7 +9581,7 @@
               <a:buNone/>
             </a:pPr>
             <a:r>
-              <a:rPr lang="en-US" sz="1400" dirty="0">
+              <a:rPr lang="en-US" sz="1300" dirty="0">
                 <a:solidFill>
                   <a:srgbClr val="FFFFFF"/>
                 </a:solidFill>
@@ -6188,28 +9591,50 @@
               </a:rPr>
               <a:t>Complétez votre vérification KYC (identité)</a:t>
             </a:r>
-            <a:endParaRPr lang="en-US" sz="1400" dirty="0"/>
-          </a:p>
-        </p:txBody>
-      </p:sp>
-      <p:sp>
-        <p:nvSpPr>
-          <p:cNvPr id="8" name="Text 6"/>
-          <p:cNvSpPr txBox="1"/>
-          <p:nvPr/>
-        </p:nvSpPr>
-        <p:spPr>
-          <a:xfrm>
-            <a:off x="731520" y="2871216"/>
-            <a:ext cx="457200" cy="548640"/>
+            <a:endParaRPr lang="en-US" sz="1300" dirty="0"/>
+          </a:p>
+        </p:txBody>
+      </p:sp>
+      <p:sp>
+        <p:nvSpPr>
+          <p:cNvPr id="11" name="Shape 8"/>
+          <p:cNvSpPr/>
+          <p:nvPr/>
+        </p:nvSpPr>
+        <p:spPr>
+          <a:xfrm>
+            <a:off x="731520" y="2743200"/>
+            <a:ext cx="7680960" cy="548640"/>
           </a:xfrm>
           <a:prstGeom prst="roundRect">
             <a:avLst>
-              <a:gd name="adj" fmla="val 50000"/>
+              <a:gd name="adj" fmla="val 13333"/>
             </a:avLst>
           </a:prstGeom>
           <a:solidFill>
-            <a:srgbClr val="00BFA6"/>
+            <a:srgbClr val="0F1419"/>
+          </a:solidFill>
+          <a:ln/>
+        </p:spPr>
+      </p:sp>
+      <p:sp>
+        <p:nvSpPr>
+          <p:cNvPr id="12" name="Text 9"/>
+          <p:cNvSpPr txBox="1"/>
+          <p:nvPr/>
+        </p:nvSpPr>
+        <p:spPr>
+          <a:xfrm>
+            <a:off x="914400" y="2743200"/>
+            <a:ext cx="411480" cy="548640"/>
+          </a:xfrm>
+          <a:prstGeom prst="roundRect">
+            <a:avLst>
+              <a:gd name="adj" fmla="val 48889"/>
+            </a:avLst>
+          </a:prstGeom>
+          <a:solidFill>
+            <a:srgbClr val="EC4899"/>
           </a:solidFill>
           <a:ln/>
         </p:spPr>
@@ -6221,7 +9646,7 @@
               <a:buNone/>
             </a:pPr>
             <a:r>
-              <a:rPr lang="en-US" sz="1600" b="1" dirty="0">
+              <a:rPr lang="en-US" sz="1500" b="1" dirty="0">
                 <a:solidFill>
                   <a:srgbClr val="0F1419"/>
                 </a:solidFill>
@@ -6231,20 +9656,20 @@
               </a:rPr>
               <a:t>3</a:t>
             </a:r>
-            <a:endParaRPr lang="en-US" sz="1600" dirty="0"/>
-          </a:p>
-        </p:txBody>
-      </p:sp>
-      <p:sp>
-        <p:nvSpPr>
-          <p:cNvPr id="9" name="Text 7"/>
+            <a:endParaRPr lang="en-US" sz="1500" dirty="0"/>
+          </a:p>
+        </p:txBody>
+      </p:sp>
+      <p:sp>
+        <p:nvSpPr>
+          <p:cNvPr id="13" name="Text 10"/>
           <p:cNvSpPr txBox="1"/>
           <p:nvPr/>
         </p:nvSpPr>
         <p:spPr>
           <a:xfrm>
-            <a:off x="1371600" y="2871216"/>
-            <a:ext cx="7040880" cy="548640"/>
+            <a:off x="1508760" y="2743200"/>
+            <a:ext cx="6766560" cy="548640"/>
           </a:xfrm>
           <a:prstGeom prst="rect">
             <a:avLst/>
@@ -6260,7 +9685,7 @@
               <a:buNone/>
             </a:pPr>
             <a:r>
-              <a:rPr lang="en-US" sz="1400" dirty="0">
+              <a:rPr lang="en-US" sz="1300" dirty="0">
                 <a:solidFill>
                   <a:srgbClr val="FFFFFF"/>
                 </a:solidFill>
@@ -6270,28 +9695,50 @@
               </a:rPr>
               <a:t>Cliquez sur "Acheter" dans votre tableau de bord</a:t>
             </a:r>
-            <a:endParaRPr lang="en-US" sz="1400" dirty="0"/>
-          </a:p>
-        </p:txBody>
-      </p:sp>
-      <p:sp>
-        <p:nvSpPr>
-          <p:cNvPr id="10" name="Text 8"/>
-          <p:cNvSpPr txBox="1"/>
-          <p:nvPr/>
-        </p:nvSpPr>
-        <p:spPr>
-          <a:xfrm>
-            <a:off x="731520" y="3529584"/>
-            <a:ext cx="457200" cy="548640"/>
+            <a:endParaRPr lang="en-US" sz="1300" dirty="0"/>
+          </a:p>
+        </p:txBody>
+      </p:sp>
+      <p:sp>
+        <p:nvSpPr>
+          <p:cNvPr id="14" name="Shape 11"/>
+          <p:cNvSpPr/>
+          <p:nvPr/>
+        </p:nvSpPr>
+        <p:spPr>
+          <a:xfrm>
+            <a:off x="731520" y="3383280"/>
+            <a:ext cx="7680960" cy="548640"/>
           </a:xfrm>
           <a:prstGeom prst="roundRect">
             <a:avLst>
-              <a:gd name="adj" fmla="val 50000"/>
+              <a:gd name="adj" fmla="val 13333"/>
             </a:avLst>
           </a:prstGeom>
           <a:solidFill>
-            <a:srgbClr val="00BFA6"/>
+            <a:srgbClr val="0F1419"/>
+          </a:solidFill>
+          <a:ln/>
+        </p:spPr>
+      </p:sp>
+      <p:sp>
+        <p:nvSpPr>
+          <p:cNvPr id="15" name="Text 12"/>
+          <p:cNvSpPr txBox="1"/>
+          <p:nvPr/>
+        </p:nvSpPr>
+        <p:spPr>
+          <a:xfrm>
+            <a:off x="914400" y="3383280"/>
+            <a:ext cx="411480" cy="548640"/>
+          </a:xfrm>
+          <a:prstGeom prst="roundRect">
+            <a:avLst>
+              <a:gd name="adj" fmla="val 48889"/>
+            </a:avLst>
+          </a:prstGeom>
+          <a:solidFill>
+            <a:srgbClr val="EC4899"/>
           </a:solidFill>
           <a:ln/>
         </p:spPr>
@@ -6303,7 +9750,7 @@
               <a:buNone/>
             </a:pPr>
             <a:r>
-              <a:rPr lang="en-US" sz="1600" b="1" dirty="0">
+              <a:rPr lang="en-US" sz="1500" b="1" dirty="0">
                 <a:solidFill>
                   <a:srgbClr val="0F1419"/>
                 </a:solidFill>
@@ -6313,20 +9760,20 @@
               </a:rPr>
               <a:t>4</a:t>
             </a:r>
-            <a:endParaRPr lang="en-US" sz="1600" dirty="0"/>
-          </a:p>
-        </p:txBody>
-      </p:sp>
-      <p:sp>
-        <p:nvSpPr>
-          <p:cNvPr id="11" name="Text 9"/>
+            <a:endParaRPr lang="en-US" sz="1500" dirty="0"/>
+          </a:p>
+        </p:txBody>
+      </p:sp>
+      <p:sp>
+        <p:nvSpPr>
+          <p:cNvPr id="16" name="Text 13"/>
           <p:cNvSpPr txBox="1"/>
           <p:nvPr/>
         </p:nvSpPr>
         <p:spPr>
           <a:xfrm>
-            <a:off x="1371600" y="3529584"/>
-            <a:ext cx="7040880" cy="548640"/>
+            <a:off x="1508760" y="3383280"/>
+            <a:ext cx="6766560" cy="548640"/>
           </a:xfrm>
           <a:prstGeom prst="rect">
             <a:avLst/>
@@ -6342,7 +9789,7 @@
               <a:buNone/>
             </a:pPr>
             <a:r>
-              <a:rPr lang="en-US" sz="1400" dirty="0">
+              <a:rPr lang="en-US" sz="1300" dirty="0">
                 <a:solidFill>
                   <a:srgbClr val="FFFFFF"/>
                 </a:solidFill>
@@ -6352,28 +9799,50 @@
               </a:rPr>
               <a:t>Entrez le montant en CFA que vous souhaitez investir</a:t>
             </a:r>
-            <a:endParaRPr lang="en-US" sz="1400" dirty="0"/>
-          </a:p>
-        </p:txBody>
-      </p:sp>
-      <p:sp>
-        <p:nvSpPr>
-          <p:cNvPr id="12" name="Text 10"/>
-          <p:cNvSpPr txBox="1"/>
-          <p:nvPr/>
-        </p:nvSpPr>
-        <p:spPr>
-          <a:xfrm>
-            <a:off x="731520" y="4187952"/>
-            <a:ext cx="457200" cy="548640"/>
+            <a:endParaRPr lang="en-US" sz="1300" dirty="0"/>
+          </a:p>
+        </p:txBody>
+      </p:sp>
+      <p:sp>
+        <p:nvSpPr>
+          <p:cNvPr id="17" name="Shape 14"/>
+          <p:cNvSpPr/>
+          <p:nvPr/>
+        </p:nvSpPr>
+        <p:spPr>
+          <a:xfrm>
+            <a:off x="731520" y="4023360"/>
+            <a:ext cx="7680960" cy="548640"/>
           </a:xfrm>
           <a:prstGeom prst="roundRect">
             <a:avLst>
-              <a:gd name="adj" fmla="val 50000"/>
+              <a:gd name="adj" fmla="val 13333"/>
             </a:avLst>
           </a:prstGeom>
           <a:solidFill>
-            <a:srgbClr val="00BFA6"/>
+            <a:srgbClr val="0F1419"/>
+          </a:solidFill>
+          <a:ln/>
+        </p:spPr>
+      </p:sp>
+      <p:sp>
+        <p:nvSpPr>
+          <p:cNvPr id="18" name="Text 15"/>
+          <p:cNvSpPr txBox="1"/>
+          <p:nvPr/>
+        </p:nvSpPr>
+        <p:spPr>
+          <a:xfrm>
+            <a:off x="914400" y="4023360"/>
+            <a:ext cx="411480" cy="548640"/>
+          </a:xfrm>
+          <a:prstGeom prst="roundRect">
+            <a:avLst>
+              <a:gd name="adj" fmla="val 48889"/>
+            </a:avLst>
+          </a:prstGeom>
+          <a:solidFill>
+            <a:srgbClr val="EC4899"/>
           </a:solidFill>
           <a:ln/>
         </p:spPr>
@@ -6385,7 +9854,7 @@
               <a:buNone/>
             </a:pPr>
             <a:r>
-              <a:rPr lang="en-US" sz="1600" b="1" dirty="0">
+              <a:rPr lang="en-US" sz="1500" b="1" dirty="0">
                 <a:solidFill>
                   <a:srgbClr val="0F1419"/>
                 </a:solidFill>
@@ -6395,20 +9864,20 @@
               </a:rPr>
               <a:t>5</a:t>
             </a:r>
-            <a:endParaRPr lang="en-US" sz="1600" dirty="0"/>
-          </a:p>
-        </p:txBody>
-      </p:sp>
-      <p:sp>
-        <p:nvSpPr>
-          <p:cNvPr id="13" name="Text 11"/>
+            <a:endParaRPr lang="en-US" sz="1500" dirty="0"/>
+          </a:p>
+        </p:txBody>
+      </p:sp>
+      <p:sp>
+        <p:nvSpPr>
+          <p:cNvPr id="19" name="Text 16"/>
           <p:cNvSpPr txBox="1"/>
           <p:nvPr/>
         </p:nvSpPr>
         <p:spPr>
           <a:xfrm>
-            <a:off x="1371600" y="4187952"/>
-            <a:ext cx="7040880" cy="548640"/>
+            <a:off x="1508760" y="4023360"/>
+            <a:ext cx="6766560" cy="548640"/>
           </a:xfrm>
           <a:prstGeom prst="rect">
             <a:avLst/>
@@ -6424,7 +9893,7 @@
               <a:buNone/>
             </a:pPr>
             <a:r>
-              <a:rPr lang="en-US" sz="1400" dirty="0">
+              <a:rPr lang="en-US" sz="1300" dirty="0">
                 <a:solidFill>
                   <a:srgbClr val="FFFFFF"/>
                 </a:solidFill>
@@ -6434,7 +9903,7 @@
               </a:rPr>
               <a:t>Renseignez votre adresse de portefeuille USDT (réseau TRC20 recommandé)</a:t>
             </a:r>
-            <a:endParaRPr lang="en-US" sz="1400" dirty="0"/>
+            <a:endParaRPr lang="en-US" sz="1300" dirty="0"/>
           </a:p>
         </p:txBody>
       </p:sp>
@@ -6478,12 +9947,12 @@
         </p:nvSpPr>
         <p:spPr>
           <a:xfrm>
-            <a:off x="548640" y="731520"/>
-            <a:ext cx="8046720" cy="3657600"/>
+            <a:off x="548640" y="548640"/>
+            <a:ext cx="8046720" cy="3840480"/>
           </a:xfrm>
           <a:prstGeom prst="roundRect">
             <a:avLst>
-              <a:gd name="adj" fmla="val 3750"/>
+              <a:gd name="adj" fmla="val 3571"/>
             </a:avLst>
           </a:prstGeom>
           <a:solidFill>
@@ -6494,14 +9963,58 @@
       </p:sp>
       <p:sp>
         <p:nvSpPr>
-          <p:cNvPr id="3" name="Text 1"/>
+          <p:cNvPr id="3" name="Shape 1"/>
+          <p:cNvSpPr/>
+          <p:nvPr/>
+        </p:nvSpPr>
+        <p:spPr>
+          <a:xfrm>
+            <a:off x="548640" y="548640"/>
+            <a:ext cx="54864" cy="3840480"/>
+          </a:xfrm>
+          <a:prstGeom prst="rect">
+            <a:avLst/>
+          </a:prstGeom>
+          <a:solidFill>
+            <a:srgbClr val="EF4444"/>
+          </a:solidFill>
+          <a:ln/>
+        </p:spPr>
+      </p:sp>
+      <p:pic>
+        <p:nvPicPr>
+          <p:cNvPr id="4" name="Image 0" descr="preencoded.png">    </p:cNvPr>
+          <p:cNvPicPr>
+            <a:picLocks noChangeAspect="1"/>
+          </p:cNvPicPr>
+          <p:nvPr/>
+        </p:nvPicPr>
+        <p:blipFill>
+          <a:blip r:embed="rId1"/>
+          <a:stretch>
+            <a:fillRect/>
+          </a:stretch>
+        </p:blipFill>
+        <p:spPr>
+          <a:xfrm>
+            <a:off x="914400" y="777240"/>
+            <a:ext cx="548640" cy="548640"/>
+          </a:xfrm>
+          <a:prstGeom prst="rect">
+            <a:avLst/>
+          </a:prstGeom>
+        </p:spPr>
+      </p:pic>
+      <p:sp>
+        <p:nvSpPr>
+          <p:cNvPr id="5" name="Text 2"/>
           <p:cNvSpPr txBox="1"/>
           <p:nvPr/>
         </p:nvSpPr>
         <p:spPr>
           <a:xfrm>
-            <a:off x="822960" y="914400"/>
-            <a:ext cx="2743200" cy="411480"/>
+            <a:off x="1600200" y="777240"/>
+            <a:ext cx="2743200" cy="320040"/>
           </a:xfrm>
           <a:prstGeom prst="rect">
             <a:avLst/>
@@ -6517,7 +10030,7 @@
               <a:buNone/>
             </a:pPr>
             <a:r>
-              <a:rPr lang="en-US" sz="1400" b="1" spc="300" kern="0" dirty="0">
+              <a:rPr lang="en-US" sz="1200" b="1" spc="300" kern="0" dirty="0">
                 <a:solidFill>
                   <a:srgbClr val="EF4444"/>
                 </a:solidFill>
@@ -6527,20 +10040,20 @@
               </a:rPr>
               <a:t>ATTENTION</a:t>
             </a:r>
-            <a:endParaRPr lang="en-US" sz="1400" dirty="0"/>
-          </a:p>
-        </p:txBody>
-      </p:sp>
-      <p:sp>
-        <p:nvSpPr>
-          <p:cNvPr id="4" name="Text 2"/>
+            <a:endParaRPr lang="en-US" sz="1200" dirty="0"/>
+          </a:p>
+        </p:txBody>
+      </p:sp>
+      <p:sp>
+        <p:nvSpPr>
+          <p:cNvPr id="6" name="Text 3"/>
           <p:cNvSpPr txBox="1"/>
           <p:nvPr/>
         </p:nvSpPr>
         <p:spPr>
           <a:xfrm>
-            <a:off x="822960" y="1371600"/>
-            <a:ext cx="7498080" cy="2194560"/>
+            <a:off x="914400" y="1371600"/>
+            <a:ext cx="7406640" cy="2286000"/>
           </a:xfrm>
           <a:prstGeom prst="rect">
             <a:avLst/>
@@ -6602,35 +10115,105 @@
           <a:chExt cx="0" cy="0"/>
         </a:xfrm>
       </p:grpSpPr>
-      <p:sp>
-        <p:nvSpPr>
-          <p:cNvPr id="2" name="Shape 0"/>
+      <p:pic>
+        <p:nvPicPr>
+          <p:cNvPr id="2" name="Image 0" descr="preencoded.png">    </p:cNvPr>
+          <p:cNvPicPr>
+            <a:picLocks noChangeAspect="1"/>
+          </p:cNvPicPr>
+          <p:nvPr/>
+        </p:nvPicPr>
+        <p:blipFill>
+          <a:blip r:embed="rId1"/>
+          <a:stretch>
+            <a:fillRect/>
+          </a:stretch>
+        </p:blipFill>
+        <p:spPr>
+          <a:xfrm>
+            <a:off x="7315200" y="548640"/>
+            <a:ext cx="1280160" cy="1280160"/>
+          </a:xfrm>
+          <a:prstGeom prst="rect">
+            <a:avLst/>
+          </a:prstGeom>
+        </p:spPr>
+      </p:pic>
+      <p:pic>
+        <p:nvPicPr>
+          <p:cNvPr id="3" name="Image 1" descr="preencoded.png">    </p:cNvPr>
+          <p:cNvPicPr>
+            <a:picLocks noChangeAspect="1"/>
+          </p:cNvPicPr>
+          <p:nvPr/>
+        </p:nvPicPr>
+        <p:blipFill>
+          <a:blip r:embed="rId2"/>
+          <a:stretch>
+            <a:fillRect/>
+          </a:stretch>
+        </p:blipFill>
+        <p:spPr>
+          <a:xfrm>
+            <a:off x="7772400" y="2011680"/>
+            <a:ext cx="822960" cy="822960"/>
+          </a:xfrm>
+          <a:prstGeom prst="rect">
+            <a:avLst/>
+          </a:prstGeom>
+        </p:spPr>
+      </p:pic>
+      <p:sp>
+        <p:nvSpPr>
+          <p:cNvPr id="4" name="Shape 0"/>
           <p:cNvSpPr/>
           <p:nvPr/>
         </p:nvSpPr>
         <p:spPr>
           <a:xfrm>
-            <a:off x="548640" y="914400"/>
-            <a:ext cx="45720" cy="2560320"/>
-          </a:xfrm>
-          <a:prstGeom prst="rect">
+            <a:off x="6583680" y="-274320"/>
+            <a:ext cx="3200400" cy="3200400"/>
+          </a:xfrm>
+          <a:prstGeom prst="ellipse">
             <a:avLst/>
           </a:prstGeom>
           <a:solidFill>
-            <a:srgbClr val="00BFA6"/>
+            <a:srgbClr val="EC4899">
+              <a:alpha val="6000"/>
+            </a:srgbClr>
           </a:solidFill>
           <a:ln/>
         </p:spPr>
       </p:sp>
       <p:sp>
         <p:nvSpPr>
-          <p:cNvPr id="3" name="Text 1"/>
+          <p:cNvPr id="5" name="Shape 1"/>
+          <p:cNvSpPr/>
+          <p:nvPr/>
+        </p:nvSpPr>
+        <p:spPr>
+          <a:xfrm>
+            <a:off x="731520" y="914400"/>
+            <a:ext cx="45720" cy="2194560"/>
+          </a:xfrm>
+          <a:prstGeom prst="rect">
+            <a:avLst/>
+          </a:prstGeom>
+          <a:solidFill>
+            <a:srgbClr val="EC4899"/>
+          </a:solidFill>
+          <a:ln/>
+        </p:spPr>
+      </p:sp>
+      <p:sp>
+        <p:nvSpPr>
+          <p:cNvPr id="6" name="Text 2"/>
           <p:cNvSpPr txBox="1"/>
           <p:nvPr/>
         </p:nvSpPr>
         <p:spPr>
           <a:xfrm>
-            <a:off x="822960" y="1097280"/>
+            <a:off x="960120" y="914400"/>
             <a:ext cx="2743200" cy="365760"/>
           </a:xfrm>
           <a:prstGeom prst="rect">
@@ -6649,13 +10232,13 @@
             <a:r>
               <a:rPr lang="en-US" sz="1200" b="1" spc="200" kern="0" dirty="0">
                 <a:solidFill>
-                  <a:srgbClr val="00BFA6"/>
-                </a:solidFill>
-                <a:latin typeface="Calibri" pitchFamily="34" charset="0"/>
-                <a:ea typeface="Calibri" pitchFamily="34" charset="-122"/>
-                <a:cs typeface="Calibri" pitchFamily="34" charset="-120"/>
-              </a:rPr>
-              <a:t>Lecon 2 / 4</a:t>
+                  <a:srgbClr val="EC4899"/>
+                </a:solidFill>
+                <a:latin typeface="Calibri" pitchFamily="34" charset="0"/>
+                <a:ea typeface="Calibri" pitchFamily="34" charset="-122"/>
+                <a:cs typeface="Calibri" pitchFamily="34" charset="-120"/>
+              </a:rPr>
+              <a:t>Leçon 2 / 4</a:t>
             </a:r>
             <a:endParaRPr lang="en-US" sz="1200" dirty="0"/>
           </a:p>
@@ -6663,14 +10246,14 @@
       </p:sp>
       <p:sp>
         <p:nvSpPr>
-          <p:cNvPr id="4" name="Text 2"/>
+          <p:cNvPr id="7" name="Text 3"/>
           <p:cNvSpPr txBox="1"/>
           <p:nvPr/>
         </p:nvSpPr>
         <p:spPr>
           <a:xfrm>
-            <a:off x="822960" y="1645920"/>
-            <a:ext cx="7498080" cy="1280160"/>
+            <a:off x="960120" y="1371600"/>
+            <a:ext cx="6217920" cy="1463040"/>
           </a:xfrm>
           <a:prstGeom prst="rect">
             <a:avLst/>
@@ -6686,7 +10269,7 @@
               <a:buNone/>
             </a:pPr>
             <a:r>
-              <a:rPr lang="en-US" sz="3000" b="1" dirty="0">
+              <a:rPr lang="en-US" sz="2800" b="1" dirty="0">
                 <a:solidFill>
                   <a:srgbClr val="FFFFFF"/>
                 </a:solidFill>
@@ -6696,19 +10279,19 @@
               </a:rPr>
               <a:t>L'histoire de la monnaie en 10 minutes</a:t>
             </a:r>
-            <a:endParaRPr lang="en-US" sz="3000" dirty="0"/>
-          </a:p>
-        </p:txBody>
-      </p:sp>
-      <p:sp>
-        <p:nvSpPr>
-          <p:cNvPr id="5" name="Text 3"/>
+            <a:endParaRPr lang="en-US" sz="2800" dirty="0"/>
+          </a:p>
+        </p:txBody>
+      </p:sp>
+      <p:sp>
+        <p:nvSpPr>
+          <p:cNvPr id="8" name="Text 4"/>
           <p:cNvSpPr txBox="1"/>
           <p:nvPr/>
         </p:nvSpPr>
         <p:spPr>
           <a:xfrm>
-            <a:off x="822960" y="4206240"/>
+            <a:off x="960120" y="4114800"/>
             <a:ext cx="5486400" cy="320040"/>
           </a:xfrm>
           <a:prstGeom prst="rect">

--- a/public/course-materials/pptx/Module-03-Premiers-pas-pratiques.pptx
+++ b/public/course-materials/pptx/Module-03-Premiers-pas-pratiques.pptx
@@ -2637,7 +2637,7 @@
     <p:bg>
       <p:bgPr>
         <a:solidFill>
-          <a:srgbClr val="0F1419"/>
+          <a:srgbClr val="0F1214"/>
         </a:solidFill>
       </p:bgPr>
     </p:bg>
@@ -2670,7 +2670,7 @@
             <a:avLst/>
           </a:prstGeom>
           <a:solidFill>
-            <a:srgbClr val="EC4899">
+            <a:srgbClr val="3B968F">
               <a:alpha val="8000"/>
             </a:srgbClr>
           </a:solidFill>
@@ -2692,7 +2692,7 @@
             <a:avLst/>
           </a:prstGeom>
           <a:solidFill>
-            <a:srgbClr val="EC4899">
+            <a:srgbClr val="3B968F">
               <a:alpha val="5000"/>
             </a:srgbClr>
           </a:solidFill>
@@ -2714,7 +2714,7 @@
             <a:avLst/>
           </a:prstGeom>
           <a:solidFill>
-            <a:srgbClr val="EC4899"/>
+            <a:srgbClr val="3B968F"/>
           </a:solidFill>
           <a:ln/>
         </p:spPr>
@@ -2770,7 +2770,7 @@
             <a:r>
               <a:rPr lang="en-US" sz="1300" b="1" spc="400" kern="0" dirty="0">
                 <a:solidFill>
-                  <a:srgbClr val="EC4899"/>
+                  <a:srgbClr val="3B968F"/>
                 </a:solidFill>
                 <a:latin typeface="Calibri" pitchFamily="34" charset="0"/>
                 <a:ea typeface="Calibri" pitchFamily="34" charset="-122"/>
@@ -2836,7 +2836,7 @@
             <a:avLst/>
           </a:prstGeom>
           <a:solidFill>
-            <a:srgbClr val="EC4899"/>
+            <a:srgbClr val="3B968F"/>
           </a:solidFill>
           <a:ln/>
         </p:spPr>
@@ -2868,7 +2868,7 @@
             <a:r>
               <a:rPr lang="en-US" sz="1100" spc="300" kern="0" dirty="0">
                 <a:solidFill>
-                  <a:srgbClr val="64748B"/>
+                  <a:srgbClr val="5B6672"/>
                 </a:solidFill>
                 <a:latin typeface="Calibri" pitchFamily="34" charset="0"/>
                 <a:ea typeface="Calibri" pitchFamily="34" charset="-122"/>
@@ -2907,7 +2907,7 @@
             <a:r>
               <a:rPr lang="en-US" sz="1100" dirty="0">
                 <a:solidFill>
-                  <a:srgbClr val="94A3B8"/>
+                  <a:srgbClr val="8994A0"/>
                 </a:solidFill>
                 <a:latin typeface="Calibri" pitchFamily="34" charset="0"/>
                 <a:ea typeface="Calibri" pitchFamily="34" charset="-122"/>
@@ -2933,7 +2933,7 @@
     <p:bg>
       <p:bgPr>
         <a:solidFill>
-          <a:srgbClr val="0F1419"/>
+          <a:srgbClr val="0F1214"/>
         </a:solidFill>
       </p:bgPr>
     </p:bg>
@@ -2966,7 +2966,7 @@
             <a:avLst/>
           </a:prstGeom>
           <a:solidFill>
-            <a:srgbClr val="EC4899">
+            <a:srgbClr val="3B968F">
               <a:alpha val="12000"/>
             </a:srgbClr>
           </a:solidFill>
@@ -3193,7 +3193,7 @@
             <a:r>
               <a:rPr lang="en-US" sz="900" dirty="0">
                 <a:solidFill>
-                  <a:srgbClr val="64748B"/>
+                  <a:srgbClr val="5B6672"/>
                 </a:solidFill>
                 <a:latin typeface="Calibri" pitchFamily="34" charset="0"/>
                 <a:ea typeface="Calibri" pitchFamily="34" charset="-122"/>
@@ -3219,7 +3219,7 @@
     <p:bg>
       <p:bgPr>
         <a:solidFill>
-          <a:srgbClr val="0F1419"/>
+          <a:srgbClr val="0F1214"/>
         </a:solidFill>
       </p:bgPr>
     </p:bg>
@@ -3360,7 +3360,7 @@
             </a:avLst>
           </a:prstGeom>
           <a:solidFill>
-            <a:srgbClr val="1A2332"/>
+            <a:srgbClr val="1A2026"/>
           </a:solidFill>
           <a:ln/>
         </p:spPr>
@@ -3445,7 +3445,7 @@
             </a:avLst>
           </a:prstGeom>
           <a:solidFill>
-            <a:srgbClr val="1A2332"/>
+            <a:srgbClr val="1A2026"/>
           </a:solidFill>
           <a:ln/>
         </p:spPr>
@@ -3530,7 +3530,7 @@
             </a:avLst>
           </a:prstGeom>
           <a:solidFill>
-            <a:srgbClr val="1A2332"/>
+            <a:srgbClr val="1A2026"/>
           </a:solidFill>
           <a:ln/>
         </p:spPr>
@@ -3612,7 +3612,7 @@
     <p:bg>
       <p:bgPr>
         <a:solidFill>
-          <a:srgbClr val="0F1419"/>
+          <a:srgbClr val="0F1214"/>
         </a:solidFill>
       </p:bgPr>
     </p:bg>
@@ -3647,7 +3647,7 @@
             </a:avLst>
           </a:prstGeom>
           <a:solidFill>
-            <a:srgbClr val="1A2332"/>
+            <a:srgbClr val="1A2026"/>
           </a:solidFill>
           <a:ln/>
         </p:spPr>
@@ -3732,7 +3732,7 @@
             </a:avLst>
           </a:prstGeom>
           <a:solidFill>
-            <a:srgbClr val="1A2332"/>
+            <a:srgbClr val="1A2026"/>
           </a:solidFill>
           <a:ln/>
         </p:spPr>
@@ -3817,7 +3817,7 @@
             </a:avLst>
           </a:prstGeom>
           <a:solidFill>
-            <a:srgbClr val="1A2332"/>
+            <a:srgbClr val="1A2026"/>
           </a:solidFill>
           <a:ln/>
         </p:spPr>
@@ -3912,7 +3912,7 @@
             <a:r>
               <a:rPr lang="en-US" sz="900" dirty="0">
                 <a:solidFill>
-                  <a:srgbClr val="94A3B8"/>
+                  <a:srgbClr val="8994A0"/>
                 </a:solidFill>
                 <a:latin typeface="Calibri" pitchFamily="34" charset="0"/>
                 <a:ea typeface="Calibri" pitchFamily="34" charset="-122"/>
@@ -3938,7 +3938,7 @@
     <p:bg>
       <p:bgPr>
         <a:solidFill>
-          <a:srgbClr val="0D2137"/>
+          <a:srgbClr val="12181D"/>
         </a:solidFill>
       </p:bgPr>
     </p:bg>
@@ -4019,7 +4019,7 @@
             <a:avLst/>
           </a:prstGeom>
           <a:solidFill>
-            <a:srgbClr val="EC4899">
+            <a:srgbClr val="3B968F">
               <a:alpha val="6000"/>
             </a:srgbClr>
           </a:solidFill>
@@ -4041,7 +4041,7 @@
             <a:avLst/>
           </a:prstGeom>
           <a:solidFill>
-            <a:srgbClr val="EC4899"/>
+            <a:srgbClr val="3B968F"/>
           </a:solidFill>
           <a:ln/>
         </p:spPr>
@@ -4073,7 +4073,7 @@
             <a:r>
               <a:rPr lang="en-US" sz="1200" b="1" spc="200" kern="0" dirty="0">
                 <a:solidFill>
-                  <a:srgbClr val="EC4899"/>
+                  <a:srgbClr val="3B968F"/>
                 </a:solidFill>
                 <a:latin typeface="Calibri" pitchFamily="34" charset="0"/>
                 <a:ea typeface="Calibri" pitchFamily="34" charset="-122"/>
@@ -4151,7 +4151,7 @@
             <a:r>
               <a:rPr lang="en-US" sz="1100" dirty="0">
                 <a:solidFill>
-                  <a:srgbClr val="64748B"/>
+                  <a:srgbClr val="5B6672"/>
                 </a:solidFill>
                 <a:latin typeface="Calibri" pitchFamily="34" charset="0"/>
                 <a:ea typeface="Calibri" pitchFamily="34" charset="-122"/>
@@ -4177,7 +4177,7 @@
     <p:bg>
       <p:bgPr>
         <a:solidFill>
-          <a:srgbClr val="0F1419"/>
+          <a:srgbClr val="0F1214"/>
         </a:solidFill>
       </p:bgPr>
     </p:bg>
@@ -4210,7 +4210,7 @@
             <a:avLst/>
           </a:prstGeom>
           <a:solidFill>
-            <a:srgbClr val="EC4899">
+            <a:srgbClr val="3B968F">
               <a:alpha val="12000"/>
             </a:srgbClr>
           </a:solidFill>
@@ -4437,7 +4437,7 @@
             <a:r>
               <a:rPr lang="en-US" sz="900" dirty="0">
                 <a:solidFill>
-                  <a:srgbClr val="64748B"/>
+                  <a:srgbClr val="5B6672"/>
                 </a:solidFill>
                 <a:latin typeface="Calibri" pitchFamily="34" charset="0"/>
                 <a:ea typeface="Calibri" pitchFamily="34" charset="-122"/>
@@ -4463,7 +4463,7 @@
     <p:bg>
       <p:bgPr>
         <a:solidFill>
-          <a:srgbClr val="0F1419"/>
+          <a:srgbClr val="0F1214"/>
         </a:solidFill>
       </p:bgPr>
     </p:bg>
@@ -4604,7 +4604,7 @@
             </a:avLst>
           </a:prstGeom>
           <a:solidFill>
-            <a:srgbClr val="1A2332"/>
+            <a:srgbClr val="1A2026"/>
           </a:solidFill>
           <a:ln/>
         </p:spPr>
@@ -4689,7 +4689,7 @@
             </a:avLst>
           </a:prstGeom>
           <a:solidFill>
-            <a:srgbClr val="1A2332"/>
+            <a:srgbClr val="1A2026"/>
           </a:solidFill>
           <a:ln/>
         </p:spPr>
@@ -4774,7 +4774,7 @@
             </a:avLst>
           </a:prstGeom>
           <a:solidFill>
-            <a:srgbClr val="1A2332"/>
+            <a:srgbClr val="1A2026"/>
           </a:solidFill>
           <a:ln/>
         </p:spPr>
@@ -4856,7 +4856,7 @@
     <p:bg>
       <p:bgPr>
         <a:solidFill>
-          <a:srgbClr val="0F1419"/>
+          <a:srgbClr val="0F1214"/>
         </a:solidFill>
       </p:bgPr>
     </p:bg>
@@ -4891,7 +4891,7 @@
             </a:avLst>
           </a:prstGeom>
           <a:solidFill>
-            <a:srgbClr val="1A2332"/>
+            <a:srgbClr val="1A2026"/>
           </a:solidFill>
           <a:ln/>
         </p:spPr>
@@ -4976,7 +4976,7 @@
             </a:avLst>
           </a:prstGeom>
           <a:solidFill>
-            <a:srgbClr val="1A2332"/>
+            <a:srgbClr val="1A2026"/>
           </a:solidFill>
           <a:ln/>
         </p:spPr>
@@ -5061,7 +5061,7 @@
             </a:avLst>
           </a:prstGeom>
           <a:solidFill>
-            <a:srgbClr val="1A2332"/>
+            <a:srgbClr val="1A2026"/>
           </a:solidFill>
           <a:ln/>
         </p:spPr>
@@ -5146,7 +5146,7 @@
             </a:avLst>
           </a:prstGeom>
           <a:solidFill>
-            <a:srgbClr val="1A2332"/>
+            <a:srgbClr val="1A2026"/>
           </a:solidFill>
           <a:ln/>
         </p:spPr>
@@ -5231,7 +5231,7 @@
             </a:avLst>
           </a:prstGeom>
           <a:solidFill>
-            <a:srgbClr val="1A2332"/>
+            <a:srgbClr val="1A2026"/>
           </a:solidFill>
           <a:ln/>
         </p:spPr>
@@ -5326,7 +5326,7 @@
             <a:r>
               <a:rPr lang="en-US" sz="900" dirty="0">
                 <a:solidFill>
-                  <a:srgbClr val="94A3B8"/>
+                  <a:srgbClr val="8994A0"/>
                 </a:solidFill>
                 <a:latin typeface="Calibri" pitchFamily="34" charset="0"/>
                 <a:ea typeface="Calibri" pitchFamily="34" charset="-122"/>
@@ -5355,7 +5355,7 @@
             </a:avLst>
           </a:prstGeom>
           <a:solidFill>
-            <a:srgbClr val="1A2332"/>
+            <a:srgbClr val="1A2026"/>
           </a:solidFill>
           <a:ln/>
         </p:spPr>
@@ -5450,7 +5450,7 @@
             <a:r>
               <a:rPr lang="en-US" sz="900" dirty="0">
                 <a:solidFill>
-                  <a:srgbClr val="94A3B8"/>
+                  <a:srgbClr val="8994A0"/>
                 </a:solidFill>
                 <a:latin typeface="Calibri" pitchFamily="34" charset="0"/>
                 <a:ea typeface="Calibri" pitchFamily="34" charset="-122"/>
@@ -5476,7 +5476,7 @@
     <p:bg>
       <p:bgPr>
         <a:solidFill>
-          <a:srgbClr val="0D2137"/>
+          <a:srgbClr val="12181D"/>
         </a:solidFill>
       </p:bgPr>
     </p:bg>
@@ -5557,7 +5557,7 @@
             <a:avLst/>
           </a:prstGeom>
           <a:solidFill>
-            <a:srgbClr val="EC4899">
+            <a:srgbClr val="3B968F">
               <a:alpha val="6000"/>
             </a:srgbClr>
           </a:solidFill>
@@ -5579,7 +5579,7 @@
             <a:avLst/>
           </a:prstGeom>
           <a:solidFill>
-            <a:srgbClr val="EC4899"/>
+            <a:srgbClr val="3B968F"/>
           </a:solidFill>
           <a:ln/>
         </p:spPr>
@@ -5611,7 +5611,7 @@
             <a:r>
               <a:rPr lang="en-US" sz="1200" b="1" spc="200" kern="0" dirty="0">
                 <a:solidFill>
-                  <a:srgbClr val="EC4899"/>
+                  <a:srgbClr val="3B968F"/>
                 </a:solidFill>
                 <a:latin typeface="Calibri" pitchFamily="34" charset="0"/>
                 <a:ea typeface="Calibri" pitchFamily="34" charset="-122"/>
@@ -5689,7 +5689,7 @@
             <a:r>
               <a:rPr lang="en-US" sz="1100" dirty="0">
                 <a:solidFill>
-                  <a:srgbClr val="64748B"/>
+                  <a:srgbClr val="5B6672"/>
                 </a:solidFill>
                 <a:latin typeface="Calibri" pitchFamily="34" charset="0"/>
                 <a:ea typeface="Calibri" pitchFamily="34" charset="-122"/>
@@ -5715,7 +5715,7 @@
     <p:bg>
       <p:bgPr>
         <a:solidFill>
-          <a:srgbClr val="0F1419"/>
+          <a:srgbClr val="0F1214"/>
         </a:solidFill>
       </p:bgPr>
     </p:bg>
@@ -5748,7 +5748,7 @@
             <a:avLst/>
           </a:prstGeom>
           <a:solidFill>
-            <a:srgbClr val="EC4899">
+            <a:srgbClr val="3B968F">
               <a:alpha val="12000"/>
             </a:srgbClr>
           </a:solidFill>
@@ -5975,7 +5975,7 @@
             <a:r>
               <a:rPr lang="en-US" sz="900" dirty="0">
                 <a:solidFill>
-                  <a:srgbClr val="64748B"/>
+                  <a:srgbClr val="5B6672"/>
                 </a:solidFill>
                 <a:latin typeface="Calibri" pitchFamily="34" charset="0"/>
                 <a:ea typeface="Calibri" pitchFamily="34" charset="-122"/>
@@ -6001,7 +6001,7 @@
     <p:bg>
       <p:bgPr>
         <a:solidFill>
-          <a:srgbClr val="0F1419"/>
+          <a:srgbClr val="0F1214"/>
         </a:solidFill>
       </p:bgPr>
     </p:bg>
@@ -6121,7 +6121,7 @@
             </a:avLst>
           </a:prstGeom>
           <a:solidFill>
-            <a:srgbClr val="1A2332"/>
+            <a:srgbClr val="1A2026"/>
           </a:solidFill>
           <a:ln/>
         </p:spPr>
@@ -6206,7 +6206,7 @@
             </a:avLst>
           </a:prstGeom>
           <a:solidFill>
-            <a:srgbClr val="1A2332"/>
+            <a:srgbClr val="1A2026"/>
           </a:solidFill>
           <a:ln/>
         </p:spPr>
@@ -6288,7 +6288,7 @@
     <p:bg>
       <p:bgPr>
         <a:solidFill>
-          <a:srgbClr val="0F1419"/>
+          <a:srgbClr val="0F1214"/>
         </a:solidFill>
       </p:bgPr>
     </p:bg>
@@ -6333,7 +6333,7 @@
             <a:r>
               <a:rPr lang="en-US" sz="1200" b="1" spc="300" kern="0" dirty="0">
                 <a:solidFill>
-                  <a:srgbClr val="EC4899"/>
+                  <a:srgbClr val="3B968F"/>
                 </a:solidFill>
                 <a:latin typeface="Calibri" pitchFamily="34" charset="0"/>
                 <a:ea typeface="Calibri" pitchFamily="34" charset="-122"/>
@@ -6401,7 +6401,7 @@
             </a:avLst>
           </a:prstGeom>
           <a:solidFill>
-            <a:srgbClr val="1A2332"/>
+            <a:srgbClr val="1A2026"/>
           </a:solidFill>
           <a:ln/>
         </p:spPr>
@@ -6433,7 +6433,7 @@
             <a:r>
               <a:rPr lang="en-US" sz="1300" b="1" dirty="0">
                 <a:solidFill>
-                  <a:srgbClr val="EC4899"/>
+                  <a:srgbClr val="3B968F"/>
                 </a:solidFill>
                 <a:latin typeface="Calibri" pitchFamily="34" charset="0"/>
                 <a:ea typeface="Calibri" pitchFamily="34" charset="-122"/>
@@ -6525,7 +6525,7 @@
             </a:avLst>
           </a:prstGeom>
           <a:solidFill>
-            <a:srgbClr val="1A2332"/>
+            <a:srgbClr val="1A2026"/>
           </a:solidFill>
           <a:ln/>
         </p:spPr>
@@ -6557,7 +6557,7 @@
             <a:r>
               <a:rPr lang="en-US" sz="1300" b="1" dirty="0">
                 <a:solidFill>
-                  <a:srgbClr val="EC4899"/>
+                  <a:srgbClr val="3B968F"/>
                 </a:solidFill>
                 <a:latin typeface="Calibri" pitchFamily="34" charset="0"/>
                 <a:ea typeface="Calibri" pitchFamily="34" charset="-122"/>
@@ -6649,7 +6649,7 @@
             </a:avLst>
           </a:prstGeom>
           <a:solidFill>
-            <a:srgbClr val="1A2332"/>
+            <a:srgbClr val="1A2026"/>
           </a:solidFill>
           <a:ln/>
         </p:spPr>
@@ -6681,7 +6681,7 @@
             <a:r>
               <a:rPr lang="en-US" sz="1300" b="1" dirty="0">
                 <a:solidFill>
-                  <a:srgbClr val="EC4899"/>
+                  <a:srgbClr val="3B968F"/>
                 </a:solidFill>
                 <a:latin typeface="Calibri" pitchFamily="34" charset="0"/>
                 <a:ea typeface="Calibri" pitchFamily="34" charset="-122"/>
@@ -6773,7 +6773,7 @@
             </a:avLst>
           </a:prstGeom>
           <a:solidFill>
-            <a:srgbClr val="1A2332"/>
+            <a:srgbClr val="1A2026"/>
           </a:solidFill>
           <a:ln/>
         </p:spPr>
@@ -6805,7 +6805,7 @@
             <a:r>
               <a:rPr lang="en-US" sz="1300" b="1" dirty="0">
                 <a:solidFill>
-                  <a:srgbClr val="EC4899"/>
+                  <a:srgbClr val="3B968F"/>
                 </a:solidFill>
                 <a:latin typeface="Calibri" pitchFamily="34" charset="0"/>
                 <a:ea typeface="Calibri" pitchFamily="34" charset="-122"/>
@@ -6894,7 +6894,7 @@
     <p:bg>
       <p:bgPr>
         <a:solidFill>
-          <a:srgbClr val="1A2332"/>
+          <a:srgbClr val="1A2026"/>
         </a:solidFill>
       </p:bgPr>
     </p:bg>
@@ -6963,7 +6963,7 @@
             <a:r>
               <a:rPr lang="en-US" sz="1200" b="1" spc="300" kern="0" dirty="0">
                 <a:solidFill>
-                  <a:srgbClr val="F59E0B"/>
+                  <a:srgbClr val="5BC1B8"/>
                 </a:solidFill>
                 <a:latin typeface="Calibri" pitchFamily="34" charset="0"/>
                 <a:ea typeface="Calibri" pitchFamily="34" charset="-122"/>
@@ -7031,7 +7031,7 @@
             </a:avLst>
           </a:prstGeom>
           <a:solidFill>
-            <a:srgbClr val="0F1419"/>
+            <a:srgbClr val="0F1214"/>
           </a:solidFill>
           <a:ln/>
         </p:spPr>
@@ -7053,7 +7053,7 @@
             </a:avLst>
           </a:prstGeom>
           <a:solidFill>
-            <a:srgbClr val="EC4899"/>
+            <a:srgbClr val="3B968F"/>
           </a:solidFill>
           <a:ln/>
         </p:spPr>
@@ -7067,7 +7067,7 @@
             <a:r>
               <a:rPr lang="en-US" sz="1500" b="1" dirty="0">
                 <a:solidFill>
-                  <a:srgbClr val="0F1419"/>
+                  <a:srgbClr val="0F1214"/>
                 </a:solidFill>
                 <a:latin typeface="Calibri" pitchFamily="34" charset="0"/>
                 <a:ea typeface="Calibri" pitchFamily="34" charset="-122"/>
@@ -7135,7 +7135,7 @@
             </a:avLst>
           </a:prstGeom>
           <a:solidFill>
-            <a:srgbClr val="0F1419"/>
+            <a:srgbClr val="0F1214"/>
           </a:solidFill>
           <a:ln/>
         </p:spPr>
@@ -7157,7 +7157,7 @@
             </a:avLst>
           </a:prstGeom>
           <a:solidFill>
-            <a:srgbClr val="EC4899"/>
+            <a:srgbClr val="3B968F"/>
           </a:solidFill>
           <a:ln/>
         </p:spPr>
@@ -7171,7 +7171,7 @@
             <a:r>
               <a:rPr lang="en-US" sz="1500" b="1" dirty="0">
                 <a:solidFill>
-                  <a:srgbClr val="0F1419"/>
+                  <a:srgbClr val="0F1214"/>
                 </a:solidFill>
                 <a:latin typeface="Calibri" pitchFamily="34" charset="0"/>
                 <a:ea typeface="Calibri" pitchFamily="34" charset="-122"/>
@@ -7239,7 +7239,7 @@
             </a:avLst>
           </a:prstGeom>
           <a:solidFill>
-            <a:srgbClr val="0F1419"/>
+            <a:srgbClr val="0F1214"/>
           </a:solidFill>
           <a:ln/>
         </p:spPr>
@@ -7261,7 +7261,7 @@
             </a:avLst>
           </a:prstGeom>
           <a:solidFill>
-            <a:srgbClr val="EC4899"/>
+            <a:srgbClr val="3B968F"/>
           </a:solidFill>
           <a:ln/>
         </p:spPr>
@@ -7275,7 +7275,7 @@
             <a:r>
               <a:rPr lang="en-US" sz="1500" b="1" dirty="0">
                 <a:solidFill>
-                  <a:srgbClr val="0F1419"/>
+                  <a:srgbClr val="0F1214"/>
                 </a:solidFill>
                 <a:latin typeface="Calibri" pitchFamily="34" charset="0"/>
                 <a:ea typeface="Calibri" pitchFamily="34" charset="-122"/>
@@ -7343,7 +7343,7 @@
             </a:avLst>
           </a:prstGeom>
           <a:solidFill>
-            <a:srgbClr val="0F1419"/>
+            <a:srgbClr val="0F1214"/>
           </a:solidFill>
           <a:ln/>
         </p:spPr>
@@ -7365,7 +7365,7 @@
             </a:avLst>
           </a:prstGeom>
           <a:solidFill>
-            <a:srgbClr val="EC4899"/>
+            <a:srgbClr val="3B968F"/>
           </a:solidFill>
           <a:ln/>
         </p:spPr>
@@ -7379,7 +7379,7 @@
             <a:r>
               <a:rPr lang="en-US" sz="1500" b="1" dirty="0">
                 <a:solidFill>
-                  <a:srgbClr val="0F1419"/>
+                  <a:srgbClr val="0F1214"/>
                 </a:solidFill>
                 <a:latin typeface="Calibri" pitchFamily="34" charset="0"/>
                 <a:ea typeface="Calibri" pitchFamily="34" charset="-122"/>
@@ -7447,7 +7447,7 @@
             </a:avLst>
           </a:prstGeom>
           <a:solidFill>
-            <a:srgbClr val="0F1419"/>
+            <a:srgbClr val="0F1214"/>
           </a:solidFill>
           <a:ln/>
         </p:spPr>
@@ -7469,7 +7469,7 @@
             </a:avLst>
           </a:prstGeom>
           <a:solidFill>
-            <a:srgbClr val="EC4899"/>
+            <a:srgbClr val="3B968F"/>
           </a:solidFill>
           <a:ln/>
         </p:spPr>
@@ -7483,7 +7483,7 @@
             <a:r>
               <a:rPr lang="en-US" sz="1500" b="1" dirty="0">
                 <a:solidFill>
-                  <a:srgbClr val="0F1419"/>
+                  <a:srgbClr val="0F1214"/>
                 </a:solidFill>
                 <a:latin typeface="Calibri" pitchFamily="34" charset="0"/>
                 <a:ea typeface="Calibri" pitchFamily="34" charset="-122"/>
@@ -7548,7 +7548,7 @@
     <p:bg>
       <p:bgPr>
         <a:solidFill>
-          <a:srgbClr val="0F1419"/>
+          <a:srgbClr val="0F1214"/>
         </a:solidFill>
       </p:bgPr>
     </p:bg>
@@ -7581,7 +7581,7 @@
             <a:avLst/>
           </a:prstGeom>
           <a:solidFill>
-            <a:srgbClr val="EC4899">
+            <a:srgbClr val="3B968F">
               <a:alpha val="6000"/>
             </a:srgbClr>
           </a:solidFill>
@@ -7678,7 +7678,7 @@
             <a:r>
               <a:rPr lang="en-US" sz="1300" dirty="0">
                 <a:solidFill>
-                  <a:srgbClr val="94A3B8"/>
+                  <a:srgbClr val="8994A0"/>
                 </a:solidFill>
                 <a:latin typeface="Calibri" pitchFamily="34" charset="0"/>
                 <a:ea typeface="Calibri" pitchFamily="34" charset="-122"/>
@@ -7705,7 +7705,7 @@
             <a:avLst/>
           </a:prstGeom>
           <a:solidFill>
-            <a:srgbClr val="EC4899"/>
+            <a:srgbClr val="3B968F"/>
           </a:solidFill>
           <a:ln/>
         </p:spPr>
@@ -7737,7 +7737,7 @@
             <a:r>
               <a:rPr lang="en-US" sz="1100" spc="300" kern="0" dirty="0">
                 <a:solidFill>
-                  <a:srgbClr val="64748B"/>
+                  <a:srgbClr val="5B6672"/>
                 </a:solidFill>
                 <a:latin typeface="Calibri" pitchFamily="34" charset="0"/>
                 <a:ea typeface="Calibri" pitchFamily="34" charset="-122"/>
@@ -7776,7 +7776,7 @@
             <a:r>
               <a:rPr lang="en-US" sz="1100" dirty="0">
                 <a:solidFill>
-                  <a:srgbClr val="009E8B"/>
+                  <a:srgbClr val="000000"/>
                 </a:solidFill>
                 <a:latin typeface="Calibri" pitchFamily="34" charset="0"/>
                 <a:ea typeface="Calibri" pitchFamily="34" charset="-122"/>
@@ -7802,7 +7802,7 @@
     <p:bg>
       <p:bgPr>
         <a:solidFill>
-          <a:srgbClr val="0D2137"/>
+          <a:srgbClr val="12181D"/>
         </a:solidFill>
       </p:bgPr>
     </p:bg>
@@ -7883,7 +7883,7 @@
             <a:avLst/>
           </a:prstGeom>
           <a:solidFill>
-            <a:srgbClr val="EC4899">
+            <a:srgbClr val="3B968F">
               <a:alpha val="6000"/>
             </a:srgbClr>
           </a:solidFill>
@@ -7905,7 +7905,7 @@
             <a:avLst/>
           </a:prstGeom>
           <a:solidFill>
-            <a:srgbClr val="EC4899"/>
+            <a:srgbClr val="3B968F"/>
           </a:solidFill>
           <a:ln/>
         </p:spPr>
@@ -7937,7 +7937,7 @@
             <a:r>
               <a:rPr lang="en-US" sz="1200" b="1" spc="200" kern="0" dirty="0">
                 <a:solidFill>
-                  <a:srgbClr val="EC4899"/>
+                  <a:srgbClr val="3B968F"/>
                 </a:solidFill>
                 <a:latin typeface="Calibri" pitchFamily="34" charset="0"/>
                 <a:ea typeface="Calibri" pitchFamily="34" charset="-122"/>
@@ -8015,7 +8015,7 @@
             <a:r>
               <a:rPr lang="en-US" sz="1100" dirty="0">
                 <a:solidFill>
-                  <a:srgbClr val="64748B"/>
+                  <a:srgbClr val="5B6672"/>
                 </a:solidFill>
                 <a:latin typeface="Calibri" pitchFamily="34" charset="0"/>
                 <a:ea typeface="Calibri" pitchFamily="34" charset="-122"/>
@@ -8041,7 +8041,7 @@
     <p:bg>
       <p:bgPr>
         <a:solidFill>
-          <a:srgbClr val="0F1419"/>
+          <a:srgbClr val="0F1214"/>
         </a:solidFill>
       </p:bgPr>
     </p:bg>
@@ -8074,7 +8074,7 @@
             <a:avLst/>
           </a:prstGeom>
           <a:solidFill>
-            <a:srgbClr val="EC4899">
+            <a:srgbClr val="3B968F">
               <a:alpha val="12000"/>
             </a:srgbClr>
           </a:solidFill>
@@ -8196,7 +8196,7 @@
             <a:r>
               <a:rPr lang="en-US" sz="900" dirty="0">
                 <a:solidFill>
-                  <a:srgbClr val="64748B"/>
+                  <a:srgbClr val="5B6672"/>
                 </a:solidFill>
                 <a:latin typeface="Calibri" pitchFamily="34" charset="0"/>
                 <a:ea typeface="Calibri" pitchFamily="34" charset="-122"/>
@@ -8222,7 +8222,7 @@
     <p:bg>
       <p:bgPr>
         <a:solidFill>
-          <a:srgbClr val="0F1419"/>
+          <a:srgbClr val="0F1214"/>
         </a:solidFill>
       </p:bgPr>
     </p:bg>
@@ -8267,7 +8267,7 @@
             <a:r>
               <a:rPr lang="en-US" sz="2000" b="1" dirty="0">
                 <a:solidFill>
-                  <a:srgbClr val="EC4899"/>
+                  <a:srgbClr val="3B968F"/>
                 </a:solidFill>
                 <a:latin typeface="Calibri" pitchFamily="34" charset="0"/>
                 <a:ea typeface="Calibri" pitchFamily="34" charset="-122"/>
@@ -8402,7 +8402,7 @@
             </a:avLst>
           </a:prstGeom>
           <a:solidFill>
-            <a:srgbClr val="1A2332"/>
+            <a:srgbClr val="1A2026"/>
           </a:solidFill>
           <a:ln/>
         </p:spPr>
@@ -8487,7 +8487,7 @@
             </a:avLst>
           </a:prstGeom>
           <a:solidFill>
-            <a:srgbClr val="1A2332"/>
+            <a:srgbClr val="1A2026"/>
           </a:solidFill>
           <a:ln/>
         </p:spPr>
@@ -8572,7 +8572,7 @@
             </a:avLst>
           </a:prstGeom>
           <a:solidFill>
-            <a:srgbClr val="1A2332"/>
+            <a:srgbClr val="1A2026"/>
           </a:solidFill>
           <a:ln/>
         </p:spPr>
@@ -8654,7 +8654,7 @@
     <p:bg>
       <p:bgPr>
         <a:solidFill>
-          <a:srgbClr val="0F1419"/>
+          <a:srgbClr val="0F1214"/>
         </a:solidFill>
       </p:bgPr>
     </p:bg>
@@ -8699,7 +8699,7 @@
             <a:r>
               <a:rPr lang="en-US" sz="2000" b="1" dirty="0">
                 <a:solidFill>
-                  <a:srgbClr val="EC4899"/>
+                  <a:srgbClr val="3B968F"/>
                 </a:solidFill>
                 <a:latin typeface="Calibri" pitchFamily="34" charset="0"/>
                 <a:ea typeface="Calibri" pitchFamily="34" charset="-122"/>
@@ -8728,7 +8728,7 @@
             </a:avLst>
           </a:prstGeom>
           <a:solidFill>
-            <a:srgbClr val="1A2332"/>
+            <a:srgbClr val="1A2026"/>
           </a:solidFill>
           <a:ln/>
         </p:spPr>
@@ -8813,7 +8813,7 @@
             </a:avLst>
           </a:prstGeom>
           <a:solidFill>
-            <a:srgbClr val="1A2332"/>
+            <a:srgbClr val="1A2026"/>
           </a:solidFill>
           <a:ln/>
         </p:spPr>
@@ -8908,7 +8908,7 @@
             <a:r>
               <a:rPr lang="en-US" sz="900" dirty="0">
                 <a:solidFill>
-                  <a:srgbClr val="94A3B8"/>
+                  <a:srgbClr val="8994A0"/>
                 </a:solidFill>
                 <a:latin typeface="Calibri" pitchFamily="34" charset="0"/>
                 <a:ea typeface="Calibri" pitchFamily="34" charset="-122"/>
@@ -8937,7 +8937,7 @@
             </a:avLst>
           </a:prstGeom>
           <a:solidFill>
-            <a:srgbClr val="1A2332"/>
+            <a:srgbClr val="1A2026"/>
           </a:solidFill>
           <a:ln/>
         </p:spPr>
@@ -9032,7 +9032,7 @@
             <a:r>
               <a:rPr lang="en-US" sz="900" dirty="0">
                 <a:solidFill>
-                  <a:srgbClr val="94A3B8"/>
+                  <a:srgbClr val="8994A0"/>
                 </a:solidFill>
                 <a:latin typeface="Calibri" pitchFamily="34" charset="0"/>
                 <a:ea typeface="Calibri" pitchFamily="34" charset="-122"/>
@@ -9061,7 +9061,7 @@
             </a:avLst>
           </a:prstGeom>
           <a:solidFill>
-            <a:srgbClr val="1A2332"/>
+            <a:srgbClr val="1A2026"/>
           </a:solidFill>
           <a:ln/>
         </p:spPr>
@@ -9146,7 +9146,7 @@
             </a:avLst>
           </a:prstGeom>
           <a:solidFill>
-            <a:srgbClr val="1A2332"/>
+            <a:srgbClr val="1A2026"/>
           </a:solidFill>
           <a:ln/>
         </p:spPr>
@@ -9241,7 +9241,7 @@
             <a:r>
               <a:rPr lang="en-US" sz="900" dirty="0">
                 <a:solidFill>
-                  <a:srgbClr val="94A3B8"/>
+                  <a:srgbClr val="8994A0"/>
                 </a:solidFill>
                 <a:latin typeface="Calibri" pitchFamily="34" charset="0"/>
                 <a:ea typeface="Calibri" pitchFamily="34" charset="-122"/>
@@ -9267,7 +9267,7 @@
     <p:bg>
       <p:bgPr>
         <a:solidFill>
-          <a:srgbClr val="1A2332"/>
+          <a:srgbClr val="1A2026"/>
         </a:solidFill>
       </p:bgPr>
     </p:bg>
@@ -9336,7 +9336,7 @@
             <a:r>
               <a:rPr lang="en-US" sz="1200" b="1" spc="300" kern="0" dirty="0">
                 <a:solidFill>
-                  <a:srgbClr val="F59E0B"/>
+                  <a:srgbClr val="5BC1B8"/>
                 </a:solidFill>
                 <a:latin typeface="Calibri" pitchFamily="34" charset="0"/>
                 <a:ea typeface="Calibri" pitchFamily="34" charset="-122"/>
@@ -9404,7 +9404,7 @@
             </a:avLst>
           </a:prstGeom>
           <a:solidFill>
-            <a:srgbClr val="0F1419"/>
+            <a:srgbClr val="0F1214"/>
           </a:solidFill>
           <a:ln/>
         </p:spPr>
@@ -9426,7 +9426,7 @@
             </a:avLst>
           </a:prstGeom>
           <a:solidFill>
-            <a:srgbClr val="EC4899"/>
+            <a:srgbClr val="3B968F"/>
           </a:solidFill>
           <a:ln/>
         </p:spPr>
@@ -9440,7 +9440,7 @@
             <a:r>
               <a:rPr lang="en-US" sz="1500" b="1" dirty="0">
                 <a:solidFill>
-                  <a:srgbClr val="0F1419"/>
+                  <a:srgbClr val="0F1214"/>
                 </a:solidFill>
                 <a:latin typeface="Calibri" pitchFamily="34" charset="0"/>
                 <a:ea typeface="Calibri" pitchFamily="34" charset="-122"/>
@@ -9508,7 +9508,7 @@
             </a:avLst>
           </a:prstGeom>
           <a:solidFill>
-            <a:srgbClr val="0F1419"/>
+            <a:srgbClr val="0F1214"/>
           </a:solidFill>
           <a:ln/>
         </p:spPr>
@@ -9530,7 +9530,7 @@
             </a:avLst>
           </a:prstGeom>
           <a:solidFill>
-            <a:srgbClr val="EC4899"/>
+            <a:srgbClr val="3B968F"/>
           </a:solidFill>
           <a:ln/>
         </p:spPr>
@@ -9544,7 +9544,7 @@
             <a:r>
               <a:rPr lang="en-US" sz="1500" b="1" dirty="0">
                 <a:solidFill>
-                  <a:srgbClr val="0F1419"/>
+                  <a:srgbClr val="0F1214"/>
                 </a:solidFill>
                 <a:latin typeface="Calibri" pitchFamily="34" charset="0"/>
                 <a:ea typeface="Calibri" pitchFamily="34" charset="-122"/>
@@ -9612,7 +9612,7 @@
             </a:avLst>
           </a:prstGeom>
           <a:solidFill>
-            <a:srgbClr val="0F1419"/>
+            <a:srgbClr val="0F1214"/>
           </a:solidFill>
           <a:ln/>
         </p:spPr>
@@ -9634,7 +9634,7 @@
             </a:avLst>
           </a:prstGeom>
           <a:solidFill>
-            <a:srgbClr val="EC4899"/>
+            <a:srgbClr val="3B968F"/>
           </a:solidFill>
           <a:ln/>
         </p:spPr>
@@ -9648,7 +9648,7 @@
             <a:r>
               <a:rPr lang="en-US" sz="1500" b="1" dirty="0">
                 <a:solidFill>
-                  <a:srgbClr val="0F1419"/>
+                  <a:srgbClr val="0F1214"/>
                 </a:solidFill>
                 <a:latin typeface="Calibri" pitchFamily="34" charset="0"/>
                 <a:ea typeface="Calibri" pitchFamily="34" charset="-122"/>
@@ -9716,7 +9716,7 @@
             </a:avLst>
           </a:prstGeom>
           <a:solidFill>
-            <a:srgbClr val="0F1419"/>
+            <a:srgbClr val="0F1214"/>
           </a:solidFill>
           <a:ln/>
         </p:spPr>
@@ -9738,7 +9738,7 @@
             </a:avLst>
           </a:prstGeom>
           <a:solidFill>
-            <a:srgbClr val="EC4899"/>
+            <a:srgbClr val="3B968F"/>
           </a:solidFill>
           <a:ln/>
         </p:spPr>
@@ -9752,7 +9752,7 @@
             <a:r>
               <a:rPr lang="en-US" sz="1500" b="1" dirty="0">
                 <a:solidFill>
-                  <a:srgbClr val="0F1419"/>
+                  <a:srgbClr val="0F1214"/>
                 </a:solidFill>
                 <a:latin typeface="Calibri" pitchFamily="34" charset="0"/>
                 <a:ea typeface="Calibri" pitchFamily="34" charset="-122"/>
@@ -9820,7 +9820,7 @@
             </a:avLst>
           </a:prstGeom>
           <a:solidFill>
-            <a:srgbClr val="0F1419"/>
+            <a:srgbClr val="0F1214"/>
           </a:solidFill>
           <a:ln/>
         </p:spPr>
@@ -9842,7 +9842,7 @@
             </a:avLst>
           </a:prstGeom>
           <a:solidFill>
-            <a:srgbClr val="EC4899"/>
+            <a:srgbClr val="3B968F"/>
           </a:solidFill>
           <a:ln/>
         </p:spPr>
@@ -9856,7 +9856,7 @@
             <a:r>
               <a:rPr lang="en-US" sz="1500" b="1" dirty="0">
                 <a:solidFill>
-                  <a:srgbClr val="0F1419"/>
+                  <a:srgbClr val="0F1214"/>
                 </a:solidFill>
                 <a:latin typeface="Calibri" pitchFamily="34" charset="0"/>
                 <a:ea typeface="Calibri" pitchFamily="34" charset="-122"/>
@@ -9921,7 +9921,7 @@
     <p:bg>
       <p:bgPr>
         <a:solidFill>
-          <a:srgbClr val="0F1419"/>
+          <a:srgbClr val="0F1214"/>
         </a:solidFill>
       </p:bgPr>
     </p:bg>
@@ -9956,7 +9956,7 @@
             </a:avLst>
           </a:prstGeom>
           <a:solidFill>
-            <a:srgbClr val="2D1B1B"/>
+            <a:srgbClr val="2A1414"/>
           </a:solidFill>
           <a:ln/>
         </p:spPr>
@@ -9976,7 +9976,7 @@
             <a:avLst/>
           </a:prstGeom>
           <a:solidFill>
-            <a:srgbClr val="EF4444"/>
+            <a:srgbClr val="DC2626"/>
           </a:solidFill>
           <a:ln/>
         </p:spPr>
@@ -10032,7 +10032,7 @@
             <a:r>
               <a:rPr lang="en-US" sz="1200" b="1" spc="300" kern="0" dirty="0">
                 <a:solidFill>
-                  <a:srgbClr val="EF4444"/>
+                  <a:srgbClr val="DC2626"/>
                 </a:solidFill>
                 <a:latin typeface="Calibri" pitchFamily="34" charset="0"/>
                 <a:ea typeface="Calibri" pitchFamily="34" charset="-122"/>
@@ -10097,7 +10097,7 @@
     <p:bg>
       <p:bgPr>
         <a:solidFill>
-          <a:srgbClr val="0D2137"/>
+          <a:srgbClr val="12181D"/>
         </a:solidFill>
       </p:bgPr>
     </p:bg>
@@ -10178,7 +10178,7 @@
             <a:avLst/>
           </a:prstGeom>
           <a:solidFill>
-            <a:srgbClr val="EC4899">
+            <a:srgbClr val="3B968F">
               <a:alpha val="6000"/>
             </a:srgbClr>
           </a:solidFill>
@@ -10200,7 +10200,7 @@
             <a:avLst/>
           </a:prstGeom>
           <a:solidFill>
-            <a:srgbClr val="EC4899"/>
+            <a:srgbClr val="3B968F"/>
           </a:solidFill>
           <a:ln/>
         </p:spPr>
@@ -10232,7 +10232,7 @@
             <a:r>
               <a:rPr lang="en-US" sz="1200" b="1" spc="200" kern="0" dirty="0">
                 <a:solidFill>
-                  <a:srgbClr val="EC4899"/>
+                  <a:srgbClr val="3B968F"/>
                 </a:solidFill>
                 <a:latin typeface="Calibri" pitchFamily="34" charset="0"/>
                 <a:ea typeface="Calibri" pitchFamily="34" charset="-122"/>
@@ -10310,7 +10310,7 @@
             <a:r>
               <a:rPr lang="en-US" sz="1100" dirty="0">
                 <a:solidFill>
-                  <a:srgbClr val="64748B"/>
+                  <a:srgbClr val="5B6672"/>
                 </a:solidFill>
                 <a:latin typeface="Calibri" pitchFamily="34" charset="0"/>
                 <a:ea typeface="Calibri" pitchFamily="34" charset="-122"/>
